--- a/skills/dsh-academic-ppt/references/templates/results.pptx
+++ b/skills/dsh-academic-ppt/references/templates/results.pptx
@@ -1882,7 +1882,7 @@
 内容职责：主要效应；统计口径；解释边界。
 建议讲述时间只是排练起点，按实际内容调整。
 参考文献（完整题名）
-T1 · Full article title: connecting decision models, experimental evidence and independent validation in crop cultivation · 期刊与卷页（替换） · 2026 · 待替换 · 书目占位，非真实文献</a:t>
+T1 · Full article title: connecting decision models, experimental evidence and independent validation in crop cultivation · 期刊与卷页（替换） · 2026 · 书目占位；图表均为合成示例 · 书目占位，非真实文献</a:t>
             </a:r>
             <a:endParaRPr lang="en-US" dirty="0"/>
           </a:p>
@@ -1974,8 +1974,15 @@
 全部文本为填写指引，图表值是合成演示值，不是任何研究结果。使用前替换论文、数据、原图与来源。
 内容职责：终点一的解释；终点二的解释。
 建议讲述时间只是排练起点，按实际内容调整。
+原图来源：T1
+示例图
+独立观测分布；合成演示值
+https://github.com/YuZhou0311/dsh-academic-ppt
+原创排版教学示例 v0.3.0
+MIT; all plotted values are synthetic
+完整原图，无裁切
 参考文献（完整题名）
-T1 · Full article title: connecting decision models, experimental evidence and independent validation in crop cultivation · 期刊与卷页（替换） · 2026 · 待替换 · 书目占位，非真实文献</a:t>
+T1 · Full article title: connecting decision models, experimental evidence and independent validation in crop cultivation · 期刊与卷页（替换） · 2026 · 书目占位；图表均为合成示例 · 书目占位，非真实文献</a:t>
             </a:r>
             <a:endParaRPr lang="en-US" dirty="0"/>
           </a:p>
@@ -2063,12 +2070,12 @@
           <a:p>
             <a:r>
               <a:rPr lang="en-US" dirty="0"/>
-              <a:t>本页为原创学术版式模板，ID results-ablation。消融表与组件作用说明相邻，底部列出估计不确定性。
+              <a:t>本页为原创学术版式模板，ID results-ablation。左侧表格下方紧接可支持的效应结论，右侧说明组件机制与替代解释；短表按实际行高收紧。
 全部文本为填写指引，图表值是合成演示值，不是任何研究结果。使用前替换论文、数据、原图与来源。
 内容职责：组件作用；替代解释；不确定性与重复。
 建议讲述时间只是排练起点，按实际内容调整。
 参考文献（完整题名）
-T1 · Full article title: connecting decision models, experimental evidence and independent validation in crop cultivation · 期刊与卷页（替换） · 2026 · 待替换 · 书目占位，非真实文献</a:t>
+T1 · Full article title: connecting decision models, experimental evidence and independent validation in crop cultivation · 期刊与卷页（替换） · 2026 · 书目占位；图表均为合成示例 · 书目占位，非真实文献</a:t>
             </a:r>
             <a:endParaRPr lang="en-US" dirty="0"/>
           </a:p>
@@ -2161,7 +2168,7 @@
 内容职责：测试环境；最差情形；平均值以外的结论。
 建议讲述时间只是排练起点，按实际内容调整。
 参考文献（完整题名）
-T1 · Full article title: connecting decision models, experimental evidence and independent validation in crop cultivation · 期刊与卷页（替换） · 2026 · 待替换 · 书目占位，非真实文献</a:t>
+T1 · Full article title: connecting decision models, experimental evidence and independent validation in crop cultivation · 期刊与卷页（替换） · 2026 · 书目占位；图表均为合成示例 · 书目占位，非真实文献</a:t>
             </a:r>
             <a:endParaRPr lang="en-US" dirty="0"/>
           </a:p>
@@ -2254,7 +2261,7 @@
 内容职责：收益指标；风险指标；资源代价。
 建议讲述时间只是排练起点，按实际内容调整。
 参考文献（完整题名）
-T1 · Full article title: connecting decision models, experimental evidence and independent validation in crop cultivation · 期刊与卷页（替换） · 2026 · 待替换 · 书目占位，非真实文献</a:t>
+T1 · Full article title: connecting decision models, experimental evidence and independent validation in crop cultivation · 期刊与卷页（替换） · 2026 · 书目占位；图表均为合成示例 · 书目占位，非真实文献</a:t>
             </a:r>
             <a:endParaRPr lang="en-US" dirty="0"/>
           </a:p>
@@ -2342,12 +2349,12 @@
           <a:p>
             <a:r>
               <a:rPr lang="en-US" dirty="0"/>
-              <a:t>本页为原创学术版式模板，ID results-error-analysis。原生错误分类表与实际评价流程并置，避免评价口径混用。
+              <a:t>本页为原创学术版式模板，ID results-error-analysis。先交代共同评价条件，再以通栏表对齐任务分母，下方分别说明任务构造与失败解释。
 全部文本为填写指引，图表值是合成演示值，不是任何研究结果。使用前替换论文、数据、原图与来源。
 内容职责：评价者与尺度；失败集中在哪一步；分母与统计单位。
 建议讲述时间只是排练起点，按实际内容调整。
 参考文献（完整题名）
-T1 · Full article title: connecting decision models, experimental evidence and independent validation in crop cultivation · 期刊与卷页（替换） · 2026 · 待替换 · 书目占位，非真实文献</a:t>
+T1 · Full article title: connecting decision models, experimental evidence and independent validation in crop cultivation · 期刊与卷页（替换） · 2026 · 书目占位；图表均为合成示例 · 书目占位，非真实文献</a:t>
             </a:r>
             <a:endParaRPr lang="en-US" dirty="0"/>
           </a:p>
@@ -2791,14 +2798,14 @@
       </p:sp>
       <p:sp>
         <p:nvSpPr>
-          <p:cNvPr id="4" name="T19/kicker"/>
-          <p:cNvSpPr/>
-          <p:nvPr/>
-        </p:nvSpPr>
-        <p:spPr>
-          <a:xfrm>
-            <a:off x="457200" y="152400"/>
-            <a:ext cx="11277600" cy="190500"/>
+          <p:cNvPr id="4" name="T19/title"/>
+          <p:cNvSpPr/>
+          <p:nvPr/>
+        </p:nvSpPr>
+        <p:spPr>
+          <a:xfrm>
+            <a:off x="457200" y="209550"/>
+            <a:ext cx="11277600" cy="438150"/>
           </a:xfrm>
           <a:prstGeom prst="rect">
             <a:avLst/>
@@ -2812,83 +2819,64 @@
           <a:p>
             <a:pPr algn="l" indent="0" marL="0">
               <a:lnSpc>
-                <a:spcPts val="1320"/>
-              </a:lnSpc>
-              <a:buNone/>
-            </a:pPr>
-            <a:r>
-              <a:rPr lang="zh-CN" altLang="en-US" sz="1200" dirty="0">
-                <a:solidFill>
-                  <a:srgbClr val="515B68"/>
-                </a:solidFill>
-                <a:latin typeface="Noto Sans CJK SC" pitchFamily="34" charset="0"/>
-                <a:ea typeface="Noto Sans CJK SC" pitchFamily="34" charset="-122"/>
-                <a:cs typeface="Noto Sans CJK SC" pitchFamily="34" charset="-120"/>
-              </a:rPr>
-              <a:t>结构模板 / 占位说明与合成数据</a:t>
-            </a:r>
-            <a:endParaRPr lang="zh-CN" sz="1200" dirty="0"/>
+                <a:spcPts val="3360"/>
+              </a:lnSpc>
+              <a:buNone/>
+            </a:pPr>
+            <a:r>
+              <a:rPr lang="zh-CN" altLang="en-US" sz="3000" b="1" dirty="0">
+                <a:solidFill>
+                  <a:srgbClr val="1C2430"/>
+                </a:solidFill>
+                <a:latin typeface="Noto Sans CJK SC" pitchFamily="34" charset="0"/>
+                <a:ea typeface="Noto Sans CJK SC" pitchFamily="34" charset="-122"/>
+                <a:cs typeface="Noto Sans CJK SC" pitchFamily="34" charset="-120"/>
+              </a:rPr>
+              <a:t>主结果与统计口径</a:t>
+            </a:r>
+            <a:endParaRPr lang="zh-CN" sz="3000" dirty="0"/>
           </a:p>
         </p:txBody>
       </p:sp>
       <p:sp>
         <p:nvSpPr>
-          <p:cNvPr id="5" name="T19/title"/>
-          <p:cNvSpPr/>
-          <p:nvPr/>
-        </p:nvSpPr>
-        <p:spPr>
-          <a:xfrm>
-            <a:off x="457200" y="381000"/>
-            <a:ext cx="11277600" cy="400050"/>
-          </a:xfrm>
-          <a:prstGeom prst="rect">
+          <p:cNvPr id="5" name="T19/header-rule"/>
+          <p:cNvSpPr/>
+          <p:nvPr/>
+        </p:nvSpPr>
+        <p:spPr>
+          <a:xfrm>
+            <a:off x="457200" y="752475"/>
+            <a:ext cx="11277600" cy="0"/>
+          </a:xfrm>
+          <a:prstGeom prst="line">
             <a:avLst/>
           </a:prstGeom>
           <a:noFill/>
-          <a:ln/>
-        </p:spPr>
-        <p:txBody>
-          <a:bodyPr wrap="none" lIns="0" tIns="0" rIns="0" bIns="0" rtlCol="0" anchor="t"/>
-          <a:lstStyle/>
-          <a:p>
-            <a:pPr algn="l" indent="0" marL="0">
-              <a:lnSpc>
-                <a:spcPts val="2856"/>
-              </a:lnSpc>
-              <a:buNone/>
-            </a:pPr>
-            <a:r>
-              <a:rPr lang="zh-CN" altLang="en-US" sz="2550" b="1" dirty="0">
-                <a:solidFill>
-                  <a:srgbClr val="1C2430"/>
-                </a:solidFill>
-                <a:latin typeface="Noto Sans CJK SC" pitchFamily="34" charset="0"/>
-                <a:ea typeface="Noto Sans CJK SC" pitchFamily="34" charset="-122"/>
-                <a:cs typeface="Noto Sans CJK SC" pitchFamily="34" charset="-120"/>
-              </a:rPr>
-              <a:t>主结果与统计口径</a:t>
-            </a:r>
-            <a:endParaRPr lang="zh-CN" sz="2550" dirty="0"/>
-          </a:p>
-        </p:txBody>
-      </p:sp>
-      <p:sp>
-        <p:nvSpPr>
-          <p:cNvPr id="6" name="T19/header-rule"/>
-          <p:cNvSpPr/>
-          <p:nvPr/>
-        </p:nvSpPr>
-        <p:spPr>
-          <a:xfrm>
-            <a:off x="457200" y="876300"/>
-            <a:ext cx="11277600" cy="0"/>
+          <a:ln w="10478">
+            <a:solidFill>
+              <a:srgbClr val="BEC8D4"/>
+            </a:solidFill>
+            <a:prstDash val="solid"/>
+          </a:ln>
+        </p:spPr>
+      </p:sp>
+      <p:sp>
+        <p:nvSpPr>
+          <p:cNvPr id="6" name="T19/header-accent"/>
+          <p:cNvSpPr/>
+          <p:nvPr/>
+        </p:nvSpPr>
+        <p:spPr>
+          <a:xfrm>
+            <a:off x="457200" y="752475"/>
+            <a:ext cx="704850" cy="0"/>
           </a:xfrm>
           <a:prstGeom prst="line">
             <a:avLst/>
           </a:prstGeom>
           <a:noFill/>
-          <a:ln w="11430">
+          <a:ln w="28575">
             <a:solidFill>
               <a:srgbClr val="173C70"/>
             </a:solidFill>
@@ -2904,8 +2892,8 @@
         </p:nvSpPr>
         <p:spPr>
           <a:xfrm>
-            <a:off x="457200" y="5867400"/>
-            <a:ext cx="7696200" cy="266700"/>
+            <a:off x="457200" y="5855684"/>
+            <a:ext cx="7696200" cy="276987"/>
           </a:xfrm>
           <a:prstGeom prst="rect">
             <a:avLst/>
@@ -2945,8 +2933,8 @@
           <p:nvPr/>
         </p:nvGraphicFramePr>
         <p:xfrm>
-          <a:off x="457200" y="1409700"/>
-          <a:ext cx="7696200" cy="4305300"/>
+          <a:off x="457200" y="1226534"/>
+          <a:ext cx="7696200" cy="4470845"/>
         </p:xfrm>
         <a:graphic xmlns:a="http://schemas.openxmlformats.org/drawingml/2006/main">
           <a:graphicData uri="http://schemas.openxmlformats.org/drawingml/2006/chart">
@@ -2956,19 +2944,21 @@
       </p:graphicFrame>
       <p:sp>
         <p:nvSpPr>
-          <p:cNvPr id="9" name="T19/card/region-1/base-rule"/>
-          <p:cNvSpPr/>
-          <p:nvPr/>
-        </p:nvSpPr>
-        <p:spPr>
-          <a:xfrm>
-            <a:off x="8458200" y="2781300"/>
-            <a:ext cx="3276600" cy="0"/>
-          </a:xfrm>
-          <a:prstGeom prst="line">
-            <a:avLst/>
-          </a:prstGeom>
-          <a:noFill/>
+          <p:cNvPr id="9" name="T19/card/region-1/frame"/>
+          <p:cNvSpPr/>
+          <p:nvPr/>
+        </p:nvSpPr>
+        <p:spPr>
+          <a:xfrm>
+            <a:off x="8458200" y="1206722"/>
+            <a:ext cx="3276600" cy="1444181"/>
+          </a:xfrm>
+          <a:prstGeom prst="rect">
+            <a:avLst/>
+          </a:prstGeom>
+          <a:solidFill>
+            <a:srgbClr val="FFFFFF"/>
+          </a:solidFill>
           <a:ln w="10478">
             <a:solidFill>
               <a:srgbClr val="BEC8D4"/>
@@ -2979,20 +2969,20 @@
       </p:sp>
       <p:sp>
         <p:nvSpPr>
-          <p:cNvPr id="10" name="T19/card/region-1/side-mark"/>
-          <p:cNvSpPr/>
-          <p:nvPr/>
-        </p:nvSpPr>
-        <p:spPr>
-          <a:xfrm>
-            <a:off x="8458200" y="1409700"/>
-            <a:ext cx="47625" cy="295275"/>
+          <p:cNvPr id="10" name="T19/card/region-1/heading-fill"/>
+          <p:cNvSpPr/>
+          <p:nvPr/>
+        </p:nvSpPr>
+        <p:spPr>
+          <a:xfrm>
+            <a:off x="8467725" y="1216247"/>
+            <a:ext cx="3257550" cy="371475"/>
           </a:xfrm>
           <a:prstGeom prst="rect">
             <a:avLst/>
           </a:prstGeom>
           <a:solidFill>
-            <a:srgbClr val="173C70"/>
+            <a:srgbClr val="E9F4F0"/>
           </a:solidFill>
           <a:ln w="12700">
             <a:solidFill>
@@ -3006,117 +2996,13 @@
       </p:sp>
       <p:sp>
         <p:nvSpPr>
-          <p:cNvPr id="11" name="T19/card/region-1/title"/>
-          <p:cNvSpPr/>
-          <p:nvPr/>
-        </p:nvSpPr>
-        <p:spPr>
-          <a:xfrm>
-            <a:off x="8610600" y="1409700"/>
-            <a:ext cx="3124200" cy="304800"/>
-          </a:xfrm>
-          <a:prstGeom prst="rect">
-            <a:avLst/>
-          </a:prstGeom>
-          <a:noFill/>
-          <a:ln/>
-        </p:spPr>
-        <p:txBody>
-          <a:bodyPr wrap="none" lIns="0" tIns="0" rIns="0" bIns="0" rtlCol="0" anchor="t"/>
-          <a:lstStyle/>
-          <a:p>
-            <a:pPr algn="l" indent="0" marL="0">
-              <a:lnSpc>
-                <a:spcPts val="2070"/>
-              </a:lnSpc>
-              <a:buNone/>
-            </a:pPr>
-            <a:r>
-              <a:rPr lang="zh-CN" altLang="en-US" sz="1800" b="1" dirty="0">
-                <a:solidFill>
-                  <a:srgbClr val="173C70"/>
-                </a:solidFill>
-                <a:latin typeface="Noto Sans CJK SC" pitchFamily="34" charset="0"/>
-                <a:ea typeface="Noto Sans CJK SC" pitchFamily="34" charset="-122"/>
-                <a:cs typeface="Noto Sans CJK SC" pitchFamily="34" charset="-120"/>
-              </a:rPr>
-              <a:t>主要效应</a:t>
-            </a:r>
-            <a:endParaRPr lang="zh-CN" sz="1800" dirty="0"/>
-          </a:p>
-        </p:txBody>
-      </p:sp>
-      <p:sp>
-        <p:nvSpPr>
-          <p:cNvPr id="12" name="T19/card/region-1/body"/>
-          <p:cNvSpPr/>
-          <p:nvPr/>
-        </p:nvSpPr>
-        <p:spPr>
-          <a:xfrm>
-            <a:off x="8610600" y="1828800"/>
-            <a:ext cx="3124200" cy="857250"/>
-          </a:xfrm>
-          <a:prstGeom prst="rect">
-            <a:avLst/>
-          </a:prstGeom>
-          <a:noFill/>
-          <a:ln/>
-        </p:spPr>
-        <p:txBody>
-          <a:bodyPr wrap="none" lIns="0" tIns="0" rIns="0" bIns="0" rtlCol="0" anchor="t"/>
-          <a:lstStyle/>
-          <a:p>
-            <a:pPr algn="l" indent="0" marL="0">
-              <a:lnSpc>
-                <a:spcPts val="2139"/>
-              </a:lnSpc>
-              <a:buNone/>
-            </a:pPr>
-            <a:r>
-              <a:rPr lang="zh-CN" altLang="en-US" sz="1725" dirty="0">
-                <a:solidFill>
-                  <a:srgbClr val="1C2430"/>
-                </a:solidFill>
-                <a:latin typeface="Noto Sans CJK SC" pitchFamily="34" charset="0"/>
-                <a:ea typeface="Noto Sans CJK SC" pitchFamily="34" charset="-122"/>
-                <a:cs typeface="Noto Sans CJK SC" pitchFamily="34" charset="-120"/>
-              </a:rPr>
-              <a:t>报告效应大小与比较基线</a:t>
-            </a:r>
-            <a:endParaRPr lang="zh-CN" sz="1725" dirty="0"/>
-          </a:p>
-          <a:p>
-            <a:pPr algn="l" indent="0" marL="0">
-              <a:lnSpc>
-                <a:spcPts val="2139"/>
-              </a:lnSpc>
-              <a:buNone/>
-            </a:pPr>
-            <a:r>
-              <a:rPr lang="zh-CN" altLang="en-US" sz="1725" dirty="0">
-                <a:solidFill>
-                  <a:srgbClr val="1C2430"/>
-                </a:solidFill>
-                <a:latin typeface="Noto Sans CJK SC" pitchFamily="34" charset="0"/>
-                <a:ea typeface="Noto Sans CJK SC" pitchFamily="34" charset="-122"/>
-                <a:cs typeface="Noto Sans CJK SC" pitchFamily="34" charset="-120"/>
-              </a:rPr>
-              <a:t>模板图中的数字仅为合成演示</a:t>
-            </a:r>
-            <a:endParaRPr lang="zh-CN" sz="1725" dirty="0"/>
-          </a:p>
-        </p:txBody>
-      </p:sp>
-      <p:sp>
-        <p:nvSpPr>
-          <p:cNvPr id="13" name="T19/card/region-2/heading-rule"/>
-          <p:cNvSpPr/>
-          <p:nvPr/>
-        </p:nvSpPr>
-        <p:spPr>
-          <a:xfrm>
-            <a:off x="8458200" y="3371850"/>
+          <p:cNvPr id="11" name="T19/card/region-1/heading-rule"/>
+          <p:cNvSpPr/>
+          <p:nvPr/>
+        </p:nvSpPr>
+        <p:spPr>
+          <a:xfrm>
+            <a:off x="8458200" y="1587722"/>
             <a:ext cx="3276600" cy="0"/>
           </a:xfrm>
           <a:prstGeom prst="line">
@@ -3133,13 +3019,211 @@
       </p:sp>
       <p:sp>
         <p:nvSpPr>
-          <p:cNvPr id="14" name="T19/card/region-2/heading-mark"/>
-          <p:cNvSpPr/>
-          <p:nvPr/>
-        </p:nvSpPr>
-        <p:spPr>
-          <a:xfrm>
-            <a:off x="8458200" y="3371850"/>
+          <p:cNvPr id="12" name="T19/card/region-1/title"/>
+          <p:cNvSpPr/>
+          <p:nvPr/>
+        </p:nvSpPr>
+        <p:spPr>
+          <a:xfrm>
+            <a:off x="8582025" y="1254347"/>
+            <a:ext cx="3028950" cy="295275"/>
+          </a:xfrm>
+          <a:prstGeom prst="rect">
+            <a:avLst/>
+          </a:prstGeom>
+          <a:noFill/>
+          <a:ln/>
+        </p:spPr>
+        <p:txBody>
+          <a:bodyPr wrap="none" lIns="0" tIns="0" rIns="0" bIns="0" rtlCol="0" anchor="t"/>
+          <a:lstStyle/>
+          <a:p>
+            <a:pPr algn="l" indent="0" marL="0">
+              <a:lnSpc>
+                <a:spcPts val="2242"/>
+              </a:lnSpc>
+              <a:buNone/>
+            </a:pPr>
+            <a:r>
+              <a:rPr lang="zh-CN" altLang="en-US" sz="1950" b="1" dirty="0">
+                <a:solidFill>
+                  <a:srgbClr val="146C63"/>
+                </a:solidFill>
+                <a:latin typeface="Noto Sans CJK SC" pitchFamily="34" charset="0"/>
+                <a:ea typeface="Noto Sans CJK SC" pitchFamily="34" charset="-122"/>
+                <a:cs typeface="Noto Sans CJK SC" pitchFamily="34" charset="-120"/>
+              </a:rPr>
+              <a:t>主要效应</a:t>
+            </a:r>
+            <a:endParaRPr lang="zh-CN" sz="1950" dirty="0"/>
+          </a:p>
+        </p:txBody>
+      </p:sp>
+      <p:sp>
+        <p:nvSpPr>
+          <p:cNvPr id="13" name="T19/card/region-1/body"/>
+          <p:cNvSpPr/>
+          <p:nvPr/>
+        </p:nvSpPr>
+        <p:spPr>
+          <a:xfrm>
+            <a:off x="8591550" y="1692497"/>
+            <a:ext cx="3009900" cy="863156"/>
+          </a:xfrm>
+          <a:prstGeom prst="rect">
+            <a:avLst/>
+          </a:prstGeom>
+          <a:noFill/>
+          <a:ln/>
+        </p:spPr>
+        <p:txBody>
+          <a:bodyPr wrap="none" lIns="0" tIns="0" rIns="0" bIns="0" rtlCol="0" anchor="t"/>
+          <a:lstStyle/>
+          <a:p>
+            <a:pPr algn="l" indent="0" marL="0">
+              <a:lnSpc>
+                <a:spcPts val="2232"/>
+              </a:lnSpc>
+              <a:buNone/>
+            </a:pPr>
+            <a:r>
+              <a:rPr lang="zh-CN" altLang="en-US" sz="1800" dirty="0">
+                <a:solidFill>
+                  <a:srgbClr val="1C2430"/>
+                </a:solidFill>
+                <a:latin typeface="Noto Sans CJK SC" pitchFamily="34" charset="0"/>
+                <a:ea typeface="Noto Sans CJK SC" pitchFamily="34" charset="-122"/>
+                <a:cs typeface="Noto Sans CJK SC" pitchFamily="34" charset="-120"/>
+              </a:rPr>
+              <a:t>报告</a:t>
+            </a:r>
+            <a:pPr algn="l" indent="0" marL="0">
+              <a:lnSpc>
+                <a:spcPts val="2232"/>
+              </a:lnSpc>
+              <a:buNone/>
+            </a:pPr>
+            <a:r>
+              <a:rPr lang="zh-CN" altLang="en-US" sz="1800" b="1" dirty="0">
+                <a:solidFill>
+                  <a:srgbClr val="146C63"/>
+                </a:solidFill>
+                <a:latin typeface="Noto Sans CJK SC" pitchFamily="34" charset="0"/>
+                <a:ea typeface="Noto Sans CJK SC" pitchFamily="34" charset="-122"/>
+                <a:cs typeface="Noto Sans CJK SC" pitchFamily="34" charset="-120"/>
+              </a:rPr>
+              <a:t>效应大小</a:t>
+            </a:r>
+            <a:pPr algn="l" indent="0" marL="0">
+              <a:lnSpc>
+                <a:spcPts val="2232"/>
+              </a:lnSpc>
+              <a:buNone/>
+            </a:pPr>
+            <a:r>
+              <a:rPr lang="zh-CN" altLang="en-US" sz="1800" dirty="0">
+                <a:solidFill>
+                  <a:srgbClr val="1C2430"/>
+                </a:solidFill>
+                <a:latin typeface="Noto Sans CJK SC" pitchFamily="34" charset="0"/>
+                <a:ea typeface="Noto Sans CJK SC" pitchFamily="34" charset="-122"/>
+                <a:cs typeface="Noto Sans CJK SC" pitchFamily="34" charset="-120"/>
+              </a:rPr>
+              <a:t>与</a:t>
+            </a:r>
+            <a:pPr algn="l" indent="0" marL="0">
+              <a:lnSpc>
+                <a:spcPts val="2232"/>
+              </a:lnSpc>
+              <a:buNone/>
+            </a:pPr>
+            <a:r>
+              <a:rPr lang="zh-CN" altLang="en-US" sz="1800" b="1" dirty="0">
+                <a:solidFill>
+                  <a:srgbClr val="146C63"/>
+                </a:solidFill>
+                <a:latin typeface="Noto Sans CJK SC" pitchFamily="34" charset="0"/>
+                <a:ea typeface="Noto Sans CJK SC" pitchFamily="34" charset="-122"/>
+                <a:cs typeface="Noto Sans CJK SC" pitchFamily="34" charset="-120"/>
+              </a:rPr>
+              <a:t>比较基线</a:t>
+            </a:r>
+            <a:endParaRPr lang="zh-CN" sz="1800" dirty="0"/>
+          </a:p>
+          <a:p>
+            <a:pPr algn="l" indent="0" marL="0">
+              <a:lnSpc>
+                <a:spcPts val="2232"/>
+              </a:lnSpc>
+              <a:buNone/>
+            </a:pPr>
+            <a:r>
+              <a:rPr lang="zh-CN" altLang="en-US" sz="1800" dirty="0">
+                <a:solidFill>
+                  <a:srgbClr val="1C2430"/>
+                </a:solidFill>
+                <a:latin typeface="Noto Sans CJK SC" pitchFamily="34" charset="0"/>
+                <a:ea typeface="Noto Sans CJK SC" pitchFamily="34" charset="-122"/>
+                <a:cs typeface="Noto Sans CJK SC" pitchFamily="34" charset="-120"/>
+              </a:rPr>
+              <a:t>模板图中的数字仅为合成演</a:t>
+            </a:r>
+            <a:endParaRPr lang="zh-CN" sz="1800" dirty="0"/>
+          </a:p>
+          <a:p>
+            <a:pPr algn="l" indent="0" marL="0">
+              <a:lnSpc>
+                <a:spcPts val="2232"/>
+              </a:lnSpc>
+              <a:buNone/>
+            </a:pPr>
+            <a:r>
+              <a:rPr lang="zh-CN" altLang="en-US" sz="1800" dirty="0">
+                <a:solidFill>
+                  <a:srgbClr val="1C2430"/>
+                </a:solidFill>
+                <a:latin typeface="Noto Sans CJK SC" pitchFamily="34" charset="0"/>
+                <a:ea typeface="Noto Sans CJK SC" pitchFamily="34" charset="-122"/>
+                <a:cs typeface="Noto Sans CJK SC" pitchFamily="34" charset="-120"/>
+              </a:rPr>
+              <a:t>示</a:t>
+            </a:r>
+            <a:endParaRPr lang="zh-CN" sz="1800" dirty="0"/>
+          </a:p>
+        </p:txBody>
+      </p:sp>
+      <p:sp>
+        <p:nvSpPr>
+          <p:cNvPr id="14" name="T19/card/region-2/heading-rule"/>
+          <p:cNvSpPr/>
+          <p:nvPr/>
+        </p:nvSpPr>
+        <p:spPr>
+          <a:xfrm>
+            <a:off x="8458200" y="3250216"/>
+            <a:ext cx="3276600" cy="0"/>
+          </a:xfrm>
+          <a:prstGeom prst="line">
+            <a:avLst/>
+          </a:prstGeom>
+          <a:noFill/>
+          <a:ln w="9525">
+            <a:solidFill>
+              <a:srgbClr val="BEC8D4"/>
+            </a:solidFill>
+            <a:prstDash val="solid"/>
+          </a:ln>
+        </p:spPr>
+      </p:sp>
+      <p:sp>
+        <p:nvSpPr>
+          <p:cNvPr id="15" name="T19/card/region-2/heading-mark"/>
+          <p:cNvSpPr/>
+          <p:nvPr/>
+        </p:nvSpPr>
+        <p:spPr>
+          <a:xfrm>
+            <a:off x="8458200" y="3250216"/>
             <a:ext cx="342900" cy="0"/>
           </a:xfrm>
           <a:prstGeom prst="line">
@@ -3148,7 +3232,7 @@
           <a:noFill/>
           <a:ln w="17145">
             <a:solidFill>
-              <a:srgbClr val="173C70"/>
+              <a:srgbClr val="536A7A"/>
             </a:solidFill>
             <a:prstDash val="solid"/>
           </a:ln>
@@ -3156,13 +3240,13 @@
       </p:sp>
       <p:sp>
         <p:nvSpPr>
-          <p:cNvPr id="15" name="T19/card/region-2/title"/>
-          <p:cNvSpPr/>
-          <p:nvPr/>
-        </p:nvSpPr>
-        <p:spPr>
-          <a:xfrm>
-            <a:off x="8458200" y="3028950"/>
+          <p:cNvPr id="16" name="T19/card/region-2/title"/>
+          <p:cNvSpPr/>
+          <p:nvPr/>
+        </p:nvSpPr>
+        <p:spPr>
+          <a:xfrm>
+            <a:off x="8458200" y="2907316"/>
             <a:ext cx="3276600" cy="323850"/>
           </a:xfrm>
           <a:prstGeom prst="rect">
@@ -3177,14 +3261,14 @@
           <a:p>
             <a:pPr algn="l" indent="0" marL="0">
               <a:lnSpc>
-                <a:spcPts val="2156"/>
-              </a:lnSpc>
-              <a:buNone/>
-            </a:pPr>
-            <a:r>
-              <a:rPr lang="zh-CN" altLang="en-US" sz="1875" b="1" dirty="0">
-                <a:solidFill>
-                  <a:srgbClr val="173C70"/>
+                <a:spcPts val="2242"/>
+              </a:lnSpc>
+              <a:buNone/>
+            </a:pPr>
+            <a:r>
+              <a:rPr lang="zh-CN" altLang="en-US" sz="1950" b="1" dirty="0">
+                <a:solidFill>
+                  <a:srgbClr val="536A7A"/>
                 </a:solidFill>
                 <a:latin typeface="Noto Sans CJK SC" pitchFamily="34" charset="0"/>
                 <a:ea typeface="Noto Sans CJK SC" pitchFamily="34" charset="-122"/>
@@ -3192,20 +3276,20 @@
               </a:rPr>
               <a:t>统计口径</a:t>
             </a:r>
-            <a:endParaRPr lang="zh-CN" sz="1875" dirty="0"/>
+            <a:endParaRPr lang="zh-CN" sz="1950" dirty="0"/>
           </a:p>
         </p:txBody>
       </p:sp>
       <p:sp>
         <p:nvSpPr>
-          <p:cNvPr id="16" name="T19/card/region-2/body"/>
-          <p:cNvSpPr/>
-          <p:nvPr/>
-        </p:nvSpPr>
-        <p:spPr>
-          <a:xfrm>
-            <a:off x="8458200" y="3505200"/>
-            <a:ext cx="3276600" cy="838200"/>
+          <p:cNvPr id="17" name="T19/card/region-2/body"/>
+          <p:cNvSpPr/>
+          <p:nvPr/>
+        </p:nvSpPr>
+        <p:spPr>
+          <a:xfrm>
+            <a:off x="8458200" y="3383566"/>
+            <a:ext cx="3276600" cy="890968"/>
           </a:xfrm>
           <a:prstGeom prst="rect">
             <a:avLst/>
@@ -3232,7 +3316,24 @@
                 <a:ea typeface="Noto Sans CJK SC" pitchFamily="34" charset="-122"/>
                 <a:cs typeface="Noto Sans CJK SC" pitchFamily="34" charset="-120"/>
               </a:rPr>
-              <a:t>给出样本、聚合方法与不确定性</a:t>
+              <a:t>给出样本、聚合方法与</a:t>
+            </a:r>
+            <a:pPr algn="l" indent="0" marL="0">
+              <a:lnSpc>
+                <a:spcPts val="2232"/>
+              </a:lnSpc>
+              <a:buNone/>
+            </a:pPr>
+            <a:r>
+              <a:rPr lang="zh-CN" altLang="en-US" sz="1800" b="1" dirty="0">
+                <a:solidFill>
+                  <a:srgbClr val="536A7A"/>
+                </a:solidFill>
+                <a:latin typeface="Noto Sans CJK SC" pitchFamily="34" charset="0"/>
+                <a:ea typeface="Noto Sans CJK SC" pitchFamily="34" charset="-122"/>
+                <a:cs typeface="Noto Sans CJK SC" pitchFamily="34" charset="-120"/>
+              </a:rPr>
+              <a:t>不确定性</a:t>
             </a:r>
             <a:endParaRPr lang="zh-CN" sz="1800" dirty="0"/>
           </a:p>
@@ -3244,6 +3345,23 @@
               <a:buNone/>
             </a:pPr>
             <a:r>
+              <a:rPr lang="zh-CN" altLang="en-US" sz="1800" b="1" dirty="0">
+                <a:solidFill>
+                  <a:srgbClr val="536A7A"/>
+                </a:solidFill>
+                <a:latin typeface="Noto Sans CJK SC" pitchFamily="34" charset="0"/>
+                <a:ea typeface="Noto Sans CJK SC" pitchFamily="34" charset="-122"/>
+                <a:cs typeface="Noto Sans CJK SC" pitchFamily="34" charset="-120"/>
+              </a:rPr>
+              <a:t>误差条</a:t>
+            </a:r>
+            <a:pPr algn="l" indent="0" marL="0">
+              <a:lnSpc>
+                <a:spcPts val="2232"/>
+              </a:lnSpc>
+              <a:buNone/>
+            </a:pPr>
+            <a:r>
               <a:rPr lang="zh-CN" altLang="en-US" sz="1800" dirty="0">
                 <a:solidFill>
                   <a:srgbClr val="1C2430"/>
@@ -3252,7 +3370,7 @@
                 <a:ea typeface="Noto Sans CJK SC" pitchFamily="34" charset="-122"/>
                 <a:cs typeface="Noto Sans CJK SC" pitchFamily="34" charset="-120"/>
               </a:rPr>
-              <a:t>误差条含义不能只写 error</a:t>
+              <a:t>含义不能只写 error</a:t>
             </a:r>
             <a:endParaRPr lang="zh-CN" sz="1800" dirty="0"/>
           </a:p>
@@ -3260,21 +3378,19 @@
       </p:sp>
       <p:sp>
         <p:nvSpPr>
-          <p:cNvPr id="17" name="T19/card/region-3/frame"/>
-          <p:cNvSpPr/>
-          <p:nvPr/>
-        </p:nvSpPr>
-        <p:spPr>
-          <a:xfrm>
-            <a:off x="8458200" y="4724400"/>
-            <a:ext cx="3276600" cy="1276350"/>
-          </a:xfrm>
-          <a:prstGeom prst="rect">
-            <a:avLst/>
-          </a:prstGeom>
-          <a:solidFill>
-            <a:srgbClr val="FFFFFF"/>
-          </a:solidFill>
+          <p:cNvPr id="18" name="T19/card/region-3/base-rule"/>
+          <p:cNvSpPr/>
+          <p:nvPr/>
+        </p:nvSpPr>
+        <p:spPr>
+          <a:xfrm>
+            <a:off x="8458200" y="5994178"/>
+            <a:ext cx="3276600" cy="0"/>
+          </a:xfrm>
+          <a:prstGeom prst="line">
+            <a:avLst/>
+          </a:prstGeom>
+          <a:noFill/>
           <a:ln w="10478">
             <a:solidFill>
               <a:srgbClr val="BEC8D4"/>
@@ -3285,20 +3401,20 @@
       </p:sp>
       <p:sp>
         <p:nvSpPr>
-          <p:cNvPr id="18" name="T19/card/region-3/tab"/>
-          <p:cNvSpPr/>
-          <p:nvPr/>
-        </p:nvSpPr>
-        <p:spPr>
-          <a:xfrm>
-            <a:off x="8572500" y="4610100"/>
-            <a:ext cx="1181100" cy="320040"/>
+          <p:cNvPr id="19" name="T19/card/region-3/side-mark"/>
+          <p:cNvSpPr/>
+          <p:nvPr/>
+        </p:nvSpPr>
+        <p:spPr>
+          <a:xfrm>
+            <a:off x="8458200" y="4569047"/>
+            <a:ext cx="47625" cy="295275"/>
           </a:xfrm>
           <a:prstGeom prst="rect">
             <a:avLst/>
           </a:prstGeom>
           <a:solidFill>
-            <a:srgbClr val="903543"/>
+            <a:srgbClr val="A24736"/>
           </a:solidFill>
           <a:ln w="12700">
             <a:solidFill>
@@ -3312,14 +3428,14 @@
       </p:sp>
       <p:sp>
         <p:nvSpPr>
-          <p:cNvPr id="19" name="T19/card/region-3/title"/>
-          <p:cNvSpPr/>
-          <p:nvPr/>
-        </p:nvSpPr>
-        <p:spPr>
-          <a:xfrm>
-            <a:off x="8677275" y="4638675"/>
-            <a:ext cx="971550" cy="262890"/>
+          <p:cNvPr id="20" name="T19/card/region-3/title"/>
+          <p:cNvSpPr/>
+          <p:nvPr/>
+        </p:nvSpPr>
+        <p:spPr>
+          <a:xfrm>
+            <a:off x="8610600" y="4569047"/>
+            <a:ext cx="3124200" cy="304800"/>
           </a:xfrm>
           <a:prstGeom prst="rect">
             <a:avLst/>
@@ -3333,14 +3449,14 @@
           <a:p>
             <a:pPr algn="l" indent="0" marL="0">
               <a:lnSpc>
-                <a:spcPts val="2070"/>
-              </a:lnSpc>
-              <a:buNone/>
-            </a:pPr>
-            <a:r>
-              <a:rPr lang="zh-CN" altLang="en-US" sz="1800" b="1" dirty="0">
-                <a:solidFill>
-                  <a:srgbClr val="FFFFFF"/>
+                <a:spcPts val="2242"/>
+              </a:lnSpc>
+              <a:buNone/>
+            </a:pPr>
+            <a:r>
+              <a:rPr lang="zh-CN" altLang="en-US" sz="1950" b="1" dirty="0">
+                <a:solidFill>
+                  <a:srgbClr val="A24736"/>
                 </a:solidFill>
                 <a:latin typeface="Noto Sans CJK SC" pitchFamily="34" charset="0"/>
                 <a:ea typeface="Noto Sans CJK SC" pitchFamily="34" charset="-122"/>
@@ -3348,20 +3464,20 @@
               </a:rPr>
               <a:t>解释边界</a:t>
             </a:r>
-            <a:endParaRPr lang="zh-CN" sz="1800" dirty="0"/>
+            <a:endParaRPr lang="zh-CN" sz="1950" dirty="0"/>
           </a:p>
         </p:txBody>
       </p:sp>
       <p:sp>
         <p:nvSpPr>
-          <p:cNvPr id="20" name="T19/card/region-3/body"/>
-          <p:cNvSpPr/>
-          <p:nvPr/>
-        </p:nvSpPr>
-        <p:spPr>
-          <a:xfrm>
-            <a:off x="8591550" y="5073015"/>
-            <a:ext cx="3009900" cy="832485"/>
+          <p:cNvPr id="21" name="T19/card/region-3/body"/>
+          <p:cNvSpPr/>
+          <p:nvPr/>
+        </p:nvSpPr>
+        <p:spPr>
+          <a:xfrm>
+            <a:off x="8610600" y="4988147"/>
+            <a:ext cx="3124200" cy="910780"/>
           </a:xfrm>
           <a:prstGeom prst="rect">
             <a:avLst/>
@@ -3375,12 +3491,12 @@
           <a:p>
             <a:pPr algn="l" indent="0" marL="0">
               <a:lnSpc>
-                <a:spcPts val="2139"/>
-              </a:lnSpc>
-              <a:buNone/>
-            </a:pPr>
-            <a:r>
-              <a:rPr lang="zh-CN" altLang="en-US" sz="1725" dirty="0">
+                <a:spcPts val="2232"/>
+              </a:lnSpc>
+              <a:buNone/>
+            </a:pPr>
+            <a:r>
+              <a:rPr lang="zh-CN" altLang="en-US" sz="1800" dirty="0">
                 <a:solidFill>
                   <a:srgbClr val="1C2430"/>
                 </a:solidFill>
@@ -3390,17 +3506,17 @@
               </a:rPr>
               <a:t>统计差异与实际意义分别判断</a:t>
             </a:r>
-            <a:endParaRPr lang="zh-CN" sz="1725" dirty="0"/>
+            <a:endParaRPr lang="zh-CN" sz="1800" dirty="0"/>
           </a:p>
           <a:p>
             <a:pPr algn="l" indent="0" marL="0">
               <a:lnSpc>
-                <a:spcPts val="2139"/>
-              </a:lnSpc>
-              <a:buNone/>
-            </a:pPr>
-            <a:r>
-              <a:rPr lang="zh-CN" altLang="en-US" sz="1725" dirty="0">
+                <a:spcPts val="2232"/>
+              </a:lnSpc>
+              <a:buNone/>
+            </a:pPr>
+            <a:r>
+              <a:rPr lang="zh-CN" altLang="en-US" sz="1800" dirty="0">
                 <a:solidFill>
                   <a:srgbClr val="1C2430"/>
                 </a:solidFill>
@@ -3410,13 +3526,13 @@
               </a:rPr>
               <a:t>说明未测试的条件与替代解释</a:t>
             </a:r>
-            <a:endParaRPr lang="zh-CN" sz="1725" dirty="0"/>
+            <a:endParaRPr lang="zh-CN" sz="1800" dirty="0"/>
           </a:p>
         </p:txBody>
       </p:sp>
       <p:sp>
         <p:nvSpPr>
-          <p:cNvPr id="21" name="T19/sources"/>
+          <p:cNvPr id="22" name="T19/sources"/>
           <p:cNvSpPr/>
           <p:nvPr/>
         </p:nvSpPr>
@@ -3450,7 +3566,7 @@
                 <a:ea typeface="Noto Sans CJK SC" pitchFamily="34" charset="-122"/>
                 <a:cs typeface="Noto Sans CJK SC" pitchFamily="34" charset="-120"/>
               </a:rPr>
-              <a:t>T1 · 2026 · 待替换</a:t>
+              <a:t>T1 · 2026 · 书目占位；图表均为合成示例</a:t>
             </a:r>
             <a:endParaRPr lang="zh-CN" sz="1125" dirty="0"/>
           </a:p>
@@ -3559,14 +3675,14 @@
       </p:sp>
       <p:sp>
         <p:nvSpPr>
-          <p:cNvPr id="4" name="T20/kicker"/>
-          <p:cNvSpPr/>
-          <p:nvPr/>
-        </p:nvSpPr>
-        <p:spPr>
-          <a:xfrm>
-            <a:off x="457200" y="152400"/>
-            <a:ext cx="11277600" cy="190500"/>
+          <p:cNvPr id="4" name="T20/title"/>
+          <p:cNvSpPr/>
+          <p:nvPr/>
+        </p:nvSpPr>
+        <p:spPr>
+          <a:xfrm>
+            <a:off x="457200" y="209550"/>
+            <a:ext cx="11277600" cy="438150"/>
           </a:xfrm>
           <a:prstGeom prst="rect">
             <a:avLst/>
@@ -3580,83 +3696,64 @@
           <a:p>
             <a:pPr algn="l" indent="0" marL="0">
               <a:lnSpc>
-                <a:spcPts val="1320"/>
-              </a:lnSpc>
-              <a:buNone/>
-            </a:pPr>
-            <a:r>
-              <a:rPr lang="zh-CN" altLang="en-US" sz="1200" dirty="0">
-                <a:solidFill>
-                  <a:srgbClr val="515B68"/>
-                </a:solidFill>
-                <a:latin typeface="Noto Sans CJK SC" pitchFamily="34" charset="0"/>
-                <a:ea typeface="Noto Sans CJK SC" pitchFamily="34" charset="-122"/>
-                <a:cs typeface="Noto Sans CJK SC" pitchFamily="34" charset="-120"/>
-              </a:rPr>
-              <a:t>结构模板 / 占位说明与合成数据</a:t>
-            </a:r>
-            <a:endParaRPr lang="zh-CN" sz="1200" dirty="0"/>
+                <a:spcPts val="3360"/>
+              </a:lnSpc>
+              <a:buNone/>
+            </a:pPr>
+            <a:r>
+              <a:rPr lang="zh-CN" altLang="en-US" sz="3000" b="1" dirty="0">
+                <a:solidFill>
+                  <a:srgbClr val="1C2430"/>
+                </a:solidFill>
+                <a:latin typeface="Noto Sans CJK SC" pitchFamily="34" charset="0"/>
+                <a:ea typeface="Noto Sans CJK SC" pitchFamily="34" charset="-122"/>
+                <a:cs typeface="Noto Sans CJK SC" pitchFamily="34" charset="-120"/>
+              </a:rPr>
+              <a:t>两个终点分别报告</a:t>
+            </a:r>
+            <a:endParaRPr lang="zh-CN" sz="3000" dirty="0"/>
           </a:p>
         </p:txBody>
       </p:sp>
       <p:sp>
         <p:nvSpPr>
-          <p:cNvPr id="5" name="T20/title"/>
-          <p:cNvSpPr/>
-          <p:nvPr/>
-        </p:nvSpPr>
-        <p:spPr>
-          <a:xfrm>
-            <a:off x="457200" y="381000"/>
-            <a:ext cx="11277600" cy="400050"/>
-          </a:xfrm>
-          <a:prstGeom prst="rect">
+          <p:cNvPr id="5" name="T20/header-rule"/>
+          <p:cNvSpPr/>
+          <p:nvPr/>
+        </p:nvSpPr>
+        <p:spPr>
+          <a:xfrm>
+            <a:off x="457200" y="752475"/>
+            <a:ext cx="11277600" cy="0"/>
+          </a:xfrm>
+          <a:prstGeom prst="line">
             <a:avLst/>
           </a:prstGeom>
           <a:noFill/>
-          <a:ln/>
-        </p:spPr>
-        <p:txBody>
-          <a:bodyPr wrap="none" lIns="0" tIns="0" rIns="0" bIns="0" rtlCol="0" anchor="t"/>
-          <a:lstStyle/>
-          <a:p>
-            <a:pPr algn="l" indent="0" marL="0">
-              <a:lnSpc>
-                <a:spcPts val="2856"/>
-              </a:lnSpc>
-              <a:buNone/>
-            </a:pPr>
-            <a:r>
-              <a:rPr lang="zh-CN" altLang="en-US" sz="2550" b="1" dirty="0">
-                <a:solidFill>
-                  <a:srgbClr val="1C2430"/>
-                </a:solidFill>
-                <a:latin typeface="Noto Sans CJK SC" pitchFamily="34" charset="0"/>
-                <a:ea typeface="Noto Sans CJK SC" pitchFamily="34" charset="-122"/>
-                <a:cs typeface="Noto Sans CJK SC" pitchFamily="34" charset="-120"/>
-              </a:rPr>
-              <a:t>两个终点分别报告</a:t>
-            </a:r>
-            <a:endParaRPr lang="zh-CN" sz="2550" dirty="0"/>
-          </a:p>
-        </p:txBody>
-      </p:sp>
-      <p:sp>
-        <p:nvSpPr>
-          <p:cNvPr id="6" name="T20/header-rule"/>
-          <p:cNvSpPr/>
-          <p:nvPr/>
-        </p:nvSpPr>
-        <p:spPr>
-          <a:xfrm>
-            <a:off x="457200" y="876300"/>
-            <a:ext cx="11277600" cy="0"/>
+          <a:ln w="10478">
+            <a:solidFill>
+              <a:srgbClr val="BEC8D4"/>
+            </a:solidFill>
+            <a:prstDash val="solid"/>
+          </a:ln>
+        </p:spPr>
+      </p:sp>
+      <p:sp>
+        <p:nvSpPr>
+          <p:cNvPr id="6" name="T20/header-accent"/>
+          <p:cNvSpPr/>
+          <p:nvPr/>
+        </p:nvSpPr>
+        <p:spPr>
+          <a:xfrm>
+            <a:off x="457200" y="752475"/>
+            <a:ext cx="704850" cy="0"/>
           </a:xfrm>
           <a:prstGeom prst="line">
             <a:avLst/>
           </a:prstGeom>
           <a:noFill/>
-          <a:ln w="11430">
+          <a:ln w="28575">
             <a:solidFill>
               <a:srgbClr val="173C70"/>
             </a:solidFill>
@@ -3672,8 +3769,8 @@
         </p:nvSpPr>
         <p:spPr>
           <a:xfrm>
-            <a:off x="457200" y="1295400"/>
-            <a:ext cx="5467350" cy="2838450"/>
+            <a:off x="457200" y="1107853"/>
+            <a:ext cx="5467350" cy="3659791"/>
           </a:xfrm>
           <a:prstGeom prst="rect">
             <a:avLst/>
@@ -3697,14 +3794,14 @@
         </p:nvSpPr>
         <p:spPr>
           <a:xfrm>
-            <a:off x="466725" y="1304925"/>
+            <a:off x="466725" y="1117378"/>
             <a:ext cx="5448300" cy="381000"/>
           </a:xfrm>
           <a:prstGeom prst="rect">
             <a:avLst/>
           </a:prstGeom>
           <a:solidFill>
-            <a:srgbClr val="EEF3F8"/>
+            <a:srgbClr val="E9F4F0"/>
           </a:solidFill>
           <a:ln w="12700">
             <a:solidFill>
@@ -3724,7 +3821,7 @@
         </p:nvSpPr>
         <p:spPr>
           <a:xfrm>
-            <a:off x="457200" y="1685925"/>
+            <a:off x="457200" y="1498378"/>
             <a:ext cx="5467350" cy="0"/>
           </a:xfrm>
           <a:prstGeom prst="line">
@@ -3747,8 +3844,8 @@
         </p:nvSpPr>
         <p:spPr>
           <a:xfrm>
-            <a:off x="581025" y="1352550"/>
-            <a:ext cx="5219700" cy="295275"/>
+            <a:off x="581025" y="1155478"/>
+            <a:ext cx="5219700" cy="304800"/>
           </a:xfrm>
           <a:prstGeom prst="rect">
             <a:avLst/>
@@ -3762,14 +3859,14 @@
           <a:p>
             <a:pPr algn="l" indent="0" marL="0">
               <a:lnSpc>
-                <a:spcPts val="2070"/>
-              </a:lnSpc>
-              <a:buNone/>
-            </a:pPr>
-            <a:r>
-              <a:rPr lang="zh-CN" altLang="en-US" sz="1800" b="1" dirty="0">
-                <a:solidFill>
-                  <a:srgbClr val="173C70"/>
+                <a:spcPts val="2242"/>
+              </a:lnSpc>
+              <a:buNone/>
+            </a:pPr>
+            <a:r>
+              <a:rPr lang="zh-CN" altLang="en-US" sz="1950" b="1" dirty="0">
+                <a:solidFill>
+                  <a:srgbClr val="146C63"/>
                 </a:solidFill>
                 <a:latin typeface="Noto Sans CJK SC" pitchFamily="34" charset="0"/>
                 <a:ea typeface="Noto Sans CJK SC" pitchFamily="34" charset="-122"/>
@@ -3777,7 +3874,7 @@
               </a:rPr>
               <a:t>终点一：组间比较</a:t>
             </a:r>
-            <a:endParaRPr lang="zh-CN" sz="1800" dirty="0"/>
+            <a:endParaRPr lang="zh-CN" sz="1950" dirty="0"/>
           </a:p>
         </p:txBody>
       </p:sp>
@@ -3789,8 +3886,8 @@
         </p:nvSpPr>
         <p:spPr>
           <a:xfrm>
-            <a:off x="6248400" y="1295400"/>
-            <a:ext cx="5486400" cy="2838450"/>
+            <a:off x="6248400" y="1107853"/>
+            <a:ext cx="5486400" cy="3659791"/>
           </a:xfrm>
           <a:prstGeom prst="rect">
             <a:avLst/>
@@ -3814,14 +3911,14 @@
         </p:nvSpPr>
         <p:spPr>
           <a:xfrm>
-            <a:off x="6257925" y="1304925"/>
+            <a:off x="6257925" y="1117378"/>
             <a:ext cx="5467350" cy="381000"/>
           </a:xfrm>
           <a:prstGeom prst="rect">
             <a:avLst/>
           </a:prstGeom>
           <a:solidFill>
-            <a:srgbClr val="EEF3F8"/>
+            <a:srgbClr val="E9F4F0"/>
           </a:solidFill>
           <a:ln w="12700">
             <a:solidFill>
@@ -3841,7 +3938,7 @@
         </p:nvSpPr>
         <p:spPr>
           <a:xfrm>
-            <a:off x="6248400" y="1685925"/>
+            <a:off x="6248400" y="1498378"/>
             <a:ext cx="5486400" cy="0"/>
           </a:xfrm>
           <a:prstGeom prst="line">
@@ -3864,8 +3961,8 @@
         </p:nvSpPr>
         <p:spPr>
           <a:xfrm>
-            <a:off x="6372225" y="1352550"/>
-            <a:ext cx="5238750" cy="295275"/>
+            <a:off x="6372225" y="1155478"/>
+            <a:ext cx="5238750" cy="304800"/>
           </a:xfrm>
           <a:prstGeom prst="rect">
             <a:avLst/>
@@ -3879,14 +3976,14 @@
           <a:p>
             <a:pPr algn="l" indent="0" marL="0">
               <a:lnSpc>
-                <a:spcPts val="2070"/>
-              </a:lnSpc>
-              <a:buNone/>
-            </a:pPr>
-            <a:r>
-              <a:rPr lang="zh-CN" altLang="en-US" sz="1800" b="1" dirty="0">
-                <a:solidFill>
-                  <a:srgbClr val="173C70"/>
+                <a:spcPts val="2242"/>
+              </a:lnSpc>
+              <a:buNone/>
+            </a:pPr>
+            <a:r>
+              <a:rPr lang="zh-CN" altLang="en-US" sz="1950" b="1" dirty="0">
+                <a:solidFill>
+                  <a:srgbClr val="146C63"/>
                 </a:solidFill>
                 <a:latin typeface="Noto Sans CJK SC" pitchFamily="34" charset="0"/>
                 <a:ea typeface="Noto Sans CJK SC" pitchFamily="34" charset="-122"/>
@@ -3894,7 +3991,7 @@
               </a:rPr>
               <a:t>终点二：个体分布</a:t>
             </a:r>
-            <a:endParaRPr lang="zh-CN" sz="1800" dirty="0"/>
+            <a:endParaRPr lang="zh-CN" sz="1950" dirty="0"/>
           </a:p>
         </p:txBody>
       </p:sp>
@@ -3906,14 +4003,153 @@
         </p:nvSpPr>
         <p:spPr>
           <a:xfrm>
-            <a:off x="6381750" y="1790700"/>
-            <a:ext cx="5219700" cy="2171700"/>
+            <a:off x="7246736" y="1641253"/>
+            <a:ext cx="3489729" cy="2586419"/>
           </a:xfrm>
           <a:prstGeom prst="rect">
             <a:avLst/>
           </a:prstGeom>
           <a:solidFill>
             <a:srgbClr val="FFFFFF"/>
+          </a:solidFill>
+          <a:ln w="7620">
+            <a:solidFill>
+              <a:srgbClr val="CCD4DD"/>
+            </a:solidFill>
+            <a:prstDash val="solid"/>
+          </a:ln>
+          <a:effectLst>
+            <a:outerShdw sx="100000" sy="100000" kx="0" ky="0" algn="bl" rotWithShape="0" blurRad="28575" dist="19050" dir="5400000">
+              <a:srgbClr val="263B50">
+                <a:alpha val="12000"/>
+              </a:srgbClr>
+            </a:outerShdw>
+          </a:effectLst>
+        </p:spPr>
+      </p:sp>
+      <p:pic>
+        <p:nvPicPr>
+          <p:cNvPr id="16" name="T20/figure:0:image" descr="独立观测分布；合成数据">    </p:cNvPr>
+          <p:cNvPicPr>
+            <a:picLocks noChangeAspect="1"/>
+          </p:cNvPicPr>
+          <p:nvPr/>
+        </p:nvPicPr>
+        <p:blipFill>
+          <a:blip r:embed="rId1"/>
+          <a:stretch>
+            <a:fillRect/>
+          </a:stretch>
+        </p:blipFill>
+        <p:spPr>
+          <a:xfrm>
+            <a:off x="7275311" y="1669828"/>
+            <a:ext cx="3432579" cy="2529269"/>
+          </a:xfrm>
+          <a:prstGeom prst="rect">
+            <a:avLst/>
+          </a:prstGeom>
+        </p:spPr>
+      </p:pic>
+      <p:sp>
+        <p:nvSpPr>
+          <p:cNvPr id="17" name="T20/figure:0:caption"/>
+          <p:cNvSpPr/>
+          <p:nvPr/>
+        </p:nvSpPr>
+        <p:spPr>
+          <a:xfrm>
+            <a:off x="6381750" y="4332446"/>
+            <a:ext cx="5219700" cy="257175"/>
+          </a:xfrm>
+          <a:prstGeom prst="rect">
+            <a:avLst/>
+          </a:prstGeom>
+          <a:noFill/>
+          <a:ln/>
+        </p:spPr>
+        <p:txBody>
+          <a:bodyPr wrap="none" lIns="0" tIns="0" rIns="0" bIns="0" rtlCol="0" anchor="t"/>
+          <a:lstStyle/>
+          <a:p>
+            <a:pPr algn="l" indent="0" marL="0">
+              <a:lnSpc>
+                <a:spcPts val="1674"/>
+              </a:lnSpc>
+              <a:buNone/>
+            </a:pPr>
+            <a:r>
+              <a:rPr lang="zh-CN" altLang="en-US" sz="1350" dirty="0">
+                <a:solidFill>
+                  <a:srgbClr val="515B68"/>
+                </a:solidFill>
+                <a:latin typeface="Noto Sans CJK SC" pitchFamily="34" charset="0"/>
+                <a:ea typeface="Noto Sans CJK SC" pitchFamily="34" charset="-122"/>
+                <a:cs typeface="Noto Sans CJK SC" pitchFamily="34" charset="-120"/>
+              </a:rPr>
+              <a:t>独立观测分布；合成数据</a:t>
+            </a:r>
+            <a:endParaRPr lang="zh-CN" sz="1350" dirty="0"/>
+          </a:p>
+        </p:txBody>
+      </p:sp>
+      <p:graphicFrame>
+        <p:nvGraphicFramePr>
+          <p:cNvPr id="18" name="T20/data-chart" descr=""/>
+          <p:cNvGraphicFramePr/>
+          <p:nvPr/>
+        </p:nvGraphicFramePr>
+        <p:xfrm>
+          <a:off x="590550" y="1622203"/>
+          <a:ext cx="5200650" cy="2967419"/>
+        </p:xfrm>
+        <a:graphic xmlns:a="http://schemas.openxmlformats.org/drawingml/2006/main">
+          <a:graphicData uri="http://schemas.openxmlformats.org/drawingml/2006/chart">
+            <c:chart xmlns:c="http://schemas.openxmlformats.org/drawingml/2006/chart" r:id="rId2"/>
+          </a:graphicData>
+        </a:graphic>
+      </p:graphicFrame>
+      <p:sp>
+        <p:nvSpPr>
+          <p:cNvPr id="19" name="T20/card/region-1/frame"/>
+          <p:cNvSpPr/>
+          <p:nvPr/>
+        </p:nvSpPr>
+        <p:spPr>
+          <a:xfrm>
+            <a:off x="457200" y="5005007"/>
+            <a:ext cx="5467350" cy="1068229"/>
+          </a:xfrm>
+          <a:prstGeom prst="rect">
+            <a:avLst/>
+          </a:prstGeom>
+          <a:solidFill>
+            <a:srgbClr val="FFFFFF"/>
+          </a:solidFill>
+          <a:ln w="10478">
+            <a:solidFill>
+              <a:srgbClr val="BEC8D4"/>
+            </a:solidFill>
+            <a:prstDash val="solid"/>
+          </a:ln>
+        </p:spPr>
+      </p:sp>
+      <p:sp>
+        <p:nvSpPr>
+          <p:cNvPr id="20" name="T20/card/region-1/heading-fill"/>
+          <p:cNvSpPr/>
+          <p:nvPr/>
+        </p:nvSpPr>
+        <p:spPr>
+          <a:xfrm>
+            <a:off x="466725" y="5014532"/>
+            <a:ext cx="5448300" cy="371475"/>
+          </a:xfrm>
+          <a:prstGeom prst="rect">
+            <a:avLst/>
+          </a:prstGeom>
+          <a:solidFill>
+            <a:srgbClr val="E9F4F0"/>
           </a:solidFill>
           <a:ln w="12700">
             <a:solidFill>
@@ -3925,40 +4161,39 @@
           </a:ln>
         </p:spPr>
       </p:sp>
-      <p:pic>
-        <p:nvPicPr>
-          <p:cNvPr id="16" name="T20/figure:0:image" descr="T1 · 示例图 · 独立观测分布；合成演示值">    </p:cNvPr>
-          <p:cNvPicPr>
-            <a:picLocks noChangeAspect="1"/>
-          </p:cNvPicPr>
-          <p:nvPr/>
-        </p:nvPicPr>
-        <p:blipFill>
-          <a:blip r:embed="rId1"/>
-          <a:stretch>
-            <a:fillRect/>
-          </a:stretch>
-        </p:blipFill>
-        <p:spPr>
-          <a:xfrm>
-            <a:off x="7467600" y="1790700"/>
-            <a:ext cx="3048000" cy="1828800"/>
-          </a:xfrm>
-          <a:prstGeom prst="rect">
-            <a:avLst/>
-          </a:prstGeom>
-        </p:spPr>
-      </p:pic>
-      <p:sp>
-        <p:nvSpPr>
-          <p:cNvPr id="17" name="T20/figure:0:caption"/>
-          <p:cNvSpPr/>
-          <p:nvPr/>
-        </p:nvSpPr>
-        <p:spPr>
-          <a:xfrm>
-            <a:off x="6381750" y="3705225"/>
-            <a:ext cx="5219700" cy="257175"/>
+      <p:sp>
+        <p:nvSpPr>
+          <p:cNvPr id="21" name="T20/card/region-1/heading-rule"/>
+          <p:cNvSpPr/>
+          <p:nvPr/>
+        </p:nvSpPr>
+        <p:spPr>
+          <a:xfrm>
+            <a:off x="457200" y="5386007"/>
+            <a:ext cx="5467350" cy="0"/>
+          </a:xfrm>
+          <a:prstGeom prst="line">
+            <a:avLst/>
+          </a:prstGeom>
+          <a:noFill/>
+          <a:ln w="9525">
+            <a:solidFill>
+              <a:srgbClr val="BEC8D4"/>
+            </a:solidFill>
+            <a:prstDash val="solid"/>
+          </a:ln>
+        </p:spPr>
+      </p:sp>
+      <p:sp>
+        <p:nvSpPr>
+          <p:cNvPr id="22" name="T20/card/region-1/title"/>
+          <p:cNvSpPr/>
+          <p:nvPr/>
+        </p:nvSpPr>
+        <p:spPr>
+          <a:xfrm>
+            <a:off x="581025" y="5052632"/>
+            <a:ext cx="5219700" cy="295275"/>
           </a:xfrm>
           <a:prstGeom prst="rect">
             <a:avLst/>
@@ -3972,51 +4207,111 @@
           <a:p>
             <a:pPr algn="l" indent="0" marL="0">
               <a:lnSpc>
-                <a:spcPts val="1674"/>
-              </a:lnSpc>
-              <a:buNone/>
-            </a:pPr>
-            <a:r>
-              <a:rPr lang="zh-CN" altLang="en-US" sz="1350" dirty="0">
-                <a:solidFill>
-                  <a:srgbClr val="515B68"/>
-                </a:solidFill>
-                <a:latin typeface="Noto Sans CJK SC" pitchFamily="34" charset="0"/>
-                <a:ea typeface="Noto Sans CJK SC" pitchFamily="34" charset="-122"/>
-                <a:cs typeface="Noto Sans CJK SC" pitchFamily="34" charset="-120"/>
-              </a:rPr>
-              <a:t>T1 · 示例图 · 独立观测分布；合成演示值</a:t>
-            </a:r>
-            <a:endParaRPr lang="zh-CN" sz="1350" dirty="0"/>
+                <a:spcPts val="2242"/>
+              </a:lnSpc>
+              <a:buNone/>
+            </a:pPr>
+            <a:r>
+              <a:rPr lang="zh-CN" altLang="en-US" sz="1950" b="1" dirty="0">
+                <a:solidFill>
+                  <a:srgbClr val="146C63"/>
+                </a:solidFill>
+                <a:latin typeface="Noto Sans CJK SC" pitchFamily="34" charset="0"/>
+                <a:ea typeface="Noto Sans CJK SC" pitchFamily="34" charset="-122"/>
+                <a:cs typeface="Noto Sans CJK SC" pitchFamily="34" charset="-120"/>
+              </a:rPr>
+              <a:t>终点一的解释</a:t>
+            </a:r>
+            <a:endParaRPr lang="zh-CN" sz="1950" dirty="0"/>
           </a:p>
         </p:txBody>
       </p:sp>
-      <p:graphicFrame>
-        <p:nvGraphicFramePr>
-          <p:cNvPr id="18" name="T20/data-chart" descr=""/>
-          <p:cNvGraphicFramePr/>
-          <p:nvPr/>
-        </p:nvGraphicFramePr>
-        <p:xfrm>
-          <a:off x="590550" y="1790700"/>
-          <a:ext cx="5200650" cy="2171700"/>
-        </p:xfrm>
-        <a:graphic xmlns:a="http://schemas.openxmlformats.org/drawingml/2006/main">
-          <a:graphicData uri="http://schemas.openxmlformats.org/drawingml/2006/chart">
-            <c:chart xmlns:c="http://schemas.openxmlformats.org/drawingml/2006/chart" r:id="rId2"/>
-          </a:graphicData>
-        </a:graphic>
-      </p:graphicFrame>
-      <p:sp>
-        <p:nvSpPr>
-          <p:cNvPr id="19" name="T20/card/region-1/frame"/>
-          <p:cNvSpPr/>
-          <p:nvPr/>
-        </p:nvSpPr>
-        <p:spPr>
-          <a:xfrm>
-            <a:off x="457200" y="4457700"/>
-            <a:ext cx="5467350" cy="1581150"/>
+      <p:sp>
+        <p:nvSpPr>
+          <p:cNvPr id="23" name="T20/card/region-1/body"/>
+          <p:cNvSpPr/>
+          <p:nvPr/>
+        </p:nvSpPr>
+        <p:spPr>
+          <a:xfrm>
+            <a:off x="590550" y="5490782"/>
+            <a:ext cx="5200650" cy="487204"/>
+          </a:xfrm>
+          <a:prstGeom prst="rect">
+            <a:avLst/>
+          </a:prstGeom>
+          <a:noFill/>
+          <a:ln/>
+        </p:spPr>
+        <p:txBody>
+          <a:bodyPr wrap="none" lIns="0" tIns="0" rIns="0" bIns="0" rtlCol="0" anchor="t"/>
+          <a:lstStyle/>
+          <a:p>
+            <a:pPr algn="l" indent="0" marL="0">
+              <a:lnSpc>
+                <a:spcPts val="2232"/>
+              </a:lnSpc>
+              <a:buNone/>
+            </a:pPr>
+            <a:r>
+              <a:rPr lang="zh-CN" altLang="en-US" sz="1800" dirty="0">
+                <a:solidFill>
+                  <a:srgbClr val="1C2430"/>
+                </a:solidFill>
+                <a:latin typeface="Noto Sans CJK SC" pitchFamily="34" charset="0"/>
+                <a:ea typeface="Noto Sans CJK SC" pitchFamily="34" charset="-122"/>
+                <a:cs typeface="Noto Sans CJK SC" pitchFamily="34" charset="-120"/>
+              </a:rPr>
+              <a:t>定义</a:t>
+            </a:r>
+            <a:pPr algn="l" indent="0" marL="0">
+              <a:lnSpc>
+                <a:spcPts val="2232"/>
+              </a:lnSpc>
+              <a:buNone/>
+            </a:pPr>
+            <a:r>
+              <a:rPr lang="zh-CN" altLang="en-US" sz="1800" b="1" dirty="0">
+                <a:solidFill>
+                  <a:srgbClr val="146C63"/>
+                </a:solidFill>
+                <a:latin typeface="Noto Sans CJK SC" pitchFamily="34" charset="0"/>
+                <a:ea typeface="Noto Sans CJK SC" pitchFamily="34" charset="-122"/>
+                <a:cs typeface="Noto Sans CJK SC" pitchFamily="34" charset="-120"/>
+              </a:rPr>
+              <a:t>单位</a:t>
+            </a:r>
+            <a:pPr algn="l" indent="0" marL="0">
+              <a:lnSpc>
+                <a:spcPts val="2232"/>
+              </a:lnSpc>
+              <a:buNone/>
+            </a:pPr>
+            <a:r>
+              <a:rPr lang="zh-CN" altLang="en-US" sz="1800" dirty="0">
+                <a:solidFill>
+                  <a:srgbClr val="1C2430"/>
+                </a:solidFill>
+                <a:latin typeface="Noto Sans CJK SC" pitchFamily="34" charset="0"/>
+                <a:ea typeface="Noto Sans CJK SC" pitchFamily="34" charset="-122"/>
+                <a:cs typeface="Noto Sans CJK SC" pitchFamily="34" charset="-120"/>
+              </a:rPr>
+              <a:t>、分母与评价时间窗</a:t>
+            </a:r>
+            <a:endParaRPr lang="zh-CN" sz="1800" dirty="0"/>
+          </a:p>
+        </p:txBody>
+      </p:sp>
+      <p:sp>
+        <p:nvSpPr>
+          <p:cNvPr id="24" name="T20/card/region-2/frame"/>
+          <p:cNvSpPr/>
+          <p:nvPr/>
+        </p:nvSpPr>
+        <p:spPr>
+          <a:xfrm>
+            <a:off x="6248400" y="5005007"/>
+            <a:ext cx="5486400" cy="1068229"/>
           </a:xfrm>
           <a:prstGeom prst="rect">
             <a:avLst/>
@@ -4034,20 +4329,20 @@
       </p:sp>
       <p:sp>
         <p:nvSpPr>
-          <p:cNvPr id="20" name="T20/card/region-1/heading-fill"/>
-          <p:cNvSpPr/>
-          <p:nvPr/>
-        </p:nvSpPr>
-        <p:spPr>
-          <a:xfrm>
-            <a:off x="466725" y="4467225"/>
-            <a:ext cx="5448300" cy="371475"/>
+          <p:cNvPr id="25" name="T20/card/region-2/heading-fill"/>
+          <p:cNvSpPr/>
+          <p:nvPr/>
+        </p:nvSpPr>
+        <p:spPr>
+          <a:xfrm>
+            <a:off x="6257925" y="5014532"/>
+            <a:ext cx="5467350" cy="371475"/>
           </a:xfrm>
           <a:prstGeom prst="rect">
             <a:avLst/>
           </a:prstGeom>
           <a:solidFill>
-            <a:srgbClr val="EEF3F8"/>
+            <a:srgbClr val="E9F4F0"/>
           </a:solidFill>
           <a:ln w="12700">
             <a:solidFill>
@@ -4061,14 +4356,14 @@
       </p:sp>
       <p:sp>
         <p:nvSpPr>
-          <p:cNvPr id="21" name="T20/card/region-1/heading-rule"/>
-          <p:cNvSpPr/>
-          <p:nvPr/>
-        </p:nvSpPr>
-        <p:spPr>
-          <a:xfrm>
-            <a:off x="457200" y="4838700"/>
-            <a:ext cx="5467350" cy="0"/>
+          <p:cNvPr id="26" name="T20/card/region-2/heading-rule"/>
+          <p:cNvSpPr/>
+          <p:nvPr/>
+        </p:nvSpPr>
+        <p:spPr>
+          <a:xfrm>
+            <a:off x="6248400" y="5386007"/>
+            <a:ext cx="5486400" cy="0"/>
           </a:xfrm>
           <a:prstGeom prst="line">
             <a:avLst/>
@@ -4084,14 +4379,14 @@
       </p:sp>
       <p:sp>
         <p:nvSpPr>
-          <p:cNvPr id="22" name="T20/card/region-1/title"/>
-          <p:cNvSpPr/>
-          <p:nvPr/>
-        </p:nvSpPr>
-        <p:spPr>
-          <a:xfrm>
-            <a:off x="581025" y="4514850"/>
-            <a:ext cx="5219700" cy="276225"/>
+          <p:cNvPr id="27" name="T20/card/region-2/title"/>
+          <p:cNvSpPr/>
+          <p:nvPr/>
+        </p:nvSpPr>
+        <p:spPr>
+          <a:xfrm>
+            <a:off x="6372225" y="5052632"/>
+            <a:ext cx="5238750" cy="295275"/>
           </a:xfrm>
           <a:prstGeom prst="rect">
             <a:avLst/>
@@ -4105,35 +4400,35 @@
           <a:p>
             <a:pPr algn="l" indent="0" marL="0">
               <a:lnSpc>
-                <a:spcPts val="2070"/>
-              </a:lnSpc>
-              <a:buNone/>
-            </a:pPr>
-            <a:r>
-              <a:rPr lang="zh-CN" altLang="en-US" sz="1800" b="1" dirty="0">
-                <a:solidFill>
-                  <a:srgbClr val="173C70"/>
-                </a:solidFill>
-                <a:latin typeface="Noto Sans CJK SC" pitchFamily="34" charset="0"/>
-                <a:ea typeface="Noto Sans CJK SC" pitchFamily="34" charset="-122"/>
-                <a:cs typeface="Noto Sans CJK SC" pitchFamily="34" charset="-120"/>
-              </a:rPr>
-              <a:t>终点一的解释</a:t>
-            </a:r>
-            <a:endParaRPr lang="zh-CN" sz="1800" dirty="0"/>
+                <a:spcPts val="2242"/>
+              </a:lnSpc>
+              <a:buNone/>
+            </a:pPr>
+            <a:r>
+              <a:rPr lang="zh-CN" altLang="en-US" sz="1950" b="1" dirty="0">
+                <a:solidFill>
+                  <a:srgbClr val="146C63"/>
+                </a:solidFill>
+                <a:latin typeface="Noto Sans CJK SC" pitchFamily="34" charset="0"/>
+                <a:ea typeface="Noto Sans CJK SC" pitchFamily="34" charset="-122"/>
+                <a:cs typeface="Noto Sans CJK SC" pitchFamily="34" charset="-120"/>
+              </a:rPr>
+              <a:t>终点二的解释</a:t>
+            </a:r>
+            <a:endParaRPr lang="zh-CN" sz="1950" dirty="0"/>
           </a:p>
         </p:txBody>
       </p:sp>
       <p:sp>
         <p:nvSpPr>
-          <p:cNvPr id="23" name="T20/card/region-1/body"/>
-          <p:cNvSpPr/>
-          <p:nvPr/>
-        </p:nvSpPr>
-        <p:spPr>
-          <a:xfrm>
-            <a:off x="590550" y="4953000"/>
-            <a:ext cx="5200650" cy="990600"/>
+          <p:cNvPr id="28" name="T20/card/region-2/body"/>
+          <p:cNvSpPr/>
+          <p:nvPr/>
+        </p:nvSpPr>
+        <p:spPr>
+          <a:xfrm>
+            <a:off x="6381750" y="5490782"/>
+            <a:ext cx="5219700" cy="487204"/>
           </a:xfrm>
           <a:prstGeom prst="rect">
             <a:avLst/>
@@ -4147,12 +4442,12 @@
           <a:p>
             <a:pPr algn="l" indent="0" marL="0">
               <a:lnSpc>
-                <a:spcPts val="2139"/>
-              </a:lnSpc>
-              <a:buNone/>
-            </a:pPr>
-            <a:r>
-              <a:rPr lang="zh-CN" altLang="en-US" sz="1725" dirty="0">
+                <a:spcPts val="2232"/>
+              </a:lnSpc>
+              <a:buNone/>
+            </a:pPr>
+            <a:r>
+              <a:rPr lang="zh-CN" altLang="en-US" sz="1800" dirty="0">
                 <a:solidFill>
                   <a:srgbClr val="1C2430"/>
                 </a:solidFill>
@@ -4160,117 +4455,22 @@
                 <a:ea typeface="Noto Sans CJK SC" pitchFamily="34" charset="-122"/>
                 <a:cs typeface="Noto Sans CJK SC" pitchFamily="34" charset="-120"/>
               </a:rPr>
-              <a:t>定义单位、分母与评价时间窗</a:t>
-            </a:r>
-            <a:endParaRPr lang="zh-CN" sz="1725" dirty="0"/>
-          </a:p>
-          <a:p>
-            <a:pPr algn="l" indent="0" marL="0">
-              <a:lnSpc>
-                <a:spcPts val="2139"/>
-              </a:lnSpc>
-              <a:buNone/>
-            </a:pPr>
-            <a:r>
-              <a:rPr lang="zh-CN" altLang="en-US" sz="1725" dirty="0">
-                <a:solidFill>
-                  <a:srgbClr val="1C2430"/>
-                </a:solidFill>
-                <a:latin typeface="Noto Sans CJK SC" pitchFamily="34" charset="0"/>
-                <a:ea typeface="Noto Sans CJK SC" pitchFamily="34" charset="-122"/>
-                <a:cs typeface="Noto Sans CJK SC" pitchFamily="34" charset="-120"/>
-              </a:rPr>
-              <a:t>单独报告该指标的效应与误差</a:t>
-            </a:r>
-            <a:endParaRPr lang="zh-CN" sz="1725" dirty="0"/>
+              <a:t>明确与终点一的不同含义</a:t>
+            </a:r>
+            <a:endParaRPr lang="zh-CN" sz="1800" dirty="0"/>
           </a:p>
         </p:txBody>
       </p:sp>
       <p:sp>
         <p:nvSpPr>
-          <p:cNvPr id="24" name="T20/card/region-2/frame"/>
-          <p:cNvSpPr/>
-          <p:nvPr/>
-        </p:nvSpPr>
-        <p:spPr>
-          <a:xfrm>
-            <a:off x="6248400" y="4457700"/>
-            <a:ext cx="5486400" cy="1581150"/>
-          </a:xfrm>
-          <a:prstGeom prst="rect">
-            <a:avLst/>
-          </a:prstGeom>
-          <a:solidFill>
-            <a:srgbClr val="FFFFFF"/>
-          </a:solidFill>
-          <a:ln w="10478">
-            <a:solidFill>
-              <a:srgbClr val="BEC8D4"/>
-            </a:solidFill>
-            <a:prstDash val="solid"/>
-          </a:ln>
-        </p:spPr>
-      </p:sp>
-      <p:sp>
-        <p:nvSpPr>
-          <p:cNvPr id="25" name="T20/card/region-2/heading-fill"/>
-          <p:cNvSpPr/>
-          <p:nvPr/>
-        </p:nvSpPr>
-        <p:spPr>
-          <a:xfrm>
-            <a:off x="6257925" y="4467225"/>
-            <a:ext cx="5467350" cy="371475"/>
-          </a:xfrm>
-          <a:prstGeom prst="rect">
-            <a:avLst/>
-          </a:prstGeom>
-          <a:solidFill>
-            <a:srgbClr val="EEF3F8"/>
-          </a:solidFill>
-          <a:ln w="12700">
-            <a:solidFill>
-              <a:srgbClr val="FFFFFF">
-                <a:alpha val="0"/>
-              </a:srgbClr>
-            </a:solidFill>
-            <a:prstDash val="solid"/>
-          </a:ln>
-        </p:spPr>
-      </p:sp>
-      <p:sp>
-        <p:nvSpPr>
-          <p:cNvPr id="26" name="T20/card/region-2/heading-rule"/>
-          <p:cNvSpPr/>
-          <p:nvPr/>
-        </p:nvSpPr>
-        <p:spPr>
-          <a:xfrm>
-            <a:off x="6248400" y="4838700"/>
-            <a:ext cx="5486400" cy="0"/>
-          </a:xfrm>
-          <a:prstGeom prst="line">
-            <a:avLst/>
-          </a:prstGeom>
-          <a:noFill/>
-          <a:ln w="9525">
-            <a:solidFill>
-              <a:srgbClr val="BEC8D4"/>
-            </a:solidFill>
-            <a:prstDash val="solid"/>
-          </a:ln>
-        </p:spPr>
-      </p:sp>
-      <p:sp>
-        <p:nvSpPr>
-          <p:cNvPr id="27" name="T20/card/region-2/title"/>
-          <p:cNvSpPr/>
-          <p:nvPr/>
-        </p:nvSpPr>
-        <p:spPr>
-          <a:xfrm>
-            <a:off x="6372225" y="4514850"/>
-            <a:ext cx="5238750" cy="276225"/>
+          <p:cNvPr id="29" name="T20/sources"/>
+          <p:cNvSpPr/>
+          <p:nvPr/>
+        </p:nvSpPr>
+        <p:spPr>
+          <a:xfrm>
+            <a:off x="457200" y="6286500"/>
+            <a:ext cx="11277600" cy="228600"/>
           </a:xfrm>
           <a:prstGeom prst="rect">
             <a:avLst/>
@@ -4284,110 +4484,6 @@
           <a:p>
             <a:pPr algn="l" indent="0" marL="0">
               <a:lnSpc>
-                <a:spcPts val="2070"/>
-              </a:lnSpc>
-              <a:buNone/>
-            </a:pPr>
-            <a:r>
-              <a:rPr lang="zh-CN" altLang="en-US" sz="1800" b="1" dirty="0">
-                <a:solidFill>
-                  <a:srgbClr val="173C70"/>
-                </a:solidFill>
-                <a:latin typeface="Noto Sans CJK SC" pitchFamily="34" charset="0"/>
-                <a:ea typeface="Noto Sans CJK SC" pitchFamily="34" charset="-122"/>
-                <a:cs typeface="Noto Sans CJK SC" pitchFamily="34" charset="-120"/>
-              </a:rPr>
-              <a:t>终点二的解释</a:t>
-            </a:r>
-            <a:endParaRPr lang="zh-CN" sz="1800" dirty="0"/>
-          </a:p>
-        </p:txBody>
-      </p:sp>
-      <p:sp>
-        <p:nvSpPr>
-          <p:cNvPr id="28" name="T20/card/region-2/body"/>
-          <p:cNvSpPr/>
-          <p:nvPr/>
-        </p:nvSpPr>
-        <p:spPr>
-          <a:xfrm>
-            <a:off x="6381750" y="4953000"/>
-            <a:ext cx="5219700" cy="990600"/>
-          </a:xfrm>
-          <a:prstGeom prst="rect">
-            <a:avLst/>
-          </a:prstGeom>
-          <a:noFill/>
-          <a:ln/>
-        </p:spPr>
-        <p:txBody>
-          <a:bodyPr wrap="none" lIns="0" tIns="0" rIns="0" bIns="0" rtlCol="0" anchor="t"/>
-          <a:lstStyle/>
-          <a:p>
-            <a:pPr algn="l" indent="0" marL="0">
-              <a:lnSpc>
-                <a:spcPts val="2139"/>
-              </a:lnSpc>
-              <a:buNone/>
-            </a:pPr>
-            <a:r>
-              <a:rPr lang="zh-CN" altLang="en-US" sz="1725" dirty="0">
-                <a:solidFill>
-                  <a:srgbClr val="1C2430"/>
-                </a:solidFill>
-                <a:latin typeface="Noto Sans CJK SC" pitchFamily="34" charset="0"/>
-                <a:ea typeface="Noto Sans CJK SC" pitchFamily="34" charset="-122"/>
-                <a:cs typeface="Noto Sans CJK SC" pitchFamily="34" charset="-120"/>
-              </a:rPr>
-              <a:t>明确与终点一的不同含义</a:t>
-            </a:r>
-            <a:endParaRPr lang="zh-CN" sz="1725" dirty="0"/>
-          </a:p>
-          <a:p>
-            <a:pPr algn="l" indent="0" marL="0">
-              <a:lnSpc>
-                <a:spcPts val="2139"/>
-              </a:lnSpc>
-              <a:buNone/>
-            </a:pPr>
-            <a:r>
-              <a:rPr lang="zh-CN" altLang="en-US" sz="1725" dirty="0">
-                <a:solidFill>
-                  <a:srgbClr val="1C2430"/>
-                </a:solidFill>
-                <a:latin typeface="Noto Sans CJK SC" pitchFamily="34" charset="0"/>
-                <a:ea typeface="Noto Sans CJK SC" pitchFamily="34" charset="-122"/>
-                <a:cs typeface="Noto Sans CJK SC" pitchFamily="34" charset="-120"/>
-              </a:rPr>
-              <a:t>两个终点分别达标不等于同时达标</a:t>
-            </a:r>
-            <a:endParaRPr lang="zh-CN" sz="1725" dirty="0"/>
-          </a:p>
-        </p:txBody>
-      </p:sp>
-      <p:sp>
-        <p:nvSpPr>
-          <p:cNvPr id="29" name="T20/sources"/>
-          <p:cNvSpPr/>
-          <p:nvPr/>
-        </p:nvSpPr>
-        <p:spPr>
-          <a:xfrm>
-            <a:off x="457200" y="6286500"/>
-            <a:ext cx="11277600" cy="228600"/>
-          </a:xfrm>
-          <a:prstGeom prst="rect">
-            <a:avLst/>
-          </a:prstGeom>
-          <a:noFill/>
-          <a:ln/>
-        </p:spPr>
-        <p:txBody>
-          <a:bodyPr wrap="none" lIns="0" tIns="0" rIns="0" bIns="0" rtlCol="0" anchor="t"/>
-          <a:lstStyle/>
-          <a:p>
-            <a:pPr algn="l" indent="0" marL="0">
-              <a:lnSpc>
                 <a:spcPts val="1283"/>
               </a:lnSpc>
               <a:buNone/>
@@ -4401,7 +4497,7 @@
                 <a:ea typeface="Noto Sans CJK SC" pitchFamily="34" charset="-122"/>
                 <a:cs typeface="Noto Sans CJK SC" pitchFamily="34" charset="-120"/>
               </a:rPr>
-              <a:t>T1 · 2026 · 待替换</a:t>
+              <a:t>T1 · 2026 · 书目占位；图表均为合成示例</a:t>
             </a:r>
             <a:endParaRPr lang="zh-CN" sz="1125" dirty="0"/>
           </a:p>
@@ -4510,14 +4606,14 @@
       </p:sp>
       <p:sp>
         <p:nvSpPr>
-          <p:cNvPr id="4" name="T21/kicker"/>
-          <p:cNvSpPr/>
-          <p:nvPr/>
-        </p:nvSpPr>
-        <p:spPr>
-          <a:xfrm>
-            <a:off x="457200" y="152400"/>
-            <a:ext cx="11277600" cy="190500"/>
+          <p:cNvPr id="4" name="T21/title"/>
+          <p:cNvSpPr/>
+          <p:nvPr/>
+        </p:nvSpPr>
+        <p:spPr>
+          <a:xfrm>
+            <a:off x="457200" y="209550"/>
+            <a:ext cx="11277600" cy="438150"/>
           </a:xfrm>
           <a:prstGeom prst="rect">
             <a:avLst/>
@@ -4531,83 +4627,64 @@
           <a:p>
             <a:pPr algn="l" indent="0" marL="0">
               <a:lnSpc>
-                <a:spcPts val="1320"/>
-              </a:lnSpc>
-              <a:buNone/>
-            </a:pPr>
-            <a:r>
-              <a:rPr lang="zh-CN" altLang="en-US" sz="1200" dirty="0">
-                <a:solidFill>
-                  <a:srgbClr val="515B68"/>
-                </a:solidFill>
-                <a:latin typeface="Noto Sans CJK SC" pitchFamily="34" charset="0"/>
-                <a:ea typeface="Noto Sans CJK SC" pitchFamily="34" charset="-122"/>
-                <a:cs typeface="Noto Sans CJK SC" pitchFamily="34" charset="-120"/>
-              </a:rPr>
-              <a:t>结构模板 / 占位说明与合成数据</a:t>
-            </a:r>
-            <a:endParaRPr lang="zh-CN" sz="1200" dirty="0"/>
+                <a:spcPts val="3360"/>
+              </a:lnSpc>
+              <a:buNone/>
+            </a:pPr>
+            <a:r>
+              <a:rPr lang="zh-CN" altLang="en-US" sz="3000" b="1" dirty="0">
+                <a:solidFill>
+                  <a:srgbClr val="1C2430"/>
+                </a:solidFill>
+                <a:latin typeface="Noto Sans CJK SC" pitchFamily="34" charset="0"/>
+                <a:ea typeface="Noto Sans CJK SC" pitchFamily="34" charset="-122"/>
+                <a:cs typeface="Noto Sans CJK SC" pitchFamily="34" charset="-120"/>
+              </a:rPr>
+              <a:t>消融比较与组件贡献</a:t>
+            </a:r>
+            <a:endParaRPr lang="zh-CN" sz="3000" dirty="0"/>
           </a:p>
         </p:txBody>
       </p:sp>
       <p:sp>
         <p:nvSpPr>
-          <p:cNvPr id="5" name="T21/title"/>
-          <p:cNvSpPr/>
-          <p:nvPr/>
-        </p:nvSpPr>
-        <p:spPr>
-          <a:xfrm>
-            <a:off x="457200" y="381000"/>
-            <a:ext cx="11277600" cy="400050"/>
-          </a:xfrm>
-          <a:prstGeom prst="rect">
+          <p:cNvPr id="5" name="T21/header-rule"/>
+          <p:cNvSpPr/>
+          <p:nvPr/>
+        </p:nvSpPr>
+        <p:spPr>
+          <a:xfrm>
+            <a:off x="457200" y="752475"/>
+            <a:ext cx="11277600" cy="0"/>
+          </a:xfrm>
+          <a:prstGeom prst="line">
             <a:avLst/>
           </a:prstGeom>
           <a:noFill/>
-          <a:ln/>
-        </p:spPr>
-        <p:txBody>
-          <a:bodyPr wrap="none" lIns="0" tIns="0" rIns="0" bIns="0" rtlCol="0" anchor="t"/>
-          <a:lstStyle/>
-          <a:p>
-            <a:pPr algn="l" indent="0" marL="0">
-              <a:lnSpc>
-                <a:spcPts val="2856"/>
-              </a:lnSpc>
-              <a:buNone/>
-            </a:pPr>
-            <a:r>
-              <a:rPr lang="zh-CN" altLang="en-US" sz="2550" b="1" dirty="0">
-                <a:solidFill>
-                  <a:srgbClr val="1C2430"/>
-                </a:solidFill>
-                <a:latin typeface="Noto Sans CJK SC" pitchFamily="34" charset="0"/>
-                <a:ea typeface="Noto Sans CJK SC" pitchFamily="34" charset="-122"/>
-                <a:cs typeface="Noto Sans CJK SC" pitchFamily="34" charset="-120"/>
-              </a:rPr>
-              <a:t>消融比较与组件贡献</a:t>
-            </a:r>
-            <a:endParaRPr lang="zh-CN" sz="2550" dirty="0"/>
-          </a:p>
-        </p:txBody>
-      </p:sp>
-      <p:sp>
-        <p:nvSpPr>
-          <p:cNvPr id="6" name="T21/header-rule"/>
-          <p:cNvSpPr/>
-          <p:nvPr/>
-        </p:nvSpPr>
-        <p:spPr>
-          <a:xfrm>
-            <a:off x="457200" y="876300"/>
-            <a:ext cx="11277600" cy="0"/>
+          <a:ln w="10478">
+            <a:solidFill>
+              <a:srgbClr val="BEC8D4"/>
+            </a:solidFill>
+            <a:prstDash val="solid"/>
+          </a:ln>
+        </p:spPr>
+      </p:sp>
+      <p:sp>
+        <p:nvSpPr>
+          <p:cNvPr id="6" name="T21/header-accent"/>
+          <p:cNvSpPr/>
+          <p:nvPr/>
+        </p:nvSpPr>
+        <p:spPr>
+          <a:xfrm>
+            <a:off x="457200" y="752475"/>
+            <a:ext cx="704850" cy="0"/>
           </a:xfrm>
           <a:prstGeom prst="line">
             <a:avLst/>
           </a:prstGeom>
           <a:noFill/>
-          <a:ln w="11430">
+          <a:ln w="28575">
             <a:solidFill>
               <a:srgbClr val="173C70"/>
             </a:solidFill>
@@ -4630,18 +4707,18 @@
           </p:nvPr>
         </p:nvGraphicFramePr>
         <p:xfrm>
-          <a:off x="457200" y="1447800"/>
-          <a:ext cx="7486650" cy="2003108"/>
+          <a:off x="457200" y="1147381"/>
+          <a:ext cx="7200900" cy="2003108"/>
         </p:xfrm>
         <a:graphic>
           <a:graphicData uri="http://schemas.openxmlformats.org/drawingml/2006/table">
             <a:tbl>
               <a:tblPr/>
               <a:tblGrid>
-                <a:gridCol w="1871663"/>
-                <a:gridCol w="1871663"/>
-                <a:gridCol w="1871663"/>
-                <a:gridCol w="1871663"/>
+                <a:gridCol w="1800225"/>
+                <a:gridCol w="1800225"/>
+                <a:gridCol w="1800225"/>
+                <a:gridCol w="1800225"/>
               </a:tblGrid>
               <a:tr h="400622">
                 <a:tc>
@@ -5749,8 +5826,8 @@
         </p:nvSpPr>
         <p:spPr>
           <a:xfrm>
-            <a:off x="457200" y="3517583"/>
-            <a:ext cx="7486650" cy="209550"/>
+            <a:off x="457200" y="3217164"/>
+            <a:ext cx="7200900" cy="209550"/>
           </a:xfrm>
           <a:prstGeom prst="rect">
             <a:avLst/>
@@ -5785,19 +5862,21 @@
       </p:sp>
       <p:sp>
         <p:nvSpPr>
-          <p:cNvPr id="9" name="T21/card/region-1/base-rule"/>
-          <p:cNvSpPr/>
-          <p:nvPr/>
-        </p:nvSpPr>
-        <p:spPr>
-          <a:xfrm>
-            <a:off x="8343900" y="3448050"/>
-            <a:ext cx="3390900" cy="0"/>
-          </a:xfrm>
-          <a:prstGeom prst="line">
-            <a:avLst/>
-          </a:prstGeom>
-          <a:noFill/>
+          <p:cNvPr id="9" name="T21/card/region-1/frame"/>
+          <p:cNvSpPr/>
+          <p:nvPr/>
+        </p:nvSpPr>
+        <p:spPr>
+          <a:xfrm>
+            <a:off x="7981950" y="1147381"/>
+            <a:ext cx="3752850" cy="2096929"/>
+          </a:xfrm>
+          <a:prstGeom prst="rect">
+            <a:avLst/>
+          </a:prstGeom>
+          <a:solidFill>
+            <a:srgbClr val="FFFFFF"/>
+          </a:solidFill>
           <a:ln w="10478">
             <a:solidFill>
               <a:srgbClr val="BEC8D4"/>
@@ -5808,20 +5887,20 @@
       </p:sp>
       <p:sp>
         <p:nvSpPr>
-          <p:cNvPr id="10" name="T21/card/region-1/side-mark"/>
-          <p:cNvSpPr/>
-          <p:nvPr/>
-        </p:nvSpPr>
-        <p:spPr>
-          <a:xfrm>
-            <a:off x="8343900" y="1466850"/>
-            <a:ext cx="47625" cy="295275"/>
+          <p:cNvPr id="10" name="T21/card/region-1/heading-fill"/>
+          <p:cNvSpPr/>
+          <p:nvPr/>
+        </p:nvSpPr>
+        <p:spPr>
+          <a:xfrm>
+            <a:off x="7991475" y="1156907"/>
+            <a:ext cx="3733800" cy="371475"/>
           </a:xfrm>
           <a:prstGeom prst="rect">
             <a:avLst/>
           </a:prstGeom>
           <a:solidFill>
-            <a:srgbClr val="173C70"/>
+            <a:srgbClr val="EAF2FA"/>
           </a:solidFill>
           <a:ln w="12700">
             <a:solidFill>
@@ -5835,14 +5914,37 @@
       </p:sp>
       <p:sp>
         <p:nvSpPr>
-          <p:cNvPr id="11" name="T21/card/region-1/title"/>
-          <p:cNvSpPr/>
-          <p:nvPr/>
-        </p:nvSpPr>
-        <p:spPr>
-          <a:xfrm>
-            <a:off x="8496300" y="1466850"/>
-            <a:ext cx="3238500" cy="304800"/>
+          <p:cNvPr id="11" name="T21/card/region-1/heading-rule"/>
+          <p:cNvSpPr/>
+          <p:nvPr/>
+        </p:nvSpPr>
+        <p:spPr>
+          <a:xfrm>
+            <a:off x="7981950" y="1528381"/>
+            <a:ext cx="3752850" cy="0"/>
+          </a:xfrm>
+          <a:prstGeom prst="line">
+            <a:avLst/>
+          </a:prstGeom>
+          <a:noFill/>
+          <a:ln w="9525">
+            <a:solidFill>
+              <a:srgbClr val="BEC8D4"/>
+            </a:solidFill>
+            <a:prstDash val="solid"/>
+          </a:ln>
+        </p:spPr>
+      </p:sp>
+      <p:sp>
+        <p:nvSpPr>
+          <p:cNvPr id="12" name="T21/card/region-1/title"/>
+          <p:cNvSpPr/>
+          <p:nvPr/>
+        </p:nvSpPr>
+        <p:spPr>
+          <a:xfrm>
+            <a:off x="8105775" y="1195007"/>
+            <a:ext cx="3505200" cy="295275"/>
           </a:xfrm>
           <a:prstGeom prst="rect">
             <a:avLst/>
@@ -5856,14 +5958,14 @@
           <a:p>
             <a:pPr algn="l" indent="0" marL="0">
               <a:lnSpc>
-                <a:spcPts val="2070"/>
-              </a:lnSpc>
-              <a:buNone/>
-            </a:pPr>
-            <a:r>
-              <a:rPr lang="zh-CN" altLang="en-US" sz="1800" b="1" dirty="0">
-                <a:solidFill>
-                  <a:srgbClr val="173C70"/>
+                <a:spcPts val="2242"/>
+              </a:lnSpc>
+              <a:buNone/>
+            </a:pPr>
+            <a:r>
+              <a:rPr lang="zh-CN" altLang="en-US" sz="1950" b="1" dirty="0">
+                <a:solidFill>
+                  <a:srgbClr val="235E96"/>
                 </a:solidFill>
                 <a:latin typeface="Noto Sans CJK SC" pitchFamily="34" charset="0"/>
                 <a:ea typeface="Noto Sans CJK SC" pitchFamily="34" charset="-122"/>
@@ -5871,20 +5973,20 @@
               </a:rPr>
               <a:t>组件作用</a:t>
             </a:r>
-            <a:endParaRPr lang="zh-CN" sz="1800" dirty="0"/>
+            <a:endParaRPr lang="zh-CN" sz="1950" dirty="0"/>
           </a:p>
         </p:txBody>
       </p:sp>
       <p:sp>
         <p:nvSpPr>
-          <p:cNvPr id="12" name="T21/card/region-1/body"/>
-          <p:cNvSpPr/>
-          <p:nvPr/>
-        </p:nvSpPr>
-        <p:spPr>
-          <a:xfrm>
-            <a:off x="8496300" y="1885950"/>
-            <a:ext cx="3238500" cy="1466850"/>
+          <p:cNvPr id="13" name="T21/card/region-1/body"/>
+          <p:cNvSpPr/>
+          <p:nvPr/>
+        </p:nvSpPr>
+        <p:spPr>
+          <a:xfrm>
+            <a:off x="8115300" y="1633156"/>
+            <a:ext cx="3486150" cy="1515904"/>
           </a:xfrm>
           <a:prstGeom prst="rect">
             <a:avLst/>
@@ -5898,12 +6000,12 @@
           <a:p>
             <a:pPr algn="l" indent="0" marL="0">
               <a:lnSpc>
-                <a:spcPts val="2139"/>
-              </a:lnSpc>
-              <a:buNone/>
-            </a:pPr>
-            <a:r>
-              <a:rPr lang="zh-CN" altLang="en-US" sz="1725" dirty="0">
+                <a:spcPts val="2232"/>
+              </a:lnSpc>
+              <a:buNone/>
+            </a:pPr>
+            <a:r>
+              <a:rPr lang="zh-CN" altLang="en-US" sz="1800" dirty="0">
                 <a:solidFill>
                   <a:srgbClr val="1C2430"/>
                 </a:solidFill>
@@ -5913,17 +6015,17 @@
               </a:rPr>
               <a:t>把消融操作和机制假设对应</a:t>
             </a:r>
-            <a:endParaRPr lang="zh-CN" sz="1725" dirty="0"/>
+            <a:endParaRPr lang="zh-CN" sz="1800" dirty="0"/>
           </a:p>
           <a:p>
             <a:pPr algn="l" indent="0" marL="0">
               <a:lnSpc>
-                <a:spcPts val="2139"/>
-              </a:lnSpc>
-              <a:buNone/>
-            </a:pPr>
-            <a:r>
-              <a:rPr lang="zh-CN" altLang="en-US" sz="1725" dirty="0">
+                <a:spcPts val="2232"/>
+              </a:lnSpc>
+              <a:buNone/>
+            </a:pPr>
+            <a:r>
+              <a:rPr lang="zh-CN" altLang="en-US" sz="1800" dirty="0">
                 <a:solidFill>
                   <a:srgbClr val="1C2430"/>
                 </a:solidFill>
@@ -5931,22 +6033,56 @@
                 <a:ea typeface="Noto Sans CJK SC" pitchFamily="34" charset="-122"/>
                 <a:cs typeface="Noto Sans CJK SC" pitchFamily="34" charset="-120"/>
               </a:rPr>
-              <a:t>比较时其余输入与预算保持一致</a:t>
-            </a:r>
-            <a:endParaRPr lang="zh-CN" sz="1725" dirty="0"/>
+              <a:t>比较时其余</a:t>
+            </a:r>
+            <a:pPr algn="l" indent="0" marL="0">
+              <a:lnSpc>
+                <a:spcPts val="2232"/>
+              </a:lnSpc>
+              <a:buNone/>
+            </a:pPr>
+            <a:r>
+              <a:rPr lang="zh-CN" altLang="en-US" sz="1800" b="1" dirty="0">
+                <a:solidFill>
+                  <a:srgbClr val="235E96"/>
+                </a:solidFill>
+                <a:latin typeface="Noto Sans CJK SC" pitchFamily="34" charset="0"/>
+                <a:ea typeface="Noto Sans CJK SC" pitchFamily="34" charset="-122"/>
+                <a:cs typeface="Noto Sans CJK SC" pitchFamily="34" charset="-120"/>
+              </a:rPr>
+              <a:t>输入</a:t>
+            </a:r>
+            <a:pPr algn="l" indent="0" marL="0">
+              <a:lnSpc>
+                <a:spcPts val="2232"/>
+              </a:lnSpc>
+              <a:buNone/>
+            </a:pPr>
+            <a:r>
+              <a:rPr lang="zh-CN" altLang="en-US" sz="1800" dirty="0">
+                <a:solidFill>
+                  <a:srgbClr val="1C2430"/>
+                </a:solidFill>
+                <a:latin typeface="Noto Sans CJK SC" pitchFamily="34" charset="0"/>
+                <a:ea typeface="Noto Sans CJK SC" pitchFamily="34" charset="-122"/>
+                <a:cs typeface="Noto Sans CJK SC" pitchFamily="34" charset="-120"/>
+              </a:rPr>
+              <a:t>与预算保持一致</a:t>
+            </a:r>
+            <a:endParaRPr lang="zh-CN" sz="1800" dirty="0"/>
           </a:p>
         </p:txBody>
       </p:sp>
       <p:sp>
         <p:nvSpPr>
-          <p:cNvPr id="13" name="T21/card/region-2/frame"/>
-          <p:cNvSpPr/>
-          <p:nvPr/>
-        </p:nvSpPr>
-        <p:spPr>
-          <a:xfrm>
-            <a:off x="8343900" y="3810000"/>
-            <a:ext cx="3390900" cy="2171700"/>
+          <p:cNvPr id="14" name="T21/card/region-2/frame"/>
+          <p:cNvSpPr/>
+          <p:nvPr/>
+        </p:nvSpPr>
+        <p:spPr>
+          <a:xfrm>
+            <a:off x="7981950" y="3596069"/>
+            <a:ext cx="3752850" cy="2398109"/>
           </a:xfrm>
           <a:prstGeom prst="rect">
             <a:avLst/>
@@ -5964,20 +6100,20 @@
       </p:sp>
       <p:sp>
         <p:nvSpPr>
-          <p:cNvPr id="14" name="T21/card/region-2/tab"/>
-          <p:cNvSpPr/>
-          <p:nvPr/>
-        </p:nvSpPr>
-        <p:spPr>
-          <a:xfrm>
-            <a:off x="8458200" y="3695700"/>
-            <a:ext cx="1181100" cy="320040"/>
+          <p:cNvPr id="15" name="T21/card/region-2/tab"/>
+          <p:cNvSpPr/>
+          <p:nvPr/>
+        </p:nvSpPr>
+        <p:spPr>
+          <a:xfrm>
+            <a:off x="8096250" y="3481769"/>
+            <a:ext cx="1257300" cy="342900"/>
           </a:xfrm>
           <a:prstGeom prst="rect">
             <a:avLst/>
           </a:prstGeom>
           <a:solidFill>
-            <a:srgbClr val="173C70"/>
+            <a:srgbClr val="235E96"/>
           </a:solidFill>
           <a:ln w="12700">
             <a:solidFill>
@@ -5991,14 +6127,14 @@
       </p:sp>
       <p:sp>
         <p:nvSpPr>
-          <p:cNvPr id="15" name="T21/card/region-2/title"/>
-          <p:cNvSpPr/>
-          <p:nvPr/>
-        </p:nvSpPr>
-        <p:spPr>
-          <a:xfrm>
-            <a:off x="8562975" y="3724275"/>
-            <a:ext cx="971550" cy="262890"/>
+          <p:cNvPr id="16" name="T21/card/region-2/title"/>
+          <p:cNvSpPr/>
+          <p:nvPr/>
+        </p:nvSpPr>
+        <p:spPr>
+          <a:xfrm>
+            <a:off x="8201025" y="3510344"/>
+            <a:ext cx="1047750" cy="285750"/>
           </a:xfrm>
           <a:prstGeom prst="rect">
             <a:avLst/>
@@ -6012,12 +6148,12 @@
           <a:p>
             <a:pPr algn="l" indent="0" marL="0">
               <a:lnSpc>
-                <a:spcPts val="2070"/>
-              </a:lnSpc>
-              <a:buNone/>
-            </a:pPr>
-            <a:r>
-              <a:rPr lang="zh-CN" altLang="en-US" sz="1800" b="1" dirty="0">
+                <a:spcPts val="2242"/>
+              </a:lnSpc>
+              <a:buNone/>
+            </a:pPr>
+            <a:r>
+              <a:rPr lang="zh-CN" altLang="en-US" sz="1950" b="1" dirty="0">
                 <a:solidFill>
                   <a:srgbClr val="FFFFFF"/>
                 </a:solidFill>
@@ -6027,20 +6163,20 @@
               </a:rPr>
               <a:t>替代解释</a:t>
             </a:r>
-            <a:endParaRPr lang="zh-CN" sz="1800" dirty="0"/>
+            <a:endParaRPr lang="zh-CN" sz="1950" dirty="0"/>
           </a:p>
         </p:txBody>
       </p:sp>
       <p:sp>
         <p:nvSpPr>
-          <p:cNvPr id="16" name="T21/card/region-2/body"/>
-          <p:cNvSpPr/>
-          <p:nvPr/>
-        </p:nvSpPr>
-        <p:spPr>
-          <a:xfrm>
-            <a:off x="8477250" y="4158615"/>
-            <a:ext cx="3124200" cy="1727835"/>
+          <p:cNvPr id="17" name="T21/card/region-2/body"/>
+          <p:cNvSpPr/>
+          <p:nvPr/>
+        </p:nvSpPr>
+        <p:spPr>
+          <a:xfrm>
+            <a:off x="8115300" y="3967544"/>
+            <a:ext cx="3486150" cy="1931384"/>
           </a:xfrm>
           <a:prstGeom prst="rect">
             <a:avLst/>
@@ -6054,12 +6190,12 @@
           <a:p>
             <a:pPr algn="l" indent="0" marL="0">
               <a:lnSpc>
-                <a:spcPts val="2139"/>
-              </a:lnSpc>
-              <a:buNone/>
-            </a:pPr>
-            <a:r>
-              <a:rPr lang="zh-CN" altLang="en-US" sz="1725" dirty="0">
+                <a:spcPts val="2232"/>
+              </a:lnSpc>
+              <a:buNone/>
+            </a:pPr>
+            <a:r>
+              <a:rPr lang="zh-CN" altLang="en-US" sz="1800" dirty="0">
                 <a:solidFill>
                   <a:srgbClr val="1C2430"/>
                 </a:solidFill>
@@ -6069,17 +6205,17 @@
               </a:rPr>
               <a:t>消融同时改变了哪些条件</a:t>
             </a:r>
-            <a:endParaRPr lang="zh-CN" sz="1725" dirty="0"/>
+            <a:endParaRPr lang="zh-CN" sz="1800" dirty="0"/>
           </a:p>
           <a:p>
             <a:pPr algn="l" indent="0" marL="0">
               <a:lnSpc>
-                <a:spcPts val="2139"/>
-              </a:lnSpc>
-              <a:buNone/>
-            </a:pPr>
-            <a:r>
-              <a:rPr lang="zh-CN" altLang="en-US" sz="1725" dirty="0">
+                <a:spcPts val="2232"/>
+              </a:lnSpc>
+              <a:buNone/>
+            </a:pPr>
+            <a:r>
+              <a:rPr lang="zh-CN" altLang="en-US" sz="1800" dirty="0">
                 <a:solidFill>
                   <a:srgbClr val="1C2430"/>
                 </a:solidFill>
@@ -6089,17 +6225,17 @@
               </a:rPr>
               <a:t>检查调参、容量与数据的影响</a:t>
             </a:r>
-            <a:endParaRPr lang="zh-CN" sz="1725" dirty="0"/>
+            <a:endParaRPr lang="zh-CN" sz="1800" dirty="0"/>
           </a:p>
           <a:p>
             <a:pPr algn="l" indent="0" marL="0">
               <a:lnSpc>
-                <a:spcPts val="2139"/>
-              </a:lnSpc>
-              <a:buNone/>
-            </a:pPr>
-            <a:r>
-              <a:rPr lang="zh-CN" altLang="en-US" sz="1725" dirty="0">
+                <a:spcPts val="2232"/>
+              </a:lnSpc>
+              <a:buNone/>
+            </a:pPr>
+            <a:r>
+              <a:rPr lang="zh-CN" altLang="en-US" sz="1800" dirty="0">
                 <a:solidFill>
                   <a:srgbClr val="1C2430"/>
                 </a:solidFill>
@@ -6107,22 +6243,131 @@
                 <a:ea typeface="Noto Sans CJK SC" pitchFamily="34" charset="-122"/>
                 <a:cs typeface="Noto Sans CJK SC" pitchFamily="34" charset="-120"/>
               </a:rPr>
-              <a:t>用进一步对照区分机制贡献</a:t>
-            </a:r>
-            <a:endParaRPr lang="zh-CN" sz="1725" dirty="0"/>
+              <a:t>用进一步</a:t>
+            </a:r>
+            <a:pPr algn="l" indent="0" marL="0">
+              <a:lnSpc>
+                <a:spcPts val="2232"/>
+              </a:lnSpc>
+              <a:buNone/>
+            </a:pPr>
+            <a:r>
+              <a:rPr lang="zh-CN" altLang="en-US" sz="1800" b="1" dirty="0">
+                <a:solidFill>
+                  <a:srgbClr val="235E96"/>
+                </a:solidFill>
+                <a:latin typeface="Noto Sans CJK SC" pitchFamily="34" charset="0"/>
+                <a:ea typeface="Noto Sans CJK SC" pitchFamily="34" charset="-122"/>
+                <a:cs typeface="Noto Sans CJK SC" pitchFamily="34" charset="-120"/>
+              </a:rPr>
+              <a:t>对照</a:t>
+            </a:r>
+            <a:pPr algn="l" indent="0" marL="0">
+              <a:lnSpc>
+                <a:spcPts val="2232"/>
+              </a:lnSpc>
+              <a:buNone/>
+            </a:pPr>
+            <a:r>
+              <a:rPr lang="zh-CN" altLang="en-US" sz="1800" dirty="0">
+                <a:solidFill>
+                  <a:srgbClr val="1C2430"/>
+                </a:solidFill>
+                <a:latin typeface="Noto Sans CJK SC" pitchFamily="34" charset="0"/>
+                <a:ea typeface="Noto Sans CJK SC" pitchFamily="34" charset="-122"/>
+                <a:cs typeface="Noto Sans CJK SC" pitchFamily="34" charset="-120"/>
+              </a:rPr>
+              <a:t>区分机制贡献</a:t>
+            </a:r>
+            <a:endParaRPr lang="zh-CN" sz="1800" dirty="0"/>
           </a:p>
         </p:txBody>
       </p:sp>
       <p:sp>
         <p:nvSpPr>
-          <p:cNvPr id="17" name="T21/card/region-3/title"/>
-          <p:cNvSpPr/>
-          <p:nvPr/>
-        </p:nvSpPr>
-        <p:spPr>
-          <a:xfrm>
-            <a:off x="457200" y="4914900"/>
-            <a:ext cx="7486650" cy="323850"/>
+          <p:cNvPr id="18" name="T21/card/region-3/frame"/>
+          <p:cNvSpPr/>
+          <p:nvPr/>
+        </p:nvSpPr>
+        <p:spPr>
+          <a:xfrm>
+            <a:off x="457200" y="3617214"/>
+            <a:ext cx="7200900" cy="1879378"/>
+          </a:xfrm>
+          <a:prstGeom prst="rect">
+            <a:avLst/>
+          </a:prstGeom>
+          <a:solidFill>
+            <a:srgbClr val="FFFFFF"/>
+          </a:solidFill>
+          <a:ln w="10478">
+            <a:solidFill>
+              <a:srgbClr val="BEC8D4"/>
+            </a:solidFill>
+            <a:prstDash val="solid"/>
+          </a:ln>
+        </p:spPr>
+      </p:sp>
+      <p:sp>
+        <p:nvSpPr>
+          <p:cNvPr id="19" name="T21/card/region-3/heading-fill"/>
+          <p:cNvSpPr/>
+          <p:nvPr/>
+        </p:nvSpPr>
+        <p:spPr>
+          <a:xfrm>
+            <a:off x="466725" y="3626739"/>
+            <a:ext cx="7181850" cy="371475"/>
+          </a:xfrm>
+          <a:prstGeom prst="rect">
+            <a:avLst/>
+          </a:prstGeom>
+          <a:solidFill>
+            <a:srgbClr val="EAF2FA"/>
+          </a:solidFill>
+          <a:ln w="12700">
+            <a:solidFill>
+              <a:srgbClr val="FFFFFF">
+                <a:alpha val="0"/>
+              </a:srgbClr>
+            </a:solidFill>
+            <a:prstDash val="solid"/>
+          </a:ln>
+        </p:spPr>
+      </p:sp>
+      <p:sp>
+        <p:nvSpPr>
+          <p:cNvPr id="20" name="T21/card/region-3/heading-rule"/>
+          <p:cNvSpPr/>
+          <p:nvPr/>
+        </p:nvSpPr>
+        <p:spPr>
+          <a:xfrm>
+            <a:off x="457200" y="3998214"/>
+            <a:ext cx="7200900" cy="0"/>
+          </a:xfrm>
+          <a:prstGeom prst="line">
+            <a:avLst/>
+          </a:prstGeom>
+          <a:noFill/>
+          <a:ln w="9525">
+            <a:solidFill>
+              <a:srgbClr val="BEC8D4"/>
+            </a:solidFill>
+            <a:prstDash val="solid"/>
+          </a:ln>
+        </p:spPr>
+      </p:sp>
+      <p:sp>
+        <p:nvSpPr>
+          <p:cNvPr id="21" name="T21/card/region-3/title"/>
+          <p:cNvSpPr/>
+          <p:nvPr/>
+        </p:nvSpPr>
+        <p:spPr>
+          <a:xfrm>
+            <a:off x="581025" y="3664839"/>
+            <a:ext cx="6953250" cy="295275"/>
           </a:xfrm>
           <a:prstGeom prst="rect">
             <a:avLst/>
@@ -6136,14 +6381,14 @@
           <a:p>
             <a:pPr algn="l" indent="0" marL="0">
               <a:lnSpc>
-                <a:spcPts val="2156"/>
-              </a:lnSpc>
-              <a:buNone/>
-            </a:pPr>
-            <a:r>
-              <a:rPr lang="zh-CN" altLang="en-US" sz="1875" b="1" dirty="0">
-                <a:solidFill>
-                  <a:srgbClr val="173C70"/>
+                <a:spcPts val="2242"/>
+              </a:lnSpc>
+              <a:buNone/>
+            </a:pPr>
+            <a:r>
+              <a:rPr lang="zh-CN" altLang="en-US" sz="1950" b="1" dirty="0">
+                <a:solidFill>
+                  <a:srgbClr val="235E96"/>
                 </a:solidFill>
                 <a:latin typeface="Noto Sans CJK SC" pitchFamily="34" charset="0"/>
                 <a:ea typeface="Noto Sans CJK SC" pitchFamily="34" charset="-122"/>
@@ -6151,20 +6396,20 @@
               </a:rPr>
               <a:t>不确定性与重复</a:t>
             </a:r>
-            <a:endParaRPr lang="zh-CN" sz="1875" dirty="0"/>
+            <a:endParaRPr lang="zh-CN" sz="1950" dirty="0"/>
           </a:p>
         </p:txBody>
       </p:sp>
       <p:sp>
         <p:nvSpPr>
-          <p:cNvPr id="18" name="T21/card/region-3/body"/>
-          <p:cNvSpPr/>
-          <p:nvPr/>
-        </p:nvSpPr>
-        <p:spPr>
-          <a:xfrm>
-            <a:off x="457200" y="5295900"/>
-            <a:ext cx="7486650" cy="647700"/>
+          <p:cNvPr id="22" name="T21/card/region-3/body"/>
+          <p:cNvSpPr/>
+          <p:nvPr/>
+        </p:nvSpPr>
+        <p:spPr>
+          <a:xfrm>
+            <a:off x="590550" y="4102989"/>
+            <a:ext cx="6934200" cy="1298353"/>
           </a:xfrm>
           <a:prstGeom prst="rect">
             <a:avLst/>
@@ -6178,12 +6423,12 @@
           <a:p>
             <a:pPr algn="l" indent="0" marL="0">
               <a:lnSpc>
-                <a:spcPts val="2139"/>
-              </a:lnSpc>
-              <a:buNone/>
-            </a:pPr>
-            <a:r>
-              <a:rPr lang="zh-CN" altLang="en-US" sz="1725" dirty="0">
+                <a:spcPts val="2232"/>
+              </a:lnSpc>
+              <a:buNone/>
+            </a:pPr>
+            <a:r>
+              <a:rPr lang="zh-CN" altLang="en-US" sz="1800" dirty="0">
                 <a:solidFill>
                   <a:srgbClr val="1C2430"/>
                 </a:solidFill>
@@ -6191,19 +6436,33 @@
                 <a:ea typeface="Noto Sans CJK SC" pitchFamily="34" charset="-122"/>
                 <a:cs typeface="Noto Sans CJK SC" pitchFamily="34" charset="-120"/>
               </a:rPr>
-              <a:t>报告独立重复、区间和显著性方法</a:t>
-            </a:r>
-            <a:endParaRPr lang="zh-CN" sz="1725" dirty="0"/>
-          </a:p>
-          <a:p>
+              <a:t>报告</a:t>
+            </a:r>
             <a:pPr algn="l" indent="0" marL="0">
               <a:lnSpc>
-                <a:spcPts val="2139"/>
-              </a:lnSpc>
-              <a:buNone/>
-            </a:pPr>
-            <a:r>
-              <a:rPr lang="zh-CN" altLang="en-US" sz="1725" dirty="0">
+                <a:spcPts val="2232"/>
+              </a:lnSpc>
+              <a:buNone/>
+            </a:pPr>
+            <a:r>
+              <a:rPr lang="zh-CN" altLang="en-US" sz="1800" b="1" dirty="0">
+                <a:solidFill>
+                  <a:srgbClr val="235E96"/>
+                </a:solidFill>
+                <a:latin typeface="Noto Sans CJK SC" pitchFamily="34" charset="0"/>
+                <a:ea typeface="Noto Sans CJK SC" pitchFamily="34" charset="-122"/>
+                <a:cs typeface="Noto Sans CJK SC" pitchFamily="34" charset="-120"/>
+              </a:rPr>
+              <a:t>独立重复</a:t>
+            </a:r>
+            <a:pPr algn="l" indent="0" marL="0">
+              <a:lnSpc>
+                <a:spcPts val="2232"/>
+              </a:lnSpc>
+              <a:buNone/>
+            </a:pPr>
+            <a:r>
+              <a:rPr lang="zh-CN" altLang="en-US" sz="1800" dirty="0">
                 <a:solidFill>
                   <a:srgbClr val="1C2430"/>
                 </a:solidFill>
@@ -6211,15 +6470,35 @@
                 <a:ea typeface="Noto Sans CJK SC" pitchFamily="34" charset="-122"/>
                 <a:cs typeface="Noto Sans CJK SC" pitchFamily="34" charset="-120"/>
               </a:rPr>
+              <a:t>、区间和显著性方法</a:t>
+            </a:r>
+            <a:endParaRPr lang="zh-CN" sz="1800" dirty="0"/>
+          </a:p>
+          <a:p>
+            <a:pPr algn="l" indent="0" marL="0">
+              <a:lnSpc>
+                <a:spcPts val="2232"/>
+              </a:lnSpc>
+              <a:buNone/>
+            </a:pPr>
+            <a:r>
+              <a:rPr lang="zh-CN" altLang="en-US" sz="1800" dirty="0">
+                <a:solidFill>
+                  <a:srgbClr val="1C2430"/>
+                </a:solidFill>
+                <a:latin typeface="Noto Sans CJK SC" pitchFamily="34" charset="0"/>
+                <a:ea typeface="Noto Sans CJK SC" pitchFamily="34" charset="-122"/>
+                <a:cs typeface="Noto Sans CJK SC" pitchFamily="34" charset="-120"/>
+              </a:rPr>
               <a:t>避免仅凭单次最佳值解释组件贡献</a:t>
             </a:r>
-            <a:endParaRPr lang="zh-CN" sz="1725" dirty="0"/>
+            <a:endParaRPr lang="zh-CN" sz="1800" dirty="0"/>
           </a:p>
         </p:txBody>
       </p:sp>
       <p:sp>
         <p:nvSpPr>
-          <p:cNvPr id="19" name="T21/sources"/>
+          <p:cNvPr id="23" name="T21/sources"/>
           <p:cNvSpPr/>
           <p:nvPr/>
         </p:nvSpPr>
@@ -6253,7 +6532,7 @@
                 <a:ea typeface="Noto Sans CJK SC" pitchFamily="34" charset="-122"/>
                 <a:cs typeface="Noto Sans CJK SC" pitchFamily="34" charset="-120"/>
               </a:rPr>
-              <a:t>T1 · 2026 · 待替换</a:t>
+              <a:t>T1 · 2026 · 书目占位；图表均为合成示例</a:t>
             </a:r>
             <a:endParaRPr lang="zh-CN" sz="1125" dirty="0"/>
           </a:p>
@@ -6362,14 +6641,14 @@
       </p:sp>
       <p:sp>
         <p:nvSpPr>
-          <p:cNvPr id="4" name="T22/kicker"/>
-          <p:cNvSpPr/>
-          <p:nvPr/>
-        </p:nvSpPr>
-        <p:spPr>
-          <a:xfrm>
-            <a:off x="457200" y="152400"/>
-            <a:ext cx="11277600" cy="190500"/>
+          <p:cNvPr id="4" name="T22/title"/>
+          <p:cNvSpPr/>
+          <p:nvPr/>
+        </p:nvSpPr>
+        <p:spPr>
+          <a:xfrm>
+            <a:off x="457200" y="209550"/>
+            <a:ext cx="11277600" cy="438150"/>
           </a:xfrm>
           <a:prstGeom prst="rect">
             <a:avLst/>
@@ -6383,83 +6662,64 @@
           <a:p>
             <a:pPr algn="l" indent="0" marL="0">
               <a:lnSpc>
-                <a:spcPts val="1320"/>
-              </a:lnSpc>
-              <a:buNone/>
-            </a:pPr>
-            <a:r>
-              <a:rPr lang="zh-CN" altLang="en-US" sz="1200" dirty="0">
-                <a:solidFill>
-                  <a:srgbClr val="515B68"/>
-                </a:solidFill>
-                <a:latin typeface="Noto Sans CJK SC" pitchFamily="34" charset="0"/>
-                <a:ea typeface="Noto Sans CJK SC" pitchFamily="34" charset="-122"/>
-                <a:cs typeface="Noto Sans CJK SC" pitchFamily="34" charset="-120"/>
-              </a:rPr>
-              <a:t>结构模板 / 占位说明与合成数据</a:t>
-            </a:r>
-            <a:endParaRPr lang="zh-CN" sz="1200" dirty="0"/>
+                <a:spcPts val="3360"/>
+              </a:lnSpc>
+              <a:buNone/>
+            </a:pPr>
+            <a:r>
+              <a:rPr lang="zh-CN" altLang="en-US" sz="3000" b="1" dirty="0">
+                <a:solidFill>
+                  <a:srgbClr val="1C2430"/>
+                </a:solidFill>
+                <a:latin typeface="Noto Sans CJK SC" pitchFamily="34" charset="0"/>
+                <a:ea typeface="Noto Sans CJK SC" pitchFamily="34" charset="-122"/>
+                <a:cs typeface="Noto Sans CJK SC" pitchFamily="34" charset="-120"/>
+              </a:rPr>
+              <a:t>跨环境表现与异质性</a:t>
+            </a:r>
+            <a:endParaRPr lang="zh-CN" sz="3000" dirty="0"/>
           </a:p>
         </p:txBody>
       </p:sp>
       <p:sp>
         <p:nvSpPr>
-          <p:cNvPr id="5" name="T22/title"/>
-          <p:cNvSpPr/>
-          <p:nvPr/>
-        </p:nvSpPr>
-        <p:spPr>
-          <a:xfrm>
-            <a:off x="457200" y="381000"/>
-            <a:ext cx="11277600" cy="400050"/>
-          </a:xfrm>
-          <a:prstGeom prst="rect">
+          <p:cNvPr id="5" name="T22/header-rule"/>
+          <p:cNvSpPr/>
+          <p:nvPr/>
+        </p:nvSpPr>
+        <p:spPr>
+          <a:xfrm>
+            <a:off x="457200" y="752475"/>
+            <a:ext cx="11277600" cy="0"/>
+          </a:xfrm>
+          <a:prstGeom prst="line">
             <a:avLst/>
           </a:prstGeom>
           <a:noFill/>
-          <a:ln/>
-        </p:spPr>
-        <p:txBody>
-          <a:bodyPr wrap="none" lIns="0" tIns="0" rIns="0" bIns="0" rtlCol="0" anchor="t"/>
-          <a:lstStyle/>
-          <a:p>
-            <a:pPr algn="l" indent="0" marL="0">
-              <a:lnSpc>
-                <a:spcPts val="2856"/>
-              </a:lnSpc>
-              <a:buNone/>
-            </a:pPr>
-            <a:r>
-              <a:rPr lang="zh-CN" altLang="en-US" sz="2550" b="1" dirty="0">
-                <a:solidFill>
-                  <a:srgbClr val="1C2430"/>
-                </a:solidFill>
-                <a:latin typeface="Noto Sans CJK SC" pitchFamily="34" charset="0"/>
-                <a:ea typeface="Noto Sans CJK SC" pitchFamily="34" charset="-122"/>
-                <a:cs typeface="Noto Sans CJK SC" pitchFamily="34" charset="-120"/>
-              </a:rPr>
-              <a:t>跨环境表现与异质性</a:t>
-            </a:r>
-            <a:endParaRPr lang="zh-CN" sz="2550" dirty="0"/>
-          </a:p>
-        </p:txBody>
-      </p:sp>
-      <p:sp>
-        <p:nvSpPr>
-          <p:cNvPr id="6" name="T22/header-rule"/>
-          <p:cNvSpPr/>
-          <p:nvPr/>
-        </p:nvSpPr>
-        <p:spPr>
-          <a:xfrm>
-            <a:off x="457200" y="876300"/>
-            <a:ext cx="11277600" cy="0"/>
+          <a:ln w="10478">
+            <a:solidFill>
+              <a:srgbClr val="BEC8D4"/>
+            </a:solidFill>
+            <a:prstDash val="solid"/>
+          </a:ln>
+        </p:spPr>
+      </p:sp>
+      <p:sp>
+        <p:nvSpPr>
+          <p:cNvPr id="6" name="T22/header-accent"/>
+          <p:cNvSpPr/>
+          <p:nvPr/>
+        </p:nvSpPr>
+        <p:spPr>
+          <a:xfrm>
+            <a:off x="457200" y="752475"/>
+            <a:ext cx="704850" cy="0"/>
           </a:xfrm>
           <a:prstGeom prst="line">
             <a:avLst/>
           </a:prstGeom>
           <a:noFill/>
-          <a:ln w="11430">
+          <a:ln w="28575">
             <a:solidFill>
               <a:srgbClr val="173C70"/>
             </a:solidFill>
@@ -6474,8 +6734,8 @@
           <p:nvPr/>
         </p:nvGraphicFramePr>
         <p:xfrm>
-          <a:off x="457200" y="1390650"/>
-          <a:ext cx="7905750" cy="3295650"/>
+          <a:off x="457200" y="1206722"/>
+          <a:ext cx="7905750" cy="3422428"/>
         </p:xfrm>
         <a:graphic xmlns:a="http://schemas.openxmlformats.org/drawingml/2006/main">
           <a:graphicData uri="http://schemas.openxmlformats.org/drawingml/2006/chart">
@@ -6491,8 +6751,8 @@
         </p:nvSpPr>
         <p:spPr>
           <a:xfrm>
-            <a:off x="8686800" y="1390650"/>
-            <a:ext cx="3048000" cy="2095500"/>
+            <a:off x="8686800" y="1206722"/>
+            <a:ext cx="3048000" cy="2176082"/>
           </a:xfrm>
           <a:prstGeom prst="rect">
             <a:avLst/>
@@ -6516,14 +6776,14 @@
         </p:nvSpPr>
         <p:spPr>
           <a:xfrm>
-            <a:off x="8696325" y="1400175"/>
+            <a:off x="8696325" y="1216247"/>
             <a:ext cx="3028950" cy="371475"/>
           </a:xfrm>
           <a:prstGeom prst="rect">
             <a:avLst/>
           </a:prstGeom>
           <a:solidFill>
-            <a:srgbClr val="EEF3F8"/>
+            <a:srgbClr val="EAF2FA"/>
           </a:solidFill>
           <a:ln w="12700">
             <a:solidFill>
@@ -6543,7 +6803,7 @@
         </p:nvSpPr>
         <p:spPr>
           <a:xfrm>
-            <a:off x="8686800" y="1771650"/>
+            <a:off x="8686800" y="1587722"/>
             <a:ext cx="3048000" cy="0"/>
           </a:xfrm>
           <a:prstGeom prst="line">
@@ -6566,8 +6826,8 @@
         </p:nvSpPr>
         <p:spPr>
           <a:xfrm>
-            <a:off x="8810625" y="1447800"/>
-            <a:ext cx="2800350" cy="276225"/>
+            <a:off x="8810625" y="1254347"/>
+            <a:ext cx="2800350" cy="295275"/>
           </a:xfrm>
           <a:prstGeom prst="rect">
             <a:avLst/>
@@ -6581,14 +6841,14 @@
           <a:p>
             <a:pPr algn="l" indent="0" marL="0">
               <a:lnSpc>
-                <a:spcPts val="2070"/>
-              </a:lnSpc>
-              <a:buNone/>
-            </a:pPr>
-            <a:r>
-              <a:rPr lang="zh-CN" altLang="en-US" sz="1800" b="1" dirty="0">
-                <a:solidFill>
-                  <a:srgbClr val="173C70"/>
+                <a:spcPts val="2242"/>
+              </a:lnSpc>
+              <a:buNone/>
+            </a:pPr>
+            <a:r>
+              <a:rPr lang="zh-CN" altLang="en-US" sz="1950" b="1" dirty="0">
+                <a:solidFill>
+                  <a:srgbClr val="235E96"/>
                 </a:solidFill>
                 <a:latin typeface="Noto Sans CJK SC" pitchFamily="34" charset="0"/>
                 <a:ea typeface="Noto Sans CJK SC" pitchFamily="34" charset="-122"/>
@@ -6596,7 +6856,7 @@
               </a:rPr>
               <a:t>测试环境</a:t>
             </a:r>
-            <a:endParaRPr lang="zh-CN" sz="1800" dirty="0"/>
+            <a:endParaRPr lang="zh-CN" sz="1950" dirty="0"/>
           </a:p>
         </p:txBody>
       </p:sp>
@@ -6608,8 +6868,8 @@
         </p:nvSpPr>
         <p:spPr>
           <a:xfrm>
-            <a:off x="8820150" y="1885950"/>
-            <a:ext cx="2781300" cy="1504950"/>
+            <a:off x="8820150" y="1692497"/>
+            <a:ext cx="2781300" cy="1595056"/>
           </a:xfrm>
           <a:prstGeom prst="rect">
             <a:avLst/>
@@ -6623,12 +6883,12 @@
           <a:p>
             <a:pPr algn="l" indent="0" marL="0">
               <a:lnSpc>
-                <a:spcPts val="2139"/>
-              </a:lnSpc>
-              <a:buNone/>
-            </a:pPr>
-            <a:r>
-              <a:rPr lang="zh-CN" altLang="en-US" sz="1725" dirty="0">
+                <a:spcPts val="2232"/>
+              </a:lnSpc>
+              <a:buNone/>
+            </a:pPr>
+            <a:r>
+              <a:rPr lang="zh-CN" altLang="en-US" sz="1800" dirty="0">
                 <a:solidFill>
                   <a:srgbClr val="1C2430"/>
                 </a:solidFill>
@@ -6636,19 +6896,36 @@
                 <a:ea typeface="Noto Sans CJK SC" pitchFamily="34" charset="-122"/>
                 <a:cs typeface="Noto Sans CJK SC" pitchFamily="34" charset="-120"/>
               </a:rPr>
-              <a:t>列出训练覆盖和独立留出条</a:t>
-            </a:r>
-            <a:endParaRPr lang="zh-CN" sz="1725" dirty="0"/>
-          </a:p>
-          <a:p>
+              <a:t>列出训练覆盖和</a:t>
+            </a:r>
             <a:pPr algn="l" indent="0" marL="0">
               <a:lnSpc>
-                <a:spcPts val="2139"/>
-              </a:lnSpc>
-              <a:buNone/>
-            </a:pPr>
-            <a:r>
-              <a:rPr lang="zh-CN" altLang="en-US" sz="1725" dirty="0">
+                <a:spcPts val="2232"/>
+              </a:lnSpc>
+              <a:buNone/>
+            </a:pPr>
+            <a:r>
+              <a:rPr lang="zh-CN" altLang="en-US" sz="1800" b="1" dirty="0">
+                <a:solidFill>
+                  <a:srgbClr val="235E96"/>
+                </a:solidFill>
+                <a:latin typeface="Noto Sans CJK SC" pitchFamily="34" charset="0"/>
+                <a:ea typeface="Noto Sans CJK SC" pitchFamily="34" charset="-122"/>
+                <a:cs typeface="Noto Sans CJK SC" pitchFamily="34" charset="-120"/>
+              </a:rPr>
+              <a:t>独立留出</a:t>
+            </a:r>
+            <a:endParaRPr lang="zh-CN" sz="1800" dirty="0"/>
+          </a:p>
+          <a:p>
+            <a:pPr algn="l" indent="0" marL="0">
+              <a:lnSpc>
+                <a:spcPts val="2232"/>
+              </a:lnSpc>
+              <a:buNone/>
+            </a:pPr>
+            <a:r>
+              <a:rPr lang="zh-CN" altLang="en-US" sz="1800" dirty="0">
                 <a:solidFill>
                   <a:srgbClr val="1C2430"/>
                 </a:solidFill>
@@ -6656,19 +6933,19 @@
                 <a:ea typeface="Noto Sans CJK SC" pitchFamily="34" charset="-122"/>
                 <a:cs typeface="Noto Sans CJK SC" pitchFamily="34" charset="-120"/>
               </a:rPr>
-              <a:t>件</a:t>
-            </a:r>
-            <a:endParaRPr lang="zh-CN" sz="1725" dirty="0"/>
+              <a:t>条件</a:t>
+            </a:r>
+            <a:endParaRPr lang="zh-CN" sz="1800" dirty="0"/>
           </a:p>
           <a:p>
             <a:pPr algn="l" indent="0" marL="0">
               <a:lnSpc>
-                <a:spcPts val="2139"/>
-              </a:lnSpc>
-              <a:buNone/>
-            </a:pPr>
-            <a:r>
-              <a:rPr lang="zh-CN" altLang="en-US" sz="1725" dirty="0">
+                <a:spcPts val="2232"/>
+              </a:lnSpc>
+              <a:buNone/>
+            </a:pPr>
+            <a:r>
+              <a:rPr lang="zh-CN" altLang="en-US" sz="1800" dirty="0">
                 <a:solidFill>
                   <a:srgbClr val="1C2430"/>
                 </a:solidFill>
@@ -6676,19 +6953,19 @@
                 <a:ea typeface="Noto Sans CJK SC" pitchFamily="34" charset="-122"/>
                 <a:cs typeface="Noto Sans CJK SC" pitchFamily="34" charset="-120"/>
               </a:rPr>
-              <a:t>分环境报告，不只给全局平</a:t>
-            </a:r>
-            <a:endParaRPr lang="zh-CN" sz="1725" dirty="0"/>
+              <a:t>分环境报告，不只给全局</a:t>
+            </a:r>
+            <a:endParaRPr lang="zh-CN" sz="1800" dirty="0"/>
           </a:p>
           <a:p>
             <a:pPr algn="l" indent="0" marL="0">
               <a:lnSpc>
-                <a:spcPts val="2139"/>
-              </a:lnSpc>
-              <a:buNone/>
-            </a:pPr>
-            <a:r>
-              <a:rPr lang="zh-CN" altLang="en-US" sz="1725" dirty="0">
+                <a:spcPts val="2232"/>
+              </a:lnSpc>
+              <a:buNone/>
+            </a:pPr>
+            <a:r>
+              <a:rPr lang="zh-CN" altLang="en-US" sz="1800" dirty="0">
                 <a:solidFill>
                   <a:srgbClr val="1C2430"/>
                 </a:solidFill>
@@ -6696,9 +6973,9 @@
                 <a:ea typeface="Noto Sans CJK SC" pitchFamily="34" charset="-122"/>
                 <a:cs typeface="Noto Sans CJK SC" pitchFamily="34" charset="-120"/>
               </a:rPr>
-              <a:t>均</a:t>
-            </a:r>
-            <a:endParaRPr lang="zh-CN" sz="1725" dirty="0"/>
+              <a:t>平均</a:t>
+            </a:r>
+            <a:endParaRPr lang="zh-CN" sz="1800" dirty="0"/>
           </a:p>
         </p:txBody>
       </p:sp>
@@ -6710,8 +6987,8 @@
         </p:nvSpPr>
         <p:spPr>
           <a:xfrm>
-            <a:off x="8686800" y="3848100"/>
-            <a:ext cx="3048000" cy="2171700"/>
+            <a:off x="8686800" y="3754279"/>
+            <a:ext cx="3048000" cy="2259616"/>
           </a:xfrm>
           <a:prstGeom prst="rect">
             <a:avLst/>
@@ -6735,14 +7012,14 @@
         </p:nvSpPr>
         <p:spPr>
           <a:xfrm>
-            <a:off x="8801100" y="3733800"/>
-            <a:ext cx="1181100" cy="320040"/>
+            <a:off x="8801100" y="3639979"/>
+            <a:ext cx="1257300" cy="342900"/>
           </a:xfrm>
           <a:prstGeom prst="rect">
             <a:avLst/>
           </a:prstGeom>
           <a:solidFill>
-            <a:srgbClr val="903543"/>
+            <a:srgbClr val="A24736"/>
           </a:solidFill>
           <a:ln w="12700">
             <a:solidFill>
@@ -6762,8 +7039,8 @@
         </p:nvSpPr>
         <p:spPr>
           <a:xfrm>
-            <a:off x="8905875" y="3762375"/>
-            <a:ext cx="971550" cy="262890"/>
+            <a:off x="8905875" y="3668554"/>
+            <a:ext cx="1047750" cy="285750"/>
           </a:xfrm>
           <a:prstGeom prst="rect">
             <a:avLst/>
@@ -6777,12 +7054,12 @@
           <a:p>
             <a:pPr algn="l" indent="0" marL="0">
               <a:lnSpc>
-                <a:spcPts val="2070"/>
-              </a:lnSpc>
-              <a:buNone/>
-            </a:pPr>
-            <a:r>
-              <a:rPr lang="zh-CN" altLang="en-US" sz="1800" b="1" dirty="0">
+                <a:spcPts val="2242"/>
+              </a:lnSpc>
+              <a:buNone/>
+            </a:pPr>
+            <a:r>
+              <a:rPr lang="zh-CN" altLang="en-US" sz="1950" b="1" dirty="0">
                 <a:solidFill>
                   <a:srgbClr val="FFFFFF"/>
                 </a:solidFill>
@@ -6792,7 +7069,7 @@
               </a:rPr>
               <a:t>最差情形</a:t>
             </a:r>
-            <a:endParaRPr lang="zh-CN" sz="1800" dirty="0"/>
+            <a:endParaRPr lang="zh-CN" sz="1950" dirty="0"/>
           </a:p>
         </p:txBody>
       </p:sp>
@@ -6804,8 +7081,8 @@
         </p:nvSpPr>
         <p:spPr>
           <a:xfrm>
-            <a:off x="8820150" y="4196715"/>
-            <a:ext cx="2781300" cy="1727835"/>
+            <a:off x="8820150" y="4125754"/>
+            <a:ext cx="2781300" cy="1792891"/>
           </a:xfrm>
           <a:prstGeom prst="rect">
             <a:avLst/>
@@ -6819,12 +7096,12 @@
           <a:p>
             <a:pPr algn="l" indent="0" marL="0">
               <a:lnSpc>
-                <a:spcPts val="2139"/>
-              </a:lnSpc>
-              <a:buNone/>
-            </a:pPr>
-            <a:r>
-              <a:rPr lang="zh-CN" altLang="en-US" sz="1725" dirty="0">
+                <a:spcPts val="2232"/>
+              </a:lnSpc>
+              <a:buNone/>
+            </a:pPr>
+            <a:r>
+              <a:rPr lang="zh-CN" altLang="en-US" sz="1800" dirty="0">
                 <a:solidFill>
                   <a:srgbClr val="1C2430"/>
                 </a:solidFill>
@@ -6834,17 +7111,17 @@
               </a:rPr>
               <a:t>展示失败环境与违反约束的</a:t>
             </a:r>
-            <a:endParaRPr lang="zh-CN" sz="1725" dirty="0"/>
+            <a:endParaRPr lang="zh-CN" sz="1800" dirty="0"/>
           </a:p>
           <a:p>
             <a:pPr algn="l" indent="0" marL="0">
               <a:lnSpc>
-                <a:spcPts val="2139"/>
-              </a:lnSpc>
-              <a:buNone/>
-            </a:pPr>
-            <a:r>
-              <a:rPr lang="zh-CN" altLang="en-US" sz="1725" dirty="0">
+                <a:spcPts val="2232"/>
+              </a:lnSpc>
+              <a:buNone/>
+            </a:pPr>
+            <a:r>
+              <a:rPr lang="zh-CN" altLang="en-US" sz="1800" dirty="0">
                 <a:solidFill>
                   <a:srgbClr val="1C2430"/>
                 </a:solidFill>
@@ -6854,17 +7131,17 @@
               </a:rPr>
               <a:t>次数</a:t>
             </a:r>
-            <a:endParaRPr lang="zh-CN" sz="1725" dirty="0"/>
+            <a:endParaRPr lang="zh-CN" sz="1800" dirty="0"/>
           </a:p>
           <a:p>
             <a:pPr algn="l" indent="0" marL="0">
               <a:lnSpc>
-                <a:spcPts val="2139"/>
-              </a:lnSpc>
-              <a:buNone/>
-            </a:pPr>
-            <a:r>
-              <a:rPr lang="zh-CN" altLang="en-US" sz="1725" dirty="0">
+                <a:spcPts val="2232"/>
+              </a:lnSpc>
+              <a:buNone/>
+            </a:pPr>
+            <a:r>
+              <a:rPr lang="zh-CN" altLang="en-US" sz="1800" dirty="0">
                 <a:solidFill>
                   <a:srgbClr val="1C2430"/>
                 </a:solidFill>
@@ -6874,17 +7151,17 @@
               </a:rPr>
               <a:t>讨论收益下降是否有系统性</a:t>
             </a:r>
-            <a:endParaRPr lang="zh-CN" sz="1725" dirty="0"/>
+            <a:endParaRPr lang="zh-CN" sz="1800" dirty="0"/>
           </a:p>
           <a:p>
             <a:pPr algn="l" indent="0" marL="0">
               <a:lnSpc>
-                <a:spcPts val="2139"/>
-              </a:lnSpc>
-              <a:buNone/>
-            </a:pPr>
-            <a:r>
-              <a:rPr lang="zh-CN" altLang="en-US" sz="1725" dirty="0">
+                <a:spcPts val="2232"/>
+              </a:lnSpc>
+              <a:buNone/>
+            </a:pPr>
+            <a:r>
+              <a:rPr lang="zh-CN" altLang="en-US" sz="1800" dirty="0">
                 <a:solidFill>
                   <a:srgbClr val="1C2430"/>
                 </a:solidFill>
@@ -6894,17 +7171,17 @@
               </a:rPr>
               <a:t>来源</a:t>
             </a:r>
-            <a:endParaRPr lang="zh-CN" sz="1725" dirty="0"/>
+            <a:endParaRPr lang="zh-CN" sz="1800" dirty="0"/>
           </a:p>
           <a:p>
             <a:pPr algn="l" indent="0" marL="0">
               <a:lnSpc>
-                <a:spcPts val="2139"/>
-              </a:lnSpc>
-              <a:buNone/>
-            </a:pPr>
-            <a:r>
-              <a:rPr lang="zh-CN" altLang="en-US" sz="1725" dirty="0">
+                <a:spcPts val="2232"/>
+              </a:lnSpc>
+              <a:buNone/>
+            </a:pPr>
+            <a:r>
+              <a:rPr lang="zh-CN" altLang="en-US" sz="1800" dirty="0">
                 <a:solidFill>
                   <a:srgbClr val="1C2430"/>
                 </a:solidFill>
@@ -6914,7 +7191,7 @@
               </a:rPr>
               <a:t>同时报告离群值和缺失情况</a:t>
             </a:r>
-            <a:endParaRPr lang="zh-CN" sz="1725" dirty="0"/>
+            <a:endParaRPr lang="zh-CN" sz="1800" dirty="0"/>
           </a:p>
         </p:txBody>
       </p:sp>
@@ -6926,7 +7203,7 @@
         </p:nvSpPr>
         <p:spPr>
           <a:xfrm>
-            <a:off x="457200" y="5010150"/>
+            <a:off x="457200" y="4964716"/>
             <a:ext cx="7905750" cy="323850"/>
           </a:xfrm>
           <a:prstGeom prst="rect">
@@ -6941,14 +7218,14 @@
           <a:p>
             <a:pPr algn="l" indent="0" marL="0">
               <a:lnSpc>
-                <a:spcPts val="2156"/>
-              </a:lnSpc>
-              <a:buNone/>
-            </a:pPr>
-            <a:r>
-              <a:rPr lang="zh-CN" altLang="en-US" sz="1875" b="1" dirty="0">
-                <a:solidFill>
-                  <a:srgbClr val="173C70"/>
+                <a:spcPts val="2242"/>
+              </a:lnSpc>
+              <a:buNone/>
+            </a:pPr>
+            <a:r>
+              <a:rPr lang="zh-CN" altLang="en-US" sz="1950" b="1" dirty="0">
+                <a:solidFill>
+                  <a:srgbClr val="146C63"/>
                 </a:solidFill>
                 <a:latin typeface="Noto Sans CJK SC" pitchFamily="34" charset="0"/>
                 <a:ea typeface="Noto Sans CJK SC" pitchFamily="34" charset="-122"/>
@@ -6956,7 +7233,7 @@
               </a:rPr>
               <a:t>平均值以外的结论</a:t>
             </a:r>
-            <a:endParaRPr lang="zh-CN" sz="1875" dirty="0"/>
+            <a:endParaRPr lang="zh-CN" sz="1950" dirty="0"/>
           </a:p>
         </p:txBody>
       </p:sp>
@@ -6968,8 +7245,8 @@
         </p:nvSpPr>
         <p:spPr>
           <a:xfrm>
-            <a:off x="457200" y="5391150"/>
-            <a:ext cx="7905750" cy="590550"/>
+            <a:off x="457200" y="5345716"/>
+            <a:ext cx="7905750" cy="630079"/>
           </a:xfrm>
           <a:prstGeom prst="rect">
             <a:avLst/>
@@ -6983,12 +7260,12 @@
           <a:p>
             <a:pPr algn="l" indent="0" marL="0">
               <a:lnSpc>
-                <a:spcPts val="2139"/>
-              </a:lnSpc>
-              <a:buNone/>
-            </a:pPr>
-            <a:r>
-              <a:rPr lang="zh-CN" altLang="en-US" sz="1725" dirty="0">
+                <a:spcPts val="2232"/>
+              </a:lnSpc>
+              <a:buNone/>
+            </a:pPr>
+            <a:r>
+              <a:rPr lang="zh-CN" altLang="en-US" sz="1800" dirty="0">
                 <a:solidFill>
                   <a:srgbClr val="1C2430"/>
                 </a:solidFill>
@@ -6998,17 +7275,17 @@
               </a:rPr>
               <a:t>检查分位数、最差环境与个体差异</a:t>
             </a:r>
-            <a:endParaRPr lang="zh-CN" sz="1725" dirty="0"/>
+            <a:endParaRPr lang="zh-CN" sz="1800" dirty="0"/>
           </a:p>
           <a:p>
             <a:pPr algn="l" indent="0" marL="0">
               <a:lnSpc>
-                <a:spcPts val="2139"/>
-              </a:lnSpc>
-              <a:buNone/>
-            </a:pPr>
-            <a:r>
-              <a:rPr lang="zh-CN" altLang="en-US" sz="1725" dirty="0">
+                <a:spcPts val="2232"/>
+              </a:lnSpc>
+              <a:buNone/>
+            </a:pPr>
+            <a:r>
+              <a:rPr lang="zh-CN" altLang="en-US" sz="1800" dirty="0">
                 <a:solidFill>
                   <a:srgbClr val="1C2430"/>
                 </a:solidFill>
@@ -7018,7 +7295,7 @@
               </a:rPr>
               <a:t>总体均值不能替代条件层面的判断</a:t>
             </a:r>
-            <a:endParaRPr lang="zh-CN" sz="1725" dirty="0"/>
+            <a:endParaRPr lang="zh-CN" sz="1800" dirty="0"/>
           </a:p>
         </p:txBody>
       </p:sp>
@@ -7058,7 +7335,7 @@
                 <a:ea typeface="Noto Sans CJK SC" pitchFamily="34" charset="-122"/>
                 <a:cs typeface="Noto Sans CJK SC" pitchFamily="34" charset="-120"/>
               </a:rPr>
-              <a:t>T1 · 2026 · 待替换</a:t>
+              <a:t>T1 · 2026 · 书目占位；图表均为合成示例</a:t>
             </a:r>
             <a:endParaRPr lang="zh-CN" sz="1125" dirty="0"/>
           </a:p>
@@ -7167,14 +7444,14 @@
       </p:sp>
       <p:sp>
         <p:nvSpPr>
-          <p:cNvPr id="4" name="T23/kicker"/>
-          <p:cNvSpPr/>
-          <p:nvPr/>
-        </p:nvSpPr>
-        <p:spPr>
-          <a:xfrm>
-            <a:off x="457200" y="152400"/>
-            <a:ext cx="11277600" cy="190500"/>
+          <p:cNvPr id="4" name="T23/title"/>
+          <p:cNvSpPr/>
+          <p:nvPr/>
+        </p:nvSpPr>
+        <p:spPr>
+          <a:xfrm>
+            <a:off x="457200" y="209550"/>
+            <a:ext cx="11277600" cy="438150"/>
           </a:xfrm>
           <a:prstGeom prst="rect">
             <a:avLst/>
@@ -7188,83 +7465,64 @@
           <a:p>
             <a:pPr algn="l" indent="0" marL="0">
               <a:lnSpc>
-                <a:spcPts val="1320"/>
-              </a:lnSpc>
-              <a:buNone/>
-            </a:pPr>
-            <a:r>
-              <a:rPr lang="zh-CN" altLang="en-US" sz="1200" dirty="0">
-                <a:solidFill>
-                  <a:srgbClr val="515B68"/>
-                </a:solidFill>
-                <a:latin typeface="Noto Sans CJK SC" pitchFamily="34" charset="0"/>
-                <a:ea typeface="Noto Sans CJK SC" pitchFamily="34" charset="-122"/>
-                <a:cs typeface="Noto Sans CJK SC" pitchFamily="34" charset="-120"/>
-              </a:rPr>
-              <a:t>结构模板 / 占位说明与合成数据</a:t>
-            </a:r>
-            <a:endParaRPr lang="zh-CN" sz="1200" dirty="0"/>
+                <a:spcPts val="3360"/>
+              </a:lnSpc>
+              <a:buNone/>
+            </a:pPr>
+            <a:r>
+              <a:rPr lang="zh-CN" altLang="en-US" sz="3000" b="1" dirty="0">
+                <a:solidFill>
+                  <a:srgbClr val="1C2430"/>
+                </a:solidFill>
+                <a:latin typeface="Noto Sans CJK SC" pitchFamily="34" charset="0"/>
+                <a:ea typeface="Noto Sans CJK SC" pitchFamily="34" charset="-122"/>
+                <a:cs typeface="Noto Sans CJK SC" pitchFamily="34" charset="-120"/>
+              </a:rPr>
+              <a:t>收益风险与代价权衡</a:t>
+            </a:r>
+            <a:endParaRPr lang="zh-CN" sz="3000" dirty="0"/>
           </a:p>
         </p:txBody>
       </p:sp>
       <p:sp>
         <p:nvSpPr>
-          <p:cNvPr id="5" name="T23/title"/>
-          <p:cNvSpPr/>
-          <p:nvPr/>
-        </p:nvSpPr>
-        <p:spPr>
-          <a:xfrm>
-            <a:off x="457200" y="381000"/>
-            <a:ext cx="11277600" cy="400050"/>
-          </a:xfrm>
-          <a:prstGeom prst="rect">
+          <p:cNvPr id="5" name="T23/header-rule"/>
+          <p:cNvSpPr/>
+          <p:nvPr/>
+        </p:nvSpPr>
+        <p:spPr>
+          <a:xfrm>
+            <a:off x="457200" y="752475"/>
+            <a:ext cx="11277600" cy="0"/>
+          </a:xfrm>
+          <a:prstGeom prst="line">
             <a:avLst/>
           </a:prstGeom>
           <a:noFill/>
-          <a:ln/>
-        </p:spPr>
-        <p:txBody>
-          <a:bodyPr wrap="none" lIns="0" tIns="0" rIns="0" bIns="0" rtlCol="0" anchor="t"/>
-          <a:lstStyle/>
-          <a:p>
-            <a:pPr algn="l" indent="0" marL="0">
-              <a:lnSpc>
-                <a:spcPts val="2856"/>
-              </a:lnSpc>
-              <a:buNone/>
-            </a:pPr>
-            <a:r>
-              <a:rPr lang="zh-CN" altLang="en-US" sz="2550" b="1" dirty="0">
-                <a:solidFill>
-                  <a:srgbClr val="1C2430"/>
-                </a:solidFill>
-                <a:latin typeface="Noto Sans CJK SC" pitchFamily="34" charset="0"/>
-                <a:ea typeface="Noto Sans CJK SC" pitchFamily="34" charset="-122"/>
-                <a:cs typeface="Noto Sans CJK SC" pitchFamily="34" charset="-120"/>
-              </a:rPr>
-              <a:t>收益风险与代价权衡</a:t>
-            </a:r>
-            <a:endParaRPr lang="zh-CN" sz="2550" dirty="0"/>
-          </a:p>
-        </p:txBody>
-      </p:sp>
-      <p:sp>
-        <p:nvSpPr>
-          <p:cNvPr id="6" name="T23/header-rule"/>
-          <p:cNvSpPr/>
-          <p:nvPr/>
-        </p:nvSpPr>
-        <p:spPr>
-          <a:xfrm>
-            <a:off x="457200" y="876300"/>
-            <a:ext cx="11277600" cy="0"/>
+          <a:ln w="10478">
+            <a:solidFill>
+              <a:srgbClr val="BEC8D4"/>
+            </a:solidFill>
+            <a:prstDash val="solid"/>
+          </a:ln>
+        </p:spPr>
+      </p:sp>
+      <p:sp>
+        <p:nvSpPr>
+          <p:cNvPr id="6" name="T23/header-accent"/>
+          <p:cNvSpPr/>
+          <p:nvPr/>
+        </p:nvSpPr>
+        <p:spPr>
+          <a:xfrm>
+            <a:off x="457200" y="752475"/>
+            <a:ext cx="704850" cy="0"/>
           </a:xfrm>
           <a:prstGeom prst="line">
             <a:avLst/>
           </a:prstGeom>
           <a:noFill/>
-          <a:ln w="11430">
+          <a:ln w="28575">
             <a:solidFill>
               <a:srgbClr val="173C70"/>
             </a:solidFill>
@@ -7280,8 +7538,8 @@
         </p:nvSpPr>
         <p:spPr>
           <a:xfrm>
-            <a:off x="457200" y="5848350"/>
-            <a:ext cx="7162800" cy="266700"/>
+            <a:off x="457200" y="5835872"/>
+            <a:ext cx="7162800" cy="276987"/>
           </a:xfrm>
           <a:prstGeom prst="rect">
             <a:avLst/>
@@ -7321,8 +7579,8 @@
           <p:nvPr/>
         </p:nvGraphicFramePr>
         <p:xfrm>
-          <a:off x="457200" y="1409700"/>
-          <a:ext cx="7162800" cy="4305300"/>
+          <a:off x="457200" y="1226534"/>
+          <a:ext cx="7162800" cy="4470845"/>
         </p:xfrm>
         <a:graphic xmlns:a="http://schemas.openxmlformats.org/drawingml/2006/main">
           <a:graphicData uri="http://schemas.openxmlformats.org/drawingml/2006/chart">
@@ -7332,19 +7590,21 @@
       </p:graphicFrame>
       <p:sp>
         <p:nvSpPr>
-          <p:cNvPr id="9" name="T23/card/region-1/base-rule"/>
-          <p:cNvSpPr/>
-          <p:nvPr/>
-        </p:nvSpPr>
-        <p:spPr>
-          <a:xfrm>
-            <a:off x="7943850" y="2762250"/>
-            <a:ext cx="3790950" cy="0"/>
-          </a:xfrm>
-          <a:prstGeom prst="line">
-            <a:avLst/>
-          </a:prstGeom>
-          <a:noFill/>
+          <p:cNvPr id="9" name="T23/card/region-1/frame"/>
+          <p:cNvSpPr/>
+          <p:nvPr/>
+        </p:nvSpPr>
+        <p:spPr>
+          <a:xfrm>
+            <a:off x="7943850" y="1206722"/>
+            <a:ext cx="3790950" cy="1424369"/>
+          </a:xfrm>
+          <a:prstGeom prst="rect">
+            <a:avLst/>
+          </a:prstGeom>
+          <a:solidFill>
+            <a:srgbClr val="FFFFFF"/>
+          </a:solidFill>
           <a:ln w="10478">
             <a:solidFill>
               <a:srgbClr val="BEC8D4"/>
@@ -7355,20 +7615,20 @@
       </p:sp>
       <p:sp>
         <p:nvSpPr>
-          <p:cNvPr id="10" name="T23/card/region-1/side-mark"/>
-          <p:cNvSpPr/>
-          <p:nvPr/>
-        </p:nvSpPr>
-        <p:spPr>
-          <a:xfrm>
-            <a:off x="7943850" y="1409700"/>
-            <a:ext cx="47625" cy="295275"/>
+          <p:cNvPr id="10" name="T23/card/region-1/heading-fill"/>
+          <p:cNvSpPr/>
+          <p:nvPr/>
+        </p:nvSpPr>
+        <p:spPr>
+          <a:xfrm>
+            <a:off x="7953375" y="1216247"/>
+            <a:ext cx="3771900" cy="371475"/>
           </a:xfrm>
           <a:prstGeom prst="rect">
             <a:avLst/>
           </a:prstGeom>
           <a:solidFill>
-            <a:srgbClr val="173C70"/>
+            <a:srgbClr val="EAF2FA"/>
           </a:solidFill>
           <a:ln w="12700">
             <a:solidFill>
@@ -7382,14 +7642,37 @@
       </p:sp>
       <p:sp>
         <p:nvSpPr>
-          <p:cNvPr id="11" name="T23/card/region-1/title"/>
-          <p:cNvSpPr/>
-          <p:nvPr/>
-        </p:nvSpPr>
-        <p:spPr>
-          <a:xfrm>
-            <a:off x="8096250" y="1409700"/>
-            <a:ext cx="3638550" cy="304800"/>
+          <p:cNvPr id="11" name="T23/card/region-1/heading-rule"/>
+          <p:cNvSpPr/>
+          <p:nvPr/>
+        </p:nvSpPr>
+        <p:spPr>
+          <a:xfrm>
+            <a:off x="7943850" y="1587722"/>
+            <a:ext cx="3790950" cy="0"/>
+          </a:xfrm>
+          <a:prstGeom prst="line">
+            <a:avLst/>
+          </a:prstGeom>
+          <a:noFill/>
+          <a:ln w="9525">
+            <a:solidFill>
+              <a:srgbClr val="BEC8D4"/>
+            </a:solidFill>
+            <a:prstDash val="solid"/>
+          </a:ln>
+        </p:spPr>
+      </p:sp>
+      <p:sp>
+        <p:nvSpPr>
+          <p:cNvPr id="12" name="T23/card/region-1/title"/>
+          <p:cNvSpPr/>
+          <p:nvPr/>
+        </p:nvSpPr>
+        <p:spPr>
+          <a:xfrm>
+            <a:off x="8067675" y="1254347"/>
+            <a:ext cx="3543300" cy="295275"/>
           </a:xfrm>
           <a:prstGeom prst="rect">
             <a:avLst/>
@@ -7403,14 +7686,14 @@
           <a:p>
             <a:pPr algn="l" indent="0" marL="0">
               <a:lnSpc>
-                <a:spcPts val="2070"/>
-              </a:lnSpc>
-              <a:buNone/>
-            </a:pPr>
-            <a:r>
-              <a:rPr lang="zh-CN" altLang="en-US" sz="1800" b="1" dirty="0">
-                <a:solidFill>
-                  <a:srgbClr val="173C70"/>
+                <a:spcPts val="2242"/>
+              </a:lnSpc>
+              <a:buNone/>
+            </a:pPr>
+            <a:r>
+              <a:rPr lang="zh-CN" altLang="en-US" sz="1950" b="1" dirty="0">
+                <a:solidFill>
+                  <a:srgbClr val="235E96"/>
                 </a:solidFill>
                 <a:latin typeface="Noto Sans CJK SC" pitchFamily="34" charset="0"/>
                 <a:ea typeface="Noto Sans CJK SC" pitchFamily="34" charset="-122"/>
@@ -7418,20 +7701,20 @@
               </a:rPr>
               <a:t>收益指标</a:t>
             </a:r>
-            <a:endParaRPr lang="zh-CN" sz="1800" dirty="0"/>
+            <a:endParaRPr lang="zh-CN" sz="1950" dirty="0"/>
           </a:p>
         </p:txBody>
       </p:sp>
       <p:sp>
         <p:nvSpPr>
-          <p:cNvPr id="12" name="T23/card/region-1/body"/>
-          <p:cNvSpPr/>
-          <p:nvPr/>
-        </p:nvSpPr>
-        <p:spPr>
-          <a:xfrm>
-            <a:off x="8096250" y="1828800"/>
-            <a:ext cx="3638550" cy="838200"/>
+          <p:cNvPr id="13" name="T23/card/region-1/body"/>
+          <p:cNvSpPr/>
+          <p:nvPr/>
+        </p:nvSpPr>
+        <p:spPr>
+          <a:xfrm>
+            <a:off x="8077200" y="1692497"/>
+            <a:ext cx="3524250" cy="843344"/>
           </a:xfrm>
           <a:prstGeom prst="rect">
             <a:avLst/>
@@ -7445,12 +7728,12 @@
           <a:p>
             <a:pPr algn="l" indent="0" marL="0">
               <a:lnSpc>
-                <a:spcPts val="2139"/>
-              </a:lnSpc>
-              <a:buNone/>
-            </a:pPr>
-            <a:r>
-              <a:rPr lang="zh-CN" altLang="en-US" sz="1725" dirty="0">
+                <a:spcPts val="2232"/>
+              </a:lnSpc>
+              <a:buNone/>
+            </a:pPr>
+            <a:r>
+              <a:rPr lang="zh-CN" altLang="en-US" sz="1800" dirty="0">
                 <a:solidFill>
                   <a:srgbClr val="1C2430"/>
                 </a:solidFill>
@@ -7458,19 +7741,33 @@
                 <a:ea typeface="Noto Sans CJK SC" pitchFamily="34" charset="-122"/>
                 <a:cs typeface="Noto Sans CJK SC" pitchFamily="34" charset="-120"/>
               </a:rPr>
-              <a:t>定义收益、单位与基线</a:t>
-            </a:r>
-            <a:endParaRPr lang="zh-CN" sz="1725" dirty="0"/>
-          </a:p>
-          <a:p>
+              <a:t>定义收益、</a:t>
+            </a:r>
             <a:pPr algn="l" indent="0" marL="0">
               <a:lnSpc>
-                <a:spcPts val="2139"/>
-              </a:lnSpc>
-              <a:buNone/>
-            </a:pPr>
-            <a:r>
-              <a:rPr lang="zh-CN" altLang="en-US" sz="1725" dirty="0">
+                <a:spcPts val="2232"/>
+              </a:lnSpc>
+              <a:buNone/>
+            </a:pPr>
+            <a:r>
+              <a:rPr lang="zh-CN" altLang="en-US" sz="1800" b="1" dirty="0">
+                <a:solidFill>
+                  <a:srgbClr val="235E96"/>
+                </a:solidFill>
+                <a:latin typeface="Noto Sans CJK SC" pitchFamily="34" charset="0"/>
+                <a:ea typeface="Noto Sans CJK SC" pitchFamily="34" charset="-122"/>
+                <a:cs typeface="Noto Sans CJK SC" pitchFamily="34" charset="-120"/>
+              </a:rPr>
+              <a:t>单位</a:t>
+            </a:r>
+            <a:pPr algn="l" indent="0" marL="0">
+              <a:lnSpc>
+                <a:spcPts val="2232"/>
+              </a:lnSpc>
+              <a:buNone/>
+            </a:pPr>
+            <a:r>
+              <a:rPr lang="zh-CN" altLang="en-US" sz="1800" dirty="0">
                 <a:solidFill>
                   <a:srgbClr val="1C2430"/>
                 </a:solidFill>
@@ -7478,22 +7775,42 @@
                 <a:ea typeface="Noto Sans CJK SC" pitchFamily="34" charset="-122"/>
                 <a:cs typeface="Noto Sans CJK SC" pitchFamily="34" charset="-120"/>
               </a:rPr>
+              <a:t>与基线</a:t>
+            </a:r>
+            <a:endParaRPr lang="zh-CN" sz="1800" dirty="0"/>
+          </a:p>
+          <a:p>
+            <a:pPr algn="l" indent="0" marL="0">
+              <a:lnSpc>
+                <a:spcPts val="2232"/>
+              </a:lnSpc>
+              <a:buNone/>
+            </a:pPr>
+            <a:r>
+              <a:rPr lang="zh-CN" altLang="en-US" sz="1800" dirty="0">
+                <a:solidFill>
+                  <a:srgbClr val="1C2430"/>
+                </a:solidFill>
+                <a:latin typeface="Noto Sans CJK SC" pitchFamily="34" charset="0"/>
+                <a:ea typeface="Noto Sans CJK SC" pitchFamily="34" charset="-122"/>
+                <a:cs typeface="Noto Sans CJK SC" pitchFamily="34" charset="-120"/>
+              </a:rPr>
               <a:t>说明是否包含预测或模拟项</a:t>
             </a:r>
-            <a:endParaRPr lang="zh-CN" sz="1725" dirty="0"/>
+            <a:endParaRPr lang="zh-CN" sz="1800" dirty="0"/>
           </a:p>
         </p:txBody>
       </p:sp>
       <p:sp>
         <p:nvSpPr>
-          <p:cNvPr id="13" name="T23/card/region-2/frame"/>
-          <p:cNvSpPr/>
-          <p:nvPr/>
-        </p:nvSpPr>
-        <p:spPr>
-          <a:xfrm>
-            <a:off x="7943850" y="3124200"/>
-            <a:ext cx="3790950" cy="1257300"/>
+          <p:cNvPr id="14" name="T23/card/region-2/frame"/>
+          <p:cNvSpPr/>
+          <p:nvPr/>
+        </p:nvSpPr>
+        <p:spPr>
+          <a:xfrm>
+            <a:off x="7943850" y="3002566"/>
+            <a:ext cx="3790950" cy="1310069"/>
           </a:xfrm>
           <a:prstGeom prst="rect">
             <a:avLst/>
@@ -7511,20 +7828,20 @@
       </p:sp>
       <p:sp>
         <p:nvSpPr>
-          <p:cNvPr id="14" name="T23/card/region-2/tab"/>
-          <p:cNvSpPr/>
-          <p:nvPr/>
-        </p:nvSpPr>
-        <p:spPr>
-          <a:xfrm>
-            <a:off x="8058150" y="3009900"/>
-            <a:ext cx="1181100" cy="320040"/>
+          <p:cNvPr id="15" name="T23/card/region-2/tab"/>
+          <p:cNvSpPr/>
+          <p:nvPr/>
+        </p:nvSpPr>
+        <p:spPr>
+          <a:xfrm>
+            <a:off x="8058150" y="2888266"/>
+            <a:ext cx="1257300" cy="342900"/>
           </a:xfrm>
           <a:prstGeom prst="rect">
             <a:avLst/>
           </a:prstGeom>
           <a:solidFill>
-            <a:srgbClr val="903543"/>
+            <a:srgbClr val="A24736"/>
           </a:solidFill>
           <a:ln w="12700">
             <a:solidFill>
@@ -7538,14 +7855,14 @@
       </p:sp>
       <p:sp>
         <p:nvSpPr>
-          <p:cNvPr id="15" name="T23/card/region-2/title"/>
-          <p:cNvSpPr/>
-          <p:nvPr/>
-        </p:nvSpPr>
-        <p:spPr>
-          <a:xfrm>
-            <a:off x="8162925" y="3038475"/>
-            <a:ext cx="971550" cy="262890"/>
+          <p:cNvPr id="16" name="T23/card/region-2/title"/>
+          <p:cNvSpPr/>
+          <p:nvPr/>
+        </p:nvSpPr>
+        <p:spPr>
+          <a:xfrm>
+            <a:off x="8162925" y="2916841"/>
+            <a:ext cx="1047750" cy="285750"/>
           </a:xfrm>
           <a:prstGeom prst="rect">
             <a:avLst/>
@@ -7559,12 +7876,12 @@
           <a:p>
             <a:pPr algn="l" indent="0" marL="0">
               <a:lnSpc>
-                <a:spcPts val="2070"/>
-              </a:lnSpc>
-              <a:buNone/>
-            </a:pPr>
-            <a:r>
-              <a:rPr lang="zh-CN" altLang="en-US" sz="1800" b="1" dirty="0">
+                <a:spcPts val="2242"/>
+              </a:lnSpc>
+              <a:buNone/>
+            </a:pPr>
+            <a:r>
+              <a:rPr lang="zh-CN" altLang="en-US" sz="1950" b="1" dirty="0">
                 <a:solidFill>
                   <a:srgbClr val="FFFFFF"/>
                 </a:solidFill>
@@ -7574,20 +7891,20 @@
               </a:rPr>
               <a:t>风险指标</a:t>
             </a:r>
-            <a:endParaRPr lang="zh-CN" sz="1800" dirty="0"/>
+            <a:endParaRPr lang="zh-CN" sz="1950" dirty="0"/>
           </a:p>
         </p:txBody>
       </p:sp>
       <p:sp>
         <p:nvSpPr>
-          <p:cNvPr id="16" name="T23/card/region-2/body"/>
-          <p:cNvSpPr/>
-          <p:nvPr/>
-        </p:nvSpPr>
-        <p:spPr>
-          <a:xfrm>
-            <a:off x="8077200" y="3472815"/>
-            <a:ext cx="3524250" cy="813435"/>
+          <p:cNvPr id="17" name="T23/card/region-2/body"/>
+          <p:cNvSpPr/>
+          <p:nvPr/>
+        </p:nvSpPr>
+        <p:spPr>
+          <a:xfrm>
+            <a:off x="8077200" y="3374041"/>
+            <a:ext cx="3524250" cy="843343"/>
           </a:xfrm>
           <a:prstGeom prst="rect">
             <a:avLst/>
@@ -7601,12 +7918,12 @@
           <a:p>
             <a:pPr algn="l" indent="0" marL="0">
               <a:lnSpc>
-                <a:spcPts val="2139"/>
-              </a:lnSpc>
-              <a:buNone/>
-            </a:pPr>
-            <a:r>
-              <a:rPr lang="zh-CN" altLang="en-US" sz="1725" dirty="0">
+                <a:spcPts val="2232"/>
+              </a:lnSpc>
+              <a:buNone/>
+            </a:pPr>
+            <a:r>
+              <a:rPr lang="zh-CN" altLang="en-US" sz="1800" dirty="0">
                 <a:solidFill>
                   <a:srgbClr val="1C2430"/>
                 </a:solidFill>
@@ -7616,17 +7933,17 @@
               </a:rPr>
               <a:t>报告违反约束的概率或幅度</a:t>
             </a:r>
-            <a:endParaRPr lang="zh-CN" sz="1725" dirty="0"/>
+            <a:endParaRPr lang="zh-CN" sz="1800" dirty="0"/>
           </a:p>
           <a:p>
             <a:pPr algn="l" indent="0" marL="0">
               <a:lnSpc>
-                <a:spcPts val="2139"/>
-              </a:lnSpc>
-              <a:buNone/>
-            </a:pPr>
-            <a:r>
-              <a:rPr lang="zh-CN" altLang="en-US" sz="1725" dirty="0">
+                <a:spcPts val="2232"/>
+              </a:lnSpc>
+              <a:buNone/>
+            </a:pPr>
+            <a:r>
+              <a:rPr lang="zh-CN" altLang="en-US" sz="1800" dirty="0">
                 <a:solidFill>
                   <a:srgbClr val="1C2430"/>
                 </a:solidFill>
@@ -7636,19 +7953,19 @@
               </a:rPr>
               <a:t>分开平均风险与极端情形</a:t>
             </a:r>
-            <a:endParaRPr lang="zh-CN" sz="1725" dirty="0"/>
+            <a:endParaRPr lang="zh-CN" sz="1800" dirty="0"/>
           </a:p>
         </p:txBody>
       </p:sp>
       <p:sp>
         <p:nvSpPr>
-          <p:cNvPr id="17" name="T23/card/region-3/heading-rule"/>
-          <p:cNvSpPr/>
-          <p:nvPr/>
-        </p:nvSpPr>
-        <p:spPr>
-          <a:xfrm>
-            <a:off x="7943850" y="4991100"/>
+          <p:cNvPr id="18" name="T23/card/region-3/heading-rule"/>
+          <p:cNvSpPr/>
+          <p:nvPr/>
+        </p:nvSpPr>
+        <p:spPr>
+          <a:xfrm>
+            <a:off x="7943850" y="4931759"/>
             <a:ext cx="3790950" cy="0"/>
           </a:xfrm>
           <a:prstGeom prst="line">
@@ -7665,13 +7982,13 @@
       </p:sp>
       <p:sp>
         <p:nvSpPr>
-          <p:cNvPr id="18" name="T23/card/region-3/heading-mark"/>
-          <p:cNvSpPr/>
-          <p:nvPr/>
-        </p:nvSpPr>
-        <p:spPr>
-          <a:xfrm>
-            <a:off x="7943850" y="4991100"/>
+          <p:cNvPr id="19" name="T23/card/region-3/heading-mark"/>
+          <p:cNvSpPr/>
+          <p:nvPr/>
+        </p:nvSpPr>
+        <p:spPr>
+          <a:xfrm>
+            <a:off x="7943850" y="4931759"/>
             <a:ext cx="342900" cy="0"/>
           </a:xfrm>
           <a:prstGeom prst="line">
@@ -7680,7 +7997,7 @@
           <a:noFill/>
           <a:ln w="17145">
             <a:solidFill>
-              <a:srgbClr val="173C70"/>
+              <a:srgbClr val="235E96"/>
             </a:solidFill>
             <a:prstDash val="solid"/>
           </a:ln>
@@ -7688,13 +8005,13 @@
       </p:sp>
       <p:sp>
         <p:nvSpPr>
-          <p:cNvPr id="19" name="T23/card/region-3/title"/>
-          <p:cNvSpPr/>
-          <p:nvPr/>
-        </p:nvSpPr>
-        <p:spPr>
-          <a:xfrm>
-            <a:off x="7943850" y="4648200"/>
+          <p:cNvPr id="20" name="T23/card/region-3/title"/>
+          <p:cNvSpPr/>
+          <p:nvPr/>
+        </p:nvSpPr>
+        <p:spPr>
+          <a:xfrm>
+            <a:off x="7943850" y="4588859"/>
             <a:ext cx="3790950" cy="323850"/>
           </a:xfrm>
           <a:prstGeom prst="rect">
@@ -7709,14 +8026,14 @@
           <a:p>
             <a:pPr algn="l" indent="0" marL="0">
               <a:lnSpc>
-                <a:spcPts val="2156"/>
-              </a:lnSpc>
-              <a:buNone/>
-            </a:pPr>
-            <a:r>
-              <a:rPr lang="zh-CN" altLang="en-US" sz="1875" b="1" dirty="0">
-                <a:solidFill>
-                  <a:srgbClr val="173C70"/>
+                <a:spcPts val="2242"/>
+              </a:lnSpc>
+              <a:buNone/>
+            </a:pPr>
+            <a:r>
+              <a:rPr lang="zh-CN" altLang="en-US" sz="1950" b="1" dirty="0">
+                <a:solidFill>
+                  <a:srgbClr val="235E96"/>
                 </a:solidFill>
                 <a:latin typeface="Noto Sans CJK SC" pitchFamily="34" charset="0"/>
                 <a:ea typeface="Noto Sans CJK SC" pitchFamily="34" charset="-122"/>
@@ -7724,20 +8041,20 @@
               </a:rPr>
               <a:t>资源代价</a:t>
             </a:r>
-            <a:endParaRPr lang="zh-CN" sz="1875" dirty="0"/>
+            <a:endParaRPr lang="zh-CN" sz="1950" dirty="0"/>
           </a:p>
         </p:txBody>
       </p:sp>
       <p:sp>
         <p:nvSpPr>
-          <p:cNvPr id="20" name="T23/card/region-3/body"/>
-          <p:cNvSpPr/>
-          <p:nvPr/>
-        </p:nvSpPr>
-        <p:spPr>
-          <a:xfrm>
-            <a:off x="7943850" y="5124450"/>
-            <a:ext cx="3790950" cy="838200"/>
+          <p:cNvPr id="21" name="T23/card/region-3/body"/>
+          <p:cNvSpPr/>
+          <p:nvPr/>
+        </p:nvSpPr>
+        <p:spPr>
+          <a:xfrm>
+            <a:off x="7943850" y="5065109"/>
+            <a:ext cx="3790950" cy="890968"/>
           </a:xfrm>
           <a:prstGeom prst="rect">
             <a:avLst/>
@@ -7784,7 +8101,24 @@
                 <a:ea typeface="Noto Sans CJK SC" pitchFamily="34" charset="-122"/>
                 <a:cs typeface="Noto Sans CJK SC" pitchFamily="34" charset="-120"/>
               </a:rPr>
-              <a:t>权衡使用相同的时间与计量单位</a:t>
+              <a:t>权衡使用相同的时间与计量</a:t>
+            </a:r>
+            <a:pPr algn="l" indent="0" marL="0">
+              <a:lnSpc>
+                <a:spcPts val="2232"/>
+              </a:lnSpc>
+              <a:buNone/>
+            </a:pPr>
+            <a:r>
+              <a:rPr lang="zh-CN" altLang="en-US" sz="1800" b="1" dirty="0">
+                <a:solidFill>
+                  <a:srgbClr val="235E96"/>
+                </a:solidFill>
+                <a:latin typeface="Noto Sans CJK SC" pitchFamily="34" charset="0"/>
+                <a:ea typeface="Noto Sans CJK SC" pitchFamily="34" charset="-122"/>
+                <a:cs typeface="Noto Sans CJK SC" pitchFamily="34" charset="-120"/>
+              </a:rPr>
+              <a:t>单位</a:t>
             </a:r>
             <a:endParaRPr lang="zh-CN" sz="1800" dirty="0"/>
           </a:p>
@@ -7792,7 +8126,7 @@
       </p:sp>
       <p:sp>
         <p:nvSpPr>
-          <p:cNvPr id="21" name="T23/sources"/>
+          <p:cNvPr id="22" name="T23/sources"/>
           <p:cNvSpPr/>
           <p:nvPr/>
         </p:nvSpPr>
@@ -7826,7 +8160,7 @@
                 <a:ea typeface="Noto Sans CJK SC" pitchFamily="34" charset="-122"/>
                 <a:cs typeface="Noto Sans CJK SC" pitchFamily="34" charset="-120"/>
               </a:rPr>
-              <a:t>T1 · 2026 · 待替换</a:t>
+              <a:t>T1 · 2026 · 书目占位；图表均为合成示例</a:t>
             </a:r>
             <a:endParaRPr lang="zh-CN" sz="1125" dirty="0"/>
           </a:p>
@@ -7935,14 +8269,14 @@
       </p:sp>
       <p:sp>
         <p:nvSpPr>
-          <p:cNvPr id="4" name="T24/kicker"/>
-          <p:cNvSpPr/>
-          <p:nvPr/>
-        </p:nvSpPr>
-        <p:spPr>
-          <a:xfrm>
-            <a:off x="457200" y="152400"/>
-            <a:ext cx="11277600" cy="190500"/>
+          <p:cNvPr id="4" name="T24/title"/>
+          <p:cNvSpPr/>
+          <p:nvPr/>
+        </p:nvSpPr>
+        <p:spPr>
+          <a:xfrm>
+            <a:off x="457200" y="209550"/>
+            <a:ext cx="11277600" cy="438150"/>
           </a:xfrm>
           <a:prstGeom prst="rect">
             <a:avLst/>
@@ -7956,83 +8290,64 @@
           <a:p>
             <a:pPr algn="l" indent="0" marL="0">
               <a:lnSpc>
-                <a:spcPts val="1320"/>
-              </a:lnSpc>
-              <a:buNone/>
-            </a:pPr>
-            <a:r>
-              <a:rPr lang="zh-CN" altLang="en-US" sz="1200" dirty="0">
-                <a:solidFill>
-                  <a:srgbClr val="515B68"/>
-                </a:solidFill>
-                <a:latin typeface="Noto Sans CJK SC" pitchFamily="34" charset="0"/>
-                <a:ea typeface="Noto Sans CJK SC" pitchFamily="34" charset="-122"/>
-                <a:cs typeface="Noto Sans CJK SC" pitchFamily="34" charset="-120"/>
-              </a:rPr>
-              <a:t>结构模板 / 占位说明与合成数据</a:t>
-            </a:r>
-            <a:endParaRPr lang="zh-CN" sz="1200" dirty="0"/>
+                <a:spcPts val="3360"/>
+              </a:lnSpc>
+              <a:buNone/>
+            </a:pPr>
+            <a:r>
+              <a:rPr lang="zh-CN" altLang="en-US" sz="3000" b="1" dirty="0">
+                <a:solidFill>
+                  <a:srgbClr val="1C2430"/>
+                </a:solidFill>
+                <a:latin typeface="Noto Sans CJK SC" pitchFamily="34" charset="0"/>
+                <a:ea typeface="Noto Sans CJK SC" pitchFamily="34" charset="-122"/>
+                <a:cs typeface="Noto Sans CJK SC" pitchFamily="34" charset="-120"/>
+              </a:rPr>
+              <a:t>错误类型与任务分母</a:t>
+            </a:r>
+            <a:endParaRPr lang="zh-CN" sz="3000" dirty="0"/>
           </a:p>
         </p:txBody>
       </p:sp>
       <p:sp>
         <p:nvSpPr>
-          <p:cNvPr id="5" name="T24/title"/>
-          <p:cNvSpPr/>
-          <p:nvPr/>
-        </p:nvSpPr>
-        <p:spPr>
-          <a:xfrm>
-            <a:off x="457200" y="381000"/>
-            <a:ext cx="11277600" cy="400050"/>
-          </a:xfrm>
-          <a:prstGeom prst="rect">
+          <p:cNvPr id="5" name="T24/header-rule"/>
+          <p:cNvSpPr/>
+          <p:nvPr/>
+        </p:nvSpPr>
+        <p:spPr>
+          <a:xfrm>
+            <a:off x="457200" y="752475"/>
+            <a:ext cx="11277600" cy="0"/>
+          </a:xfrm>
+          <a:prstGeom prst="line">
             <a:avLst/>
           </a:prstGeom>
           <a:noFill/>
-          <a:ln/>
-        </p:spPr>
-        <p:txBody>
-          <a:bodyPr wrap="none" lIns="0" tIns="0" rIns="0" bIns="0" rtlCol="0" anchor="t"/>
-          <a:lstStyle/>
-          <a:p>
-            <a:pPr algn="l" indent="0" marL="0">
-              <a:lnSpc>
-                <a:spcPts val="2856"/>
-              </a:lnSpc>
-              <a:buNone/>
-            </a:pPr>
-            <a:r>
-              <a:rPr lang="zh-CN" altLang="en-US" sz="2550" b="1" dirty="0">
-                <a:solidFill>
-                  <a:srgbClr val="1C2430"/>
-                </a:solidFill>
-                <a:latin typeface="Noto Sans CJK SC" pitchFamily="34" charset="0"/>
-                <a:ea typeface="Noto Sans CJK SC" pitchFamily="34" charset="-122"/>
-                <a:cs typeface="Noto Sans CJK SC" pitchFamily="34" charset="-120"/>
-              </a:rPr>
-              <a:t>错误类型与任务分母</a:t>
-            </a:r>
-            <a:endParaRPr lang="zh-CN" sz="2550" dirty="0"/>
-          </a:p>
-        </p:txBody>
-      </p:sp>
-      <p:sp>
-        <p:nvSpPr>
-          <p:cNvPr id="6" name="T24/header-rule"/>
-          <p:cNvSpPr/>
-          <p:nvPr/>
-        </p:nvSpPr>
-        <p:spPr>
-          <a:xfrm>
-            <a:off x="457200" y="876300"/>
-            <a:ext cx="11277600" cy="0"/>
+          <a:ln w="10478">
+            <a:solidFill>
+              <a:srgbClr val="BEC8D4"/>
+            </a:solidFill>
+            <a:prstDash val="solid"/>
+          </a:ln>
+        </p:spPr>
+      </p:sp>
+      <p:sp>
+        <p:nvSpPr>
+          <p:cNvPr id="6" name="T24/header-accent"/>
+          <p:cNvSpPr/>
+          <p:nvPr/>
+        </p:nvSpPr>
+        <p:spPr>
+          <a:xfrm>
+            <a:off x="457200" y="752475"/>
+            <a:ext cx="704850" cy="0"/>
           </a:xfrm>
           <a:prstGeom prst="line">
             <a:avLst/>
           </a:prstGeom>
           <a:noFill/>
-          <a:ln w="11430">
+          <a:ln w="28575">
             <a:solidFill>
               <a:srgbClr val="173C70"/>
             </a:solidFill>
@@ -8055,18 +8370,18 @@
           </p:nvPr>
         </p:nvGraphicFramePr>
         <p:xfrm>
-          <a:off x="457200" y="1390650"/>
-          <a:ext cx="6858000" cy="3072194"/>
+          <a:off x="457200" y="2275046"/>
+          <a:ext cx="11277600" cy="1602486"/>
         </p:xfrm>
         <a:graphic>
           <a:graphicData uri="http://schemas.openxmlformats.org/drawingml/2006/table">
             <a:tbl>
               <a:tblPr/>
               <a:tblGrid>
-                <a:gridCol w="1714500"/>
-                <a:gridCol w="1714500"/>
-                <a:gridCol w="1714500"/>
-                <a:gridCol w="1714500"/>
+                <a:gridCol w="2819400"/>
+                <a:gridCol w="2819400"/>
+                <a:gridCol w="2819400"/>
+                <a:gridCol w="2819400"/>
               </a:tblGrid>
               <a:tr h="400622">
                 <a:tc>
@@ -8306,7 +8621,7 @@
                   </a:tcPr>
                 </a:tc>
               </a:tr>
-              <a:tr h="667893">
+              <a:tr h="400622">
                 <a:tc>
                   <a:txBody>
                     <a:bodyPr/>
@@ -8486,31 +8801,7 @@
                           <a:ea typeface="Noto Sans CJK SC" pitchFamily="34" charset="-122"/>
                           <a:cs typeface="Noto Sans CJK SC" pitchFamily="34" charset="-120"/>
                         </a:rPr>
-                        <a:t>原始输入与缺</a:t>
-                      </a:r>
-                      <a:endParaRPr lang="zh-CN" sz="1725" dirty="0">
-                        <a:latin typeface="Noto Sans CJK SC" charset="0"/>
-                        <a:ea typeface="Noto Sans CJK SC" charset="0"/>
-                        <a:cs typeface="Noto Sans CJK SC" charset="0"/>
-                      </a:endParaRPr>
-                    </a:p>
-                    <a:p>
-                      <a:pPr algn="l" indent="0" marL="0">
-                        <a:lnSpc>
-                          <a:spcPts val="2105"/>
-                        </a:lnSpc>
-                        <a:buNone/>
-                      </a:pPr>
-                      <a:r>
-                        <a:rPr lang="zh-CN" altLang="en-US" sz="1725" dirty="0">
-                          <a:solidFill>
-                            <a:srgbClr val="1C2430"/>
-                          </a:solidFill>
-                          <a:latin typeface="Noto Sans CJK SC" pitchFamily="34" charset="0"/>
-                          <a:ea typeface="Noto Sans CJK SC" pitchFamily="34" charset="-122"/>
-                          <a:cs typeface="Noto Sans CJK SC" pitchFamily="34" charset="-120"/>
-                        </a:rPr>
-                        <a:t>失</a:t>
+                        <a:t>原始输入与缺失</a:t>
                       </a:r>
                       <a:endParaRPr lang="zh-CN" sz="1725" dirty="0">
                         <a:latin typeface="Noto Sans CJK SC" charset="0"/>
@@ -8544,7 +8835,7 @@
                   </a:tcPr>
                 </a:tc>
               </a:tr>
-              <a:tr h="667893">
+              <a:tr h="400622">
                 <a:tc>
                   <a:txBody>
                     <a:bodyPr/>
@@ -8724,31 +9015,7 @@
                           <a:ea typeface="Noto Sans CJK SC" pitchFamily="34" charset="-122"/>
                           <a:cs typeface="Noto Sans CJK SC" pitchFamily="34" charset="-120"/>
                         </a:rPr>
-                        <a:t>参数、日志与</a:t>
-                      </a:r>
-                      <a:endParaRPr lang="zh-CN" sz="1725" dirty="0">
-                        <a:latin typeface="Noto Sans CJK SC" charset="0"/>
-                        <a:ea typeface="Noto Sans CJK SC" charset="0"/>
-                        <a:cs typeface="Noto Sans CJK SC" charset="0"/>
-                      </a:endParaRPr>
-                    </a:p>
-                    <a:p>
-                      <a:pPr algn="l" indent="0" marL="0">
-                        <a:lnSpc>
-                          <a:spcPts val="2105"/>
-                        </a:lnSpc>
-                        <a:buNone/>
-                      </a:pPr>
-                      <a:r>
-                        <a:rPr lang="zh-CN" altLang="en-US" sz="1725" dirty="0">
-                          <a:solidFill>
-                            <a:srgbClr val="1C2430"/>
-                          </a:solidFill>
-                          <a:latin typeface="Noto Sans CJK SC" pitchFamily="34" charset="0"/>
-                          <a:ea typeface="Noto Sans CJK SC" pitchFamily="34" charset="-122"/>
-                          <a:cs typeface="Noto Sans CJK SC" pitchFamily="34" charset="-120"/>
-                        </a:rPr>
-                        <a:t>异常</a:t>
+                        <a:t>参数、日志与异常</a:t>
                       </a:r>
                       <a:endParaRPr lang="zh-CN" sz="1725" dirty="0">
                         <a:latin typeface="Noto Sans CJK SC" charset="0"/>
@@ -8782,7 +9049,7 @@
                   </a:tcPr>
                 </a:tc>
               </a:tr>
-              <a:tr h="667893">
+              <a:tr h="400622">
                 <a:tc>
                   <a:txBody>
                     <a:bodyPr/>
@@ -8804,244 +9071,6 @@
                           <a:cs typeface="Noto Sans CJK SC" pitchFamily="34" charset="-120"/>
                         </a:rPr>
                         <a:t>结果解释</a:t>
-                      </a:r>
-                      <a:endParaRPr lang="zh-CN" sz="1725" dirty="0">
-                        <a:latin typeface="Noto Sans CJK SC" charset="0"/>
-                        <a:ea typeface="Noto Sans CJK SC" charset="0"/>
-                        <a:cs typeface="Noto Sans CJK SC" charset="0"/>
-                      </a:endParaRPr>
-                    </a:p>
-                  </a:txBody>
-                  <a:tcPr marL="95250" marR="95250" marT="66675" marB="66675" anchor="t">
-                    <a:lnL w="0" cap="flat" cmpd="sng" algn="ctr">
-                      <a:noFill/>
-                    </a:lnL>
-                    <a:lnR w="0" cap="flat" cmpd="sng" algn="ctr">
-                      <a:noFill/>
-                    </a:lnR>
-                    <a:lnT w="0" cap="flat" cmpd="sng" algn="ctr">
-                      <a:noFill/>
-                    </a:lnT>
-                    <a:lnB w="6668" cap="flat" cmpd="sng" algn="ctr">
-                      <a:solidFill>
-                        <a:srgbClr val="BEC8D4"/>
-                      </a:solidFill>
-                      <a:prstDash val="solid"/>
-                      <a:round/>
-                      <a:headEnd type="none" w="med" len="med"/>
-                      <a:tailEnd type="none" w="med" len="med"/>
-                    </a:lnB>
-                    <a:solidFill>
-                      <a:srgbClr val="FFFFFF"/>
-                    </a:solidFill>
-                  </a:tcPr>
-                </a:tc>
-                <a:tc>
-                  <a:txBody>
-                    <a:bodyPr/>
-                    <a:lstStyle/>
-                    <a:p>
-                      <a:pPr algn="l" indent="0" marL="0">
-                        <a:lnSpc>
-                          <a:spcPts val="2105"/>
-                        </a:lnSpc>
-                        <a:buNone/>
-                      </a:pPr>
-                      <a:r>
-                        <a:rPr lang="zh-CN" altLang="en-US" sz="1725" dirty="0">
-                          <a:solidFill>
-                            <a:srgbClr val="1C2430"/>
-                          </a:solidFill>
-                          <a:latin typeface="Noto Sans CJK SC" pitchFamily="34" charset="0"/>
-                          <a:ea typeface="Noto Sans CJK SC" pitchFamily="34" charset="-122"/>
-                          <a:cs typeface="Noto Sans CJK SC" pitchFamily="34" charset="-120"/>
-                        </a:rPr>
-                        <a:t>10</a:t>
-                      </a:r>
-                      <a:endParaRPr lang="zh-CN" sz="1725" dirty="0">
-                        <a:latin typeface="Noto Sans CJK SC" charset="0"/>
-                        <a:ea typeface="Noto Sans CJK SC" charset="0"/>
-                        <a:cs typeface="Noto Sans CJK SC" charset="0"/>
-                      </a:endParaRPr>
-                    </a:p>
-                  </a:txBody>
-                  <a:tcPr marL="95250" marR="95250" marT="66675" marB="66675" anchor="t">
-                    <a:lnL w="0" cap="flat" cmpd="sng" algn="ctr">
-                      <a:noFill/>
-                    </a:lnL>
-                    <a:lnR w="0" cap="flat" cmpd="sng" algn="ctr">
-                      <a:noFill/>
-                    </a:lnR>
-                    <a:lnT w="0" cap="flat" cmpd="sng" algn="ctr">
-                      <a:noFill/>
-                    </a:lnT>
-                    <a:lnB w="6668" cap="flat" cmpd="sng" algn="ctr">
-                      <a:solidFill>
-                        <a:srgbClr val="BEC8D4"/>
-                      </a:solidFill>
-                      <a:prstDash val="solid"/>
-                      <a:round/>
-                      <a:headEnd type="none" w="med" len="med"/>
-                      <a:tailEnd type="none" w="med" len="med"/>
-                    </a:lnB>
-                    <a:solidFill>
-                      <a:srgbClr val="FFFFFF"/>
-                    </a:solidFill>
-                  </a:tcPr>
-                </a:tc>
-                <a:tc>
-                  <a:txBody>
-                    <a:bodyPr/>
-                    <a:lstStyle/>
-                    <a:p>
-                      <a:pPr algn="l" indent="0" marL="0">
-                        <a:lnSpc>
-                          <a:spcPts val="2105"/>
-                        </a:lnSpc>
-                        <a:buNone/>
-                      </a:pPr>
-                      <a:r>
-                        <a:rPr lang="zh-CN" altLang="en-US" sz="1725" dirty="0">
-                          <a:solidFill>
-                            <a:srgbClr val="1C2430"/>
-                          </a:solidFill>
-                          <a:latin typeface="Noto Sans CJK SC" pitchFamily="34" charset="0"/>
-                          <a:ea typeface="Noto Sans CJK SC" pitchFamily="34" charset="-122"/>
-                          <a:cs typeface="Noto Sans CJK SC" pitchFamily="34" charset="-120"/>
-                        </a:rPr>
-                        <a:t>3</a:t>
-                      </a:r>
-                      <a:endParaRPr lang="zh-CN" sz="1725" dirty="0">
-                        <a:latin typeface="Noto Sans CJK SC" charset="0"/>
-                        <a:ea typeface="Noto Sans CJK SC" charset="0"/>
-                        <a:cs typeface="Noto Sans CJK SC" charset="0"/>
-                      </a:endParaRPr>
-                    </a:p>
-                  </a:txBody>
-                  <a:tcPr marL="95250" marR="95250" marT="66675" marB="66675" anchor="t">
-                    <a:lnL w="0" cap="flat" cmpd="sng" algn="ctr">
-                      <a:noFill/>
-                    </a:lnL>
-                    <a:lnR w="0" cap="flat" cmpd="sng" algn="ctr">
-                      <a:noFill/>
-                    </a:lnR>
-                    <a:lnT w="0" cap="flat" cmpd="sng" algn="ctr">
-                      <a:noFill/>
-                    </a:lnT>
-                    <a:lnB w="6668" cap="flat" cmpd="sng" algn="ctr">
-                      <a:solidFill>
-                        <a:srgbClr val="BEC8D4"/>
-                      </a:solidFill>
-                      <a:prstDash val="solid"/>
-                      <a:round/>
-                      <a:headEnd type="none" w="med" len="med"/>
-                      <a:tailEnd type="none" w="med" len="med"/>
-                    </a:lnB>
-                    <a:solidFill>
-                      <a:srgbClr val="FFFFFF"/>
-                    </a:solidFill>
-                  </a:tcPr>
-                </a:tc>
-                <a:tc>
-                  <a:txBody>
-                    <a:bodyPr/>
-                    <a:lstStyle/>
-                    <a:p>
-                      <a:pPr algn="l" indent="0" marL="0">
-                        <a:lnSpc>
-                          <a:spcPts val="2105"/>
-                        </a:lnSpc>
-                        <a:buNone/>
-                      </a:pPr>
-                      <a:r>
-                        <a:rPr lang="zh-CN" altLang="en-US" sz="1725" dirty="0">
-                          <a:solidFill>
-                            <a:srgbClr val="1C2430"/>
-                          </a:solidFill>
-                          <a:latin typeface="Noto Sans CJK SC" pitchFamily="34" charset="0"/>
-                          <a:ea typeface="Noto Sans CJK SC" pitchFamily="34" charset="-122"/>
-                          <a:cs typeface="Noto Sans CJK SC" pitchFamily="34" charset="-120"/>
-                        </a:rPr>
-                        <a:t>答案与数据来</a:t>
-                      </a:r>
-                      <a:endParaRPr lang="zh-CN" sz="1725" dirty="0">
-                        <a:latin typeface="Noto Sans CJK SC" charset="0"/>
-                        <a:ea typeface="Noto Sans CJK SC" charset="0"/>
-                        <a:cs typeface="Noto Sans CJK SC" charset="0"/>
-                      </a:endParaRPr>
-                    </a:p>
-                    <a:p>
-                      <a:pPr algn="l" indent="0" marL="0">
-                        <a:lnSpc>
-                          <a:spcPts val="2105"/>
-                        </a:lnSpc>
-                        <a:buNone/>
-                      </a:pPr>
-                      <a:r>
-                        <a:rPr lang="zh-CN" altLang="en-US" sz="1725" dirty="0">
-                          <a:solidFill>
-                            <a:srgbClr val="1C2430"/>
-                          </a:solidFill>
-                          <a:latin typeface="Noto Sans CJK SC" pitchFamily="34" charset="0"/>
-                          <a:ea typeface="Noto Sans CJK SC" pitchFamily="34" charset="-122"/>
-                          <a:cs typeface="Noto Sans CJK SC" pitchFamily="34" charset="-120"/>
-                        </a:rPr>
-                        <a:t>源</a:t>
-                      </a:r>
-                      <a:endParaRPr lang="zh-CN" sz="1725" dirty="0">
-                        <a:latin typeface="Noto Sans CJK SC" charset="0"/>
-                        <a:ea typeface="Noto Sans CJK SC" charset="0"/>
-                        <a:cs typeface="Noto Sans CJK SC" charset="0"/>
-                      </a:endParaRPr>
-                    </a:p>
-                  </a:txBody>
-                  <a:tcPr marL="95250" marR="95250" marT="66675" marB="66675" anchor="t">
-                    <a:lnL w="0" cap="flat" cmpd="sng" algn="ctr">
-                      <a:noFill/>
-                    </a:lnL>
-                    <a:lnR w="0" cap="flat" cmpd="sng" algn="ctr">
-                      <a:noFill/>
-                    </a:lnR>
-                    <a:lnT w="0" cap="flat" cmpd="sng" algn="ctr">
-                      <a:noFill/>
-                    </a:lnT>
-                    <a:lnB w="6668" cap="flat" cmpd="sng" algn="ctr">
-                      <a:solidFill>
-                        <a:srgbClr val="BEC8D4"/>
-                      </a:solidFill>
-                      <a:prstDash val="solid"/>
-                      <a:round/>
-                      <a:headEnd type="none" w="med" len="med"/>
-                      <a:tailEnd type="none" w="med" len="med"/>
-                    </a:lnB>
-                    <a:solidFill>
-                      <a:srgbClr val="FFFFFF"/>
-                    </a:solidFill>
-                  </a:tcPr>
-                </a:tc>
-              </a:tr>
-              <a:tr h="667893">
-                <a:tc>
-                  <a:txBody>
-                    <a:bodyPr/>
-                    <a:lstStyle/>
-                    <a:p>
-                      <a:pPr algn="l" indent="0" marL="0">
-                        <a:lnSpc>
-                          <a:spcPts val="2105"/>
-                        </a:lnSpc>
-                        <a:buNone/>
-                      </a:pPr>
-                      <a:r>
-                        <a:rPr lang="zh-CN" altLang="en-US" sz="1725" dirty="0">
-                          <a:solidFill>
-                            <a:srgbClr val="1C2430"/>
-                          </a:solidFill>
-                          <a:latin typeface="Noto Sans CJK SC" pitchFamily="34" charset="0"/>
-                          <a:ea typeface="Noto Sans CJK SC" pitchFamily="34" charset="-122"/>
-                          <a:cs typeface="Noto Sans CJK SC" pitchFamily="34" charset="-120"/>
-                        </a:rPr>
-                        <a:t>最终交付</a:t>
                       </a:r>
                       <a:endParaRPr lang="zh-CN" sz="1725" dirty="0">
                         <a:latin typeface="Noto Sans CJK SC" charset="0"/>
@@ -9147,7 +9176,7 @@
                           <a:ea typeface="Noto Sans CJK SC" pitchFamily="34" charset="-122"/>
                           <a:cs typeface="Noto Sans CJK SC" pitchFamily="34" charset="-120"/>
                         </a:rPr>
-                        <a:t>1</a:t>
+                        <a:t>3</a:t>
                       </a:r>
                       <a:endParaRPr lang="zh-CN" sz="1725" dirty="0">
                         <a:latin typeface="Noto Sans CJK SC" charset="0"/>
@@ -9200,31 +9229,7 @@
                           <a:ea typeface="Noto Sans CJK SC" pitchFamily="34" charset="-122"/>
                           <a:cs typeface="Noto Sans CJK SC" pitchFamily="34" charset="-120"/>
                         </a:rPr>
-                        <a:t>完整性与可复</a:t>
-                      </a:r>
-                      <a:endParaRPr lang="zh-CN" sz="1725" dirty="0">
-                        <a:latin typeface="Noto Sans CJK SC" charset="0"/>
-                        <a:ea typeface="Noto Sans CJK SC" charset="0"/>
-                        <a:cs typeface="Noto Sans CJK SC" charset="0"/>
-                      </a:endParaRPr>
-                    </a:p>
-                    <a:p>
-                      <a:pPr algn="l" indent="0" marL="0">
-                        <a:lnSpc>
-                          <a:spcPts val="2105"/>
-                        </a:lnSpc>
-                        <a:buNone/>
-                      </a:pPr>
-                      <a:r>
-                        <a:rPr lang="zh-CN" altLang="en-US" sz="1725" dirty="0">
-                          <a:solidFill>
-                            <a:srgbClr val="1C2430"/>
-                          </a:solidFill>
-                          <a:latin typeface="Noto Sans CJK SC" pitchFamily="34" charset="0"/>
-                          <a:ea typeface="Noto Sans CJK SC" pitchFamily="34" charset="-122"/>
-                          <a:cs typeface="Noto Sans CJK SC" pitchFamily="34" charset="-120"/>
-                        </a:rPr>
-                        <a:t>现性</a:t>
+                        <a:t>答案与数据来源</a:t>
                       </a:r>
                       <a:endParaRPr lang="zh-CN" sz="1725" dirty="0">
                         <a:latin typeface="Noto Sans CJK SC" charset="0"/>
@@ -9270,8 +9275,8 @@
         </p:nvSpPr>
         <p:spPr>
           <a:xfrm>
-            <a:off x="457200" y="4529519"/>
-            <a:ext cx="6858000" cy="209550"/>
+            <a:off x="457200" y="3944207"/>
+            <a:ext cx="11277600" cy="209550"/>
           </a:xfrm>
           <a:prstGeom prst="rect">
             <a:avLst/>
@@ -9312,8 +9317,8 @@
         </p:nvSpPr>
         <p:spPr>
           <a:xfrm>
-            <a:off x="7696200" y="1390650"/>
-            <a:ext cx="4038600" cy="2000250"/>
+            <a:off x="457200" y="4363307"/>
+            <a:ext cx="5467350" cy="1760696"/>
           </a:xfrm>
           <a:prstGeom prst="rect">
             <a:avLst/>
@@ -9337,14 +9342,14 @@
         </p:nvSpPr>
         <p:spPr>
           <a:xfrm>
-            <a:off x="7705725" y="1400175"/>
-            <a:ext cx="4019550" cy="371475"/>
+            <a:off x="466725" y="4372832"/>
+            <a:ext cx="5448300" cy="371475"/>
           </a:xfrm>
           <a:prstGeom prst="rect">
             <a:avLst/>
           </a:prstGeom>
           <a:solidFill>
-            <a:srgbClr val="EEF3F8"/>
+            <a:srgbClr val="EAF2FA"/>
           </a:solidFill>
           <a:ln w="12700">
             <a:solidFill>
@@ -9364,8 +9369,8 @@
         </p:nvSpPr>
         <p:spPr>
           <a:xfrm>
-            <a:off x="7696200" y="1771650"/>
-            <a:ext cx="4038600" cy="0"/>
+            <a:off x="457200" y="4744307"/>
+            <a:ext cx="5467350" cy="0"/>
           </a:xfrm>
           <a:prstGeom prst="line">
             <a:avLst/>
@@ -9387,8 +9392,8 @@
         </p:nvSpPr>
         <p:spPr>
           <a:xfrm>
-            <a:off x="7820025" y="1447800"/>
-            <a:ext cx="3790950" cy="276225"/>
+            <a:off x="581025" y="4410932"/>
+            <a:ext cx="5219700" cy="295275"/>
           </a:xfrm>
           <a:prstGeom prst="rect">
             <a:avLst/>
@@ -9402,14 +9407,14 @@
           <a:p>
             <a:pPr algn="l" indent="0" marL="0">
               <a:lnSpc>
-                <a:spcPts val="2070"/>
-              </a:lnSpc>
-              <a:buNone/>
-            </a:pPr>
-            <a:r>
-              <a:rPr lang="zh-CN" altLang="en-US" sz="1800" b="1" dirty="0">
-                <a:solidFill>
-                  <a:srgbClr val="173C70"/>
+                <a:spcPts val="2242"/>
+              </a:lnSpc>
+              <a:buNone/>
+            </a:pPr>
+            <a:r>
+              <a:rPr lang="zh-CN" altLang="en-US" sz="1950" b="1" dirty="0">
+                <a:solidFill>
+                  <a:srgbClr val="235E96"/>
                 </a:solidFill>
                 <a:latin typeface="Noto Sans CJK SC" pitchFamily="34" charset="0"/>
                 <a:ea typeface="Noto Sans CJK SC" pitchFamily="34" charset="-122"/>
@@ -9417,7 +9422,7 @@
               </a:rPr>
               <a:t>评价者与尺度</a:t>
             </a:r>
-            <a:endParaRPr lang="zh-CN" sz="1800" dirty="0"/>
+            <a:endParaRPr lang="zh-CN" sz="1950" dirty="0"/>
           </a:p>
         </p:txBody>
       </p:sp>
@@ -9429,8 +9434,8 @@
         </p:nvSpPr>
         <p:spPr>
           <a:xfrm>
-            <a:off x="7829550" y="1885950"/>
-            <a:ext cx="3771900" cy="1409700"/>
+            <a:off x="590550" y="4849082"/>
+            <a:ext cx="5200650" cy="1179671"/>
           </a:xfrm>
           <a:prstGeom prst="rect">
             <a:avLst/>
@@ -9444,12 +9449,12 @@
           <a:p>
             <a:pPr algn="l" indent="0" marL="0">
               <a:lnSpc>
-                <a:spcPts val="2139"/>
-              </a:lnSpc>
-              <a:buNone/>
-            </a:pPr>
-            <a:r>
-              <a:rPr lang="zh-CN" altLang="en-US" sz="1725" dirty="0">
+                <a:spcPts val="2232"/>
+              </a:lnSpc>
+              <a:buNone/>
+            </a:pPr>
+            <a:r>
+              <a:rPr lang="zh-CN" altLang="en-US" sz="1800" dirty="0">
                 <a:solidFill>
                   <a:srgbClr val="1C2430"/>
                 </a:solidFill>
@@ -9459,17 +9464,17 @@
               </a:rPr>
               <a:t>人工、程序和模型评分分别记录</a:t>
             </a:r>
-            <a:endParaRPr lang="zh-CN" sz="1725" dirty="0"/>
+            <a:endParaRPr lang="zh-CN" sz="1800" dirty="0"/>
           </a:p>
           <a:p>
             <a:pPr algn="l" indent="0" marL="0">
               <a:lnSpc>
-                <a:spcPts val="2139"/>
-              </a:lnSpc>
-              <a:buNone/>
-            </a:pPr>
-            <a:r>
-              <a:rPr lang="zh-CN" altLang="en-US" sz="1725" dirty="0">
+                <a:spcPts val="2232"/>
+              </a:lnSpc>
+              <a:buNone/>
+            </a:pPr>
+            <a:r>
+              <a:rPr lang="zh-CN" altLang="en-US" sz="1800" dirty="0">
                 <a:solidFill>
                   <a:srgbClr val="1C2430"/>
                 </a:solidFill>
@@ -9479,17 +9484,17 @@
               </a:rPr>
               <a:t>说明评分规则与是否盲评</a:t>
             </a:r>
-            <a:endParaRPr lang="zh-CN" sz="1725" dirty="0"/>
+            <a:endParaRPr lang="zh-CN" sz="1800" dirty="0"/>
           </a:p>
           <a:p>
             <a:pPr algn="l" indent="0" marL="0">
               <a:lnSpc>
-                <a:spcPts val="2139"/>
-              </a:lnSpc>
-              <a:buNone/>
-            </a:pPr>
-            <a:r>
-              <a:rPr lang="zh-CN" altLang="en-US" sz="1725" dirty="0">
+                <a:spcPts val="2232"/>
+              </a:lnSpc>
+              <a:buNone/>
+            </a:pPr>
+            <a:r>
+              <a:rPr lang="zh-CN" altLang="en-US" sz="1800" dirty="0">
                 <a:solidFill>
                   <a:srgbClr val="1C2430"/>
                 </a:solidFill>
@@ -9499,7 +9504,7 @@
               </a:rPr>
               <a:t>任务完成和答案正确应分别评价</a:t>
             </a:r>
-            <a:endParaRPr lang="zh-CN" sz="1725" dirty="0"/>
+            <a:endParaRPr lang="zh-CN" sz="1800" dirty="0"/>
           </a:p>
         </p:txBody>
       </p:sp>
@@ -9511,8 +9516,8 @@
         </p:nvSpPr>
         <p:spPr>
           <a:xfrm>
-            <a:off x="7696200" y="3752850"/>
-            <a:ext cx="4038600" cy="2247900"/>
+            <a:off x="6248400" y="4477607"/>
+            <a:ext cx="5486400" cy="1646396"/>
           </a:xfrm>
           <a:prstGeom prst="rect">
             <a:avLst/>
@@ -9536,14 +9541,14 @@
         </p:nvSpPr>
         <p:spPr>
           <a:xfrm>
-            <a:off x="7810500" y="3638550"/>
-            <a:ext cx="2095500" cy="320040"/>
+            <a:off x="6362700" y="4363307"/>
+            <a:ext cx="1257300" cy="342900"/>
           </a:xfrm>
           <a:prstGeom prst="rect">
             <a:avLst/>
           </a:prstGeom>
           <a:solidFill>
-            <a:srgbClr val="903543"/>
+            <a:srgbClr val="A24736"/>
           </a:solidFill>
           <a:ln w="12700">
             <a:solidFill>
@@ -9563,8 +9568,8 @@
         </p:nvSpPr>
         <p:spPr>
           <a:xfrm>
-            <a:off x="7915275" y="3667125"/>
-            <a:ext cx="1885950" cy="262890"/>
+            <a:off x="6467475" y="4391882"/>
+            <a:ext cx="1047750" cy="285750"/>
           </a:xfrm>
           <a:prstGeom prst="rect">
             <a:avLst/>
@@ -9578,12 +9583,12 @@
           <a:p>
             <a:pPr algn="l" indent="0" marL="0">
               <a:lnSpc>
-                <a:spcPts val="2070"/>
-              </a:lnSpc>
-              <a:buNone/>
-            </a:pPr>
-            <a:r>
-              <a:rPr lang="zh-CN" altLang="en-US" sz="1800" b="1" dirty="0">
+                <a:spcPts val="2242"/>
+              </a:lnSpc>
+              <a:buNone/>
+            </a:pPr>
+            <a:r>
+              <a:rPr lang="zh-CN" altLang="en-US" sz="1950" b="1" dirty="0">
                 <a:solidFill>
                   <a:srgbClr val="FFFFFF"/>
                 </a:solidFill>
@@ -9591,9 +9596,9 @@
                 <a:ea typeface="Noto Sans CJK SC" pitchFamily="34" charset="-122"/>
                 <a:cs typeface="Noto Sans CJK SC" pitchFamily="34" charset="-120"/>
               </a:rPr>
-              <a:t>失败集中在哪一步</a:t>
-            </a:r>
-            <a:endParaRPr lang="zh-CN" sz="1800" dirty="0"/>
+              <a:t>失败环节</a:t>
+            </a:r>
+            <a:endParaRPr lang="zh-CN" sz="1950" dirty="0"/>
           </a:p>
         </p:txBody>
       </p:sp>
@@ -9605,8 +9610,8 @@
         </p:nvSpPr>
         <p:spPr>
           <a:xfrm>
-            <a:off x="7829550" y="4101465"/>
-            <a:ext cx="3771900" cy="1804035"/>
+            <a:off x="6381750" y="4849082"/>
+            <a:ext cx="5219700" cy="1179671"/>
           </a:xfrm>
           <a:prstGeom prst="rect">
             <a:avLst/>
@@ -9620,12 +9625,12 @@
           <a:p>
             <a:pPr algn="l" indent="0" marL="0">
               <a:lnSpc>
-                <a:spcPts val="2139"/>
-              </a:lnSpc>
-              <a:buNone/>
-            </a:pPr>
-            <a:r>
-              <a:rPr lang="zh-CN" altLang="en-US" sz="1725" dirty="0">
+                <a:spcPts val="2232"/>
+              </a:lnSpc>
+              <a:buNone/>
+            </a:pPr>
+            <a:r>
+              <a:rPr lang="zh-CN" altLang="en-US" sz="1800" dirty="0">
                 <a:solidFill>
                   <a:srgbClr val="1C2430"/>
                 </a:solidFill>
@@ -9635,17 +9640,17 @@
               </a:rPr>
               <a:t>将错误对应到数据、计划、工具或读图</a:t>
             </a:r>
-            <a:endParaRPr lang="zh-CN" sz="1725" dirty="0"/>
+            <a:endParaRPr lang="zh-CN" sz="1800" dirty="0"/>
           </a:p>
           <a:p>
             <a:pPr algn="l" indent="0" marL="0">
               <a:lnSpc>
-                <a:spcPts val="2139"/>
-              </a:lnSpc>
-              <a:buNone/>
-            </a:pPr>
-            <a:r>
-              <a:rPr lang="zh-CN" altLang="en-US" sz="1725" dirty="0">
+                <a:spcPts val="2232"/>
+              </a:lnSpc>
+              <a:buNone/>
+            </a:pPr>
+            <a:r>
+              <a:rPr lang="zh-CN" altLang="en-US" sz="1800" dirty="0">
                 <a:solidFill>
                   <a:srgbClr val="1C2430"/>
                 </a:solidFill>
@@ -9653,19 +9658,33 @@
                 <a:ea typeface="Noto Sans CJK SC" pitchFamily="34" charset="-122"/>
                 <a:cs typeface="Noto Sans CJK SC" pitchFamily="34" charset="-120"/>
               </a:rPr>
-              <a:t>记录可复现的输入和失败输出</a:t>
-            </a:r>
-            <a:endParaRPr lang="zh-CN" sz="1725" dirty="0"/>
-          </a:p>
-          <a:p>
+              <a:t>记录可复现的</a:t>
+            </a:r>
             <a:pPr algn="l" indent="0" marL="0">
               <a:lnSpc>
-                <a:spcPts val="2139"/>
-              </a:lnSpc>
-              <a:buNone/>
-            </a:pPr>
-            <a:r>
-              <a:rPr lang="zh-CN" altLang="en-US" sz="1725" dirty="0">
+                <a:spcPts val="2232"/>
+              </a:lnSpc>
+              <a:buNone/>
+            </a:pPr>
+            <a:r>
+              <a:rPr lang="zh-CN" altLang="en-US" sz="1800" b="1" dirty="0">
+                <a:solidFill>
+                  <a:srgbClr val="A24736"/>
+                </a:solidFill>
+                <a:latin typeface="Noto Sans CJK SC" pitchFamily="34" charset="0"/>
+                <a:ea typeface="Noto Sans CJK SC" pitchFamily="34" charset="-122"/>
+                <a:cs typeface="Noto Sans CJK SC" pitchFamily="34" charset="-120"/>
+              </a:rPr>
+              <a:t>输入</a:t>
+            </a:r>
+            <a:pPr algn="l" indent="0" marL="0">
+              <a:lnSpc>
+                <a:spcPts val="2232"/>
+              </a:lnSpc>
+              <a:buNone/>
+            </a:pPr>
+            <a:r>
+              <a:rPr lang="zh-CN" altLang="en-US" sz="1800" dirty="0">
                 <a:solidFill>
                   <a:srgbClr val="1C2430"/>
                 </a:solidFill>
@@ -9673,9 +9692,46 @@
                 <a:ea typeface="Noto Sans CJK SC" pitchFamily="34" charset="-122"/>
                 <a:cs typeface="Noto Sans CJK SC" pitchFamily="34" charset="-120"/>
               </a:rPr>
+              <a:t>和失败</a:t>
+            </a:r>
+            <a:pPr algn="l" indent="0" marL="0">
+              <a:lnSpc>
+                <a:spcPts val="2232"/>
+              </a:lnSpc>
+              <a:buNone/>
+            </a:pPr>
+            <a:r>
+              <a:rPr lang="zh-CN" altLang="en-US" sz="1800" b="1" dirty="0">
+                <a:solidFill>
+                  <a:srgbClr val="A24736"/>
+                </a:solidFill>
+                <a:latin typeface="Noto Sans CJK SC" pitchFamily="34" charset="0"/>
+                <a:ea typeface="Noto Sans CJK SC" pitchFamily="34" charset="-122"/>
+                <a:cs typeface="Noto Sans CJK SC" pitchFamily="34" charset="-120"/>
+              </a:rPr>
+              <a:t>输出</a:t>
+            </a:r>
+            <a:endParaRPr lang="zh-CN" sz="1800" dirty="0"/>
+          </a:p>
+          <a:p>
+            <a:pPr algn="l" indent="0" marL="0">
+              <a:lnSpc>
+                <a:spcPts val="2232"/>
+              </a:lnSpc>
+              <a:buNone/>
+            </a:pPr>
+            <a:r>
+              <a:rPr lang="zh-CN" altLang="en-US" sz="1800" dirty="0">
+                <a:solidFill>
+                  <a:srgbClr val="1C2430"/>
+                </a:solidFill>
+                <a:latin typeface="Noto Sans CJK SC" pitchFamily="34" charset="0"/>
+                <a:ea typeface="Noto Sans CJK SC" pitchFamily="34" charset="-122"/>
+                <a:cs typeface="Noto Sans CJK SC" pitchFamily="34" charset="-120"/>
+              </a:rPr>
               <a:t>避免用总分掩盖集中失效的环节</a:t>
             </a:r>
-            <a:endParaRPr lang="zh-CN" sz="1725" dirty="0"/>
+            <a:endParaRPr lang="zh-CN" sz="1800" dirty="0"/>
           </a:p>
         </p:txBody>
       </p:sp>
@@ -9687,8 +9743,8 @@
         </p:nvSpPr>
         <p:spPr>
           <a:xfrm>
-            <a:off x="457200" y="5010150"/>
-            <a:ext cx="6858000" cy="323850"/>
+            <a:off x="457200" y="1146620"/>
+            <a:ext cx="11277600" cy="323850"/>
           </a:xfrm>
           <a:prstGeom prst="rect">
             <a:avLst/>
@@ -9702,14 +9758,14 @@
           <a:p>
             <a:pPr algn="l" indent="0" marL="0">
               <a:lnSpc>
-                <a:spcPts val="2156"/>
-              </a:lnSpc>
-              <a:buNone/>
-            </a:pPr>
-            <a:r>
-              <a:rPr lang="zh-CN" altLang="en-US" sz="1875" b="1" dirty="0">
-                <a:solidFill>
-                  <a:srgbClr val="173C70"/>
+                <a:spcPts val="2242"/>
+              </a:lnSpc>
+              <a:buNone/>
+            </a:pPr>
+            <a:r>
+              <a:rPr lang="zh-CN" altLang="en-US" sz="1950" b="1" dirty="0">
+                <a:solidFill>
+                  <a:srgbClr val="536A7A"/>
                 </a:solidFill>
                 <a:latin typeface="Noto Sans CJK SC" pitchFamily="34" charset="0"/>
                 <a:ea typeface="Noto Sans CJK SC" pitchFamily="34" charset="-122"/>
@@ -9717,7 +9773,7 @@
               </a:rPr>
               <a:t>分母与统计单位</a:t>
             </a:r>
-            <a:endParaRPr lang="zh-CN" sz="1875" dirty="0"/>
+            <a:endParaRPr lang="zh-CN" sz="1950" dirty="0"/>
           </a:p>
         </p:txBody>
       </p:sp>
@@ -9729,8 +9785,8 @@
         </p:nvSpPr>
         <p:spPr>
           <a:xfrm>
-            <a:off x="457200" y="5391150"/>
-            <a:ext cx="6858000" cy="590550"/>
+            <a:off x="457200" y="1527620"/>
+            <a:ext cx="11277600" cy="511397"/>
           </a:xfrm>
           <a:prstGeom prst="rect">
             <a:avLst/>
@@ -9744,12 +9800,12 @@
           <a:p>
             <a:pPr algn="l" indent="0" marL="0">
               <a:lnSpc>
-                <a:spcPts val="2139"/>
-              </a:lnSpc>
-              <a:buNone/>
-            </a:pPr>
-            <a:r>
-              <a:rPr lang="zh-CN" altLang="en-US" sz="1725" dirty="0">
+                <a:spcPts val="2232"/>
+              </a:lnSpc>
+              <a:buNone/>
+            </a:pPr>
+            <a:r>
+              <a:rPr lang="zh-CN" altLang="en-US" sz="1800" dirty="0">
                 <a:solidFill>
                   <a:srgbClr val="1C2430"/>
                 </a:solidFill>
@@ -9757,29 +9813,26 @@
                 <a:ea typeface="Noto Sans CJK SC" pitchFamily="34" charset="-122"/>
                 <a:cs typeface="Noto Sans CJK SC" pitchFamily="34" charset="-120"/>
               </a:rPr>
-              <a:t>报告任务数、重复数与实际评价单位</a:t>
-            </a:r>
-            <a:endParaRPr lang="zh-CN" sz="1725" dirty="0"/>
-          </a:p>
-          <a:p>
+              <a:t>报告任务数、重复数与实际评价</a:t>
+            </a:r>
             <a:pPr algn="l" indent="0" marL="0">
               <a:lnSpc>
-                <a:spcPts val="2139"/>
-              </a:lnSpc>
-              <a:buNone/>
-            </a:pPr>
-            <a:r>
-              <a:rPr lang="zh-CN" altLang="en-US" sz="1725" dirty="0">
-                <a:solidFill>
-                  <a:srgbClr val="1C2430"/>
-                </a:solidFill>
-                <a:latin typeface="Noto Sans CJK SC" pitchFamily="34" charset="0"/>
-                <a:ea typeface="Noto Sans CJK SC" pitchFamily="34" charset="-122"/>
-                <a:cs typeface="Noto Sans CJK SC" pitchFamily="34" charset="-120"/>
-              </a:rPr>
-              <a:t>模板计数仅用于验证表格表达</a:t>
-            </a:r>
-            <a:endParaRPr lang="zh-CN" sz="1725" dirty="0"/>
+                <a:spcPts val="2232"/>
+              </a:lnSpc>
+              <a:buNone/>
+            </a:pPr>
+            <a:r>
+              <a:rPr lang="zh-CN" altLang="en-US" sz="1800" b="1" dirty="0">
+                <a:solidFill>
+                  <a:srgbClr val="536A7A"/>
+                </a:solidFill>
+                <a:latin typeface="Noto Sans CJK SC" pitchFamily="34" charset="0"/>
+                <a:ea typeface="Noto Sans CJK SC" pitchFamily="34" charset="-122"/>
+                <a:cs typeface="Noto Sans CJK SC" pitchFamily="34" charset="-120"/>
+              </a:rPr>
+              <a:t>单位</a:t>
+            </a:r>
+            <a:endParaRPr lang="zh-CN" sz="1800" dirty="0"/>
           </a:p>
         </p:txBody>
       </p:sp>
@@ -9819,7 +9872,7 @@
                 <a:ea typeface="Noto Sans CJK SC" pitchFamily="34" charset="-122"/>
                 <a:cs typeface="Noto Sans CJK SC" pitchFamily="34" charset="-120"/>
               </a:rPr>
-              <a:t>T1 · 2026 · 待替换</a:t>
+              <a:t>T1 · 2026 · 书目占位；图表均为合成示例</a:t>
             </a:r>
             <a:endParaRPr lang="zh-CN" sz="1125" dirty="0"/>
           </a:p>
